--- a/Day5_BehaviourAnalysis_PT2/Presentation/2_IntroAnimalMovements_HMMs.pptx
+++ b/Day5_BehaviourAnalysis_PT2/Presentation/2_IntroAnimalMovements_HMMs.pptx
@@ -6,7 +6,7 @@
     <p:sldMasterId id="2147483660" r:id="rId2"/>
   </p:sldMasterIdLst>
   <p:notesMasterIdLst>
-    <p:notesMasterId r:id="rId23"/>
+    <p:notesMasterId r:id="rId27"/>
   </p:notesMasterIdLst>
   <p:sldIdLst>
     <p:sldId id="256" r:id="rId3"/>
@@ -21,14 +21,18 @@
     <p:sldId id="265" r:id="rId12"/>
     <p:sldId id="266" r:id="rId13"/>
     <p:sldId id="268" r:id="rId14"/>
-    <p:sldId id="267" r:id="rId15"/>
-    <p:sldId id="272" r:id="rId16"/>
-    <p:sldId id="273" r:id="rId17"/>
-    <p:sldId id="271" r:id="rId18"/>
-    <p:sldId id="288" r:id="rId19"/>
-    <p:sldId id="289" r:id="rId20"/>
-    <p:sldId id="277" r:id="rId21"/>
-    <p:sldId id="282" r:id="rId22"/>
+    <p:sldId id="290" r:id="rId15"/>
+    <p:sldId id="291" r:id="rId16"/>
+    <p:sldId id="292" r:id="rId17"/>
+    <p:sldId id="293" r:id="rId18"/>
+    <p:sldId id="267" r:id="rId19"/>
+    <p:sldId id="272" r:id="rId20"/>
+    <p:sldId id="273" r:id="rId21"/>
+    <p:sldId id="271" r:id="rId22"/>
+    <p:sldId id="288" r:id="rId23"/>
+    <p:sldId id="289" r:id="rId24"/>
+    <p:sldId id="277" r:id="rId25"/>
+    <p:sldId id="282" r:id="rId26"/>
   </p:sldIdLst>
   <p:sldSz cx="12192000" cy="6858000"/>
   <p:notesSz cx="6858000" cy="9144000"/>
@@ -220,7 +224,7 @@
           <a:p>
             <a:fld id="{0DC3ADD9-A38B-4BE5-AC76-350827CA9FF8}" type="datetimeFigureOut">
               <a:rPr lang="en-US" smtClean="0"/>
-              <a:t>8/6/2025</a:t>
+              <a:t>7/31/2026</a:t>
             </a:fld>
             <a:endParaRPr lang="en-US"/>
           </a:p>
@@ -1040,7 +1044,7 @@
           <a:p>
             <a:fld id="{42E65689-8240-45C5-BB1A-376E97A4566F}" type="slidenum">
               <a:rPr lang="en-US" smtClean="0"/>
-              <a:t>13</a:t>
+              <a:t>17</a:t>
             </a:fld>
             <a:endParaRPr lang="en-US"/>
           </a:p>
@@ -1135,7 +1139,7 @@
           <a:p>
             <a:fld id="{42E65689-8240-45C5-BB1A-376E97A4566F}" type="slidenum">
               <a:rPr lang="en-US" smtClean="0"/>
-              <a:t>14</a:t>
+              <a:t>18</a:t>
             </a:fld>
             <a:endParaRPr lang="en-US"/>
           </a:p>
@@ -1222,7 +1226,7 @@
           <a:p>
             <a:fld id="{42E65689-8240-45C5-BB1A-376E97A4566F}" type="slidenum">
               <a:rPr lang="en-US" smtClean="0"/>
-              <a:t>15</a:t>
+              <a:t>19</a:t>
             </a:fld>
             <a:endParaRPr lang="en-US"/>
           </a:p>
@@ -1317,7 +1321,7 @@
           <a:p>
             <a:fld id="{42E65689-8240-45C5-BB1A-376E97A4566F}" type="slidenum">
               <a:rPr lang="en-US" smtClean="0"/>
-              <a:t>16</a:t>
+              <a:t>20</a:t>
             </a:fld>
             <a:endParaRPr lang="en-US"/>
           </a:p>
@@ -1412,7 +1416,7 @@
           <a:p>
             <a:fld id="{42E65689-8240-45C5-BB1A-376E97A4566F}" type="slidenum">
               <a:rPr lang="en-US" smtClean="0"/>
-              <a:t>17</a:t>
+              <a:t>21</a:t>
             </a:fld>
             <a:endParaRPr lang="en-US"/>
           </a:p>
@@ -2116,15 +2120,6 @@
           <a:p>
             <a:r>
               <a:rPr lang="en-US" dirty="0"/>
-              <a:t>We also need to specify the starting state.  Common is to simply provide an equal probability of being in any one of the starting states.</a:t>
-            </a:r>
-          </a:p>
-          <a:p>
-            <a:endParaRPr lang="en-US" dirty="0"/>
-          </a:p>
-          <a:p>
-            <a:r>
-              <a:rPr lang="en-US" dirty="0"/>
               <a:t>Then, we need to setup the distributions for step length and turning angles and we need to do this for each of the states.  This means we first need to specify the shape of the distribution.  For the steplengths, we have a few potential distributions to choose from.  A gamma distribution is the default, but we could also choose a Weibull, a log-normal, or an exponential distribution.  These dictate the shape and behavior of the curves.  For Gamma, we then need to provide the mean and variance. </a:t>
             </a:r>
           </a:p>
@@ -2135,15 +2130,6 @@
             <a:r>
               <a:rPr lang="en-US" dirty="0"/>
               <a:t>For our turning angles, we have a few potential distribution options, the von Mises and the wrapped Cauchy.  Both are circular distributions, which require the mean turning angle and the clustering parameter which is similar to the variance of the turning angle distribution.</a:t>
-            </a:r>
-          </a:p>
-          <a:p>
-            <a:endParaRPr lang="en-US" dirty="0"/>
-          </a:p>
-          <a:p>
-            <a:r>
-              <a:rPr lang="en-US" dirty="0"/>
-              <a:t>The Transition probably matrix will then be estimated based on our starting states.  This will be estimated for us once we input all the other values, so we don’t need to put starting values here….these will be estimated.</a:t>
             </a:r>
           </a:p>
         </p:txBody>
@@ -2230,7 +2216,7 @@
           <a:p>
             <a:r>
               <a:rPr lang="en-US" dirty="0"/>
-              <a:t>Once models are run….we can then use what are called decoding algorithms to assess the most likely state for every one of our locations.  As you can imagine, this is very useful.  In R, we have access to three different algorithms, which differ slightly with how they decode the state values.  The default is called the Viterbi algorithm.</a:t>
+              <a:t>Once models are run….we can then use what are called decoding algorithms to assess the most likely state for every one of our locations.  In R, we have access to three different algorithms, which differ slightly with how they decode the state values.  The default is called the Viterbi algorithm.</a:t>
             </a:r>
           </a:p>
           <a:p>
@@ -2239,7 +2225,7 @@
           <a:p>
             <a:r>
               <a:rPr lang="en-US" dirty="0"/>
-              <a:t>We also have access to stationary probabilities.  So instead of assigning a state to every point, we can look at the state probability of each point, oftentimes providing a value of confidence to each particular state assignment.</a:t>
+              <a:t>We also have access to stationary probabilities.  So instead of assigning a state to every point, we can look at the state probability of each point, often times providing a value of confidence to each particular state assignment.</a:t>
             </a:r>
           </a:p>
           <a:p>
@@ -2257,7 +2243,7 @@
           <a:p>
             <a:r>
               <a:rPr lang="en-US" dirty="0"/>
-              <a:t>There is not date/time included in these models……we have to make sure we are feeding the data in an ordered sequence (Chronologically).  As a result, we need to be very careful about irregularly sampled data, as the model won’t differentiate.</a:t>
+              <a:t>There is no date/time included in these models……we have to make sure we are feeding the data in an ordered sequence (Chronologically).  As a result, we need to be very careful about irregularly sampled data, as the model won’t differentiate.</a:t>
             </a:r>
           </a:p>
           <a:p>
@@ -2558,7 +2544,7 @@
           <a:p>
             <a:fld id="{0F40EE0F-3D5D-4E7E-9C3F-44BCD00311B7}" type="datetimeFigureOut">
               <a:rPr lang="en-US" smtClean="0"/>
-              <a:t>8/6/2025</a:t>
+              <a:t>7/31/2026</a:t>
             </a:fld>
             <a:endParaRPr lang="en-US"/>
           </a:p>
@@ -2756,7 +2742,7 @@
           <a:p>
             <a:fld id="{0F40EE0F-3D5D-4E7E-9C3F-44BCD00311B7}" type="datetimeFigureOut">
               <a:rPr lang="en-US" smtClean="0"/>
-              <a:t>8/6/2025</a:t>
+              <a:t>7/31/2026</a:t>
             </a:fld>
             <a:endParaRPr lang="en-US"/>
           </a:p>
@@ -2964,7 +2950,7 @@
           <a:p>
             <a:fld id="{0F40EE0F-3D5D-4E7E-9C3F-44BCD00311B7}" type="datetimeFigureOut">
               <a:rPr lang="en-US" smtClean="0"/>
-              <a:t>8/6/2025</a:t>
+              <a:t>7/31/2026</a:t>
             </a:fld>
             <a:endParaRPr lang="en-US"/>
           </a:p>
@@ -3192,7 +3178,7 @@
           <a:p>
             <a:fld id="{9C09B839-4597-4A24-8E17-71B237D9282C}" type="datetimeFigureOut">
               <a:rPr lang="en-US" smtClean="0"/>
-              <a:t>8/6/2025</a:t>
+              <a:t>7/31/2026</a:t>
             </a:fld>
             <a:endParaRPr lang="en-US"/>
           </a:p>
@@ -3414,7 +3400,7 @@
           <a:p>
             <a:fld id="{9C09B839-4597-4A24-8E17-71B237D9282C}" type="datetimeFigureOut">
               <a:rPr lang="en-US" smtClean="0"/>
-              <a:t>8/6/2025</a:t>
+              <a:t>7/31/2026</a:t>
             </a:fld>
             <a:endParaRPr lang="en-US"/>
           </a:p>
@@ -3713,7 +3699,7 @@
           <a:p>
             <a:fld id="{9C09B839-4597-4A24-8E17-71B237D9282C}" type="datetimeFigureOut">
               <a:rPr lang="en-US" smtClean="0"/>
-              <a:t>8/6/2025</a:t>
+              <a:t>7/31/2026</a:t>
             </a:fld>
             <a:endParaRPr lang="en-US"/>
           </a:p>
@@ -4002,7 +3988,7 @@
           <a:p>
             <a:fld id="{9C09B839-4597-4A24-8E17-71B237D9282C}" type="datetimeFigureOut">
               <a:rPr lang="en-US" smtClean="0"/>
-              <a:t>8/6/2025</a:t>
+              <a:t>7/31/2026</a:t>
             </a:fld>
             <a:endParaRPr lang="en-US"/>
           </a:p>
@@ -4438,7 +4424,7 @@
           <a:p>
             <a:fld id="{9C09B839-4597-4A24-8E17-71B237D9282C}" type="datetimeFigureOut">
               <a:rPr lang="en-US" smtClean="0"/>
-              <a:t>8/6/2025</a:t>
+              <a:t>7/31/2026</a:t>
             </a:fld>
             <a:endParaRPr lang="en-US"/>
           </a:p>
@@ -4603,7 +4589,7 @@
           <a:p>
             <a:fld id="{9C09B839-4597-4A24-8E17-71B237D9282C}" type="datetimeFigureOut">
               <a:rPr lang="en-US" smtClean="0"/>
-              <a:t>8/6/2025</a:t>
+              <a:t>7/31/2026</a:t>
             </a:fld>
             <a:endParaRPr lang="en-US"/>
           </a:p>
@@ -4740,7 +4726,7 @@
           <a:p>
             <a:fld id="{9C09B839-4597-4A24-8E17-71B237D9282C}" type="datetimeFigureOut">
               <a:rPr lang="en-US" smtClean="0"/>
-              <a:t>8/6/2025</a:t>
+              <a:t>7/31/2026</a:t>
             </a:fld>
             <a:endParaRPr lang="en-US"/>
           </a:p>
@@ -5075,7 +5061,7 @@
           <a:p>
             <a:fld id="{9C09B839-4597-4A24-8E17-71B237D9282C}" type="datetimeFigureOut">
               <a:rPr lang="en-US" smtClean="0"/>
-              <a:t>8/6/2025</a:t>
+              <a:t>7/31/2026</a:t>
             </a:fld>
             <a:endParaRPr lang="en-US"/>
           </a:p>
@@ -5289,7 +5275,7 @@
           <a:p>
             <a:fld id="{0F40EE0F-3D5D-4E7E-9C3F-44BCD00311B7}" type="datetimeFigureOut">
               <a:rPr lang="en-US" smtClean="0"/>
-              <a:t>8/6/2025</a:t>
+              <a:t>7/31/2026</a:t>
             </a:fld>
             <a:endParaRPr lang="en-US"/>
           </a:p>
@@ -5585,7 +5571,7 @@
           <a:p>
             <a:fld id="{9C09B839-4597-4A24-8E17-71B237D9282C}" type="datetimeFigureOut">
               <a:rPr lang="en-US" smtClean="0"/>
-              <a:t>8/6/2025</a:t>
+              <a:t>7/31/2026</a:t>
             </a:fld>
             <a:endParaRPr lang="en-US"/>
           </a:p>
@@ -5807,7 +5793,7 @@
           <a:p>
             <a:fld id="{9C09B839-4597-4A24-8E17-71B237D9282C}" type="datetimeFigureOut">
               <a:rPr lang="en-US" smtClean="0"/>
-              <a:t>8/6/2025</a:t>
+              <a:t>7/31/2026</a:t>
             </a:fld>
             <a:endParaRPr lang="en-US"/>
           </a:p>
@@ -6039,7 +6025,7 @@
           <a:p>
             <a:fld id="{9C09B839-4597-4A24-8E17-71B237D9282C}" type="datetimeFigureOut">
               <a:rPr lang="en-US" smtClean="0"/>
-              <a:t>8/6/2025</a:t>
+              <a:t>7/31/2026</a:t>
             </a:fld>
             <a:endParaRPr lang="en-US"/>
           </a:p>
@@ -6330,7 +6316,7 @@
           <a:p>
             <a:fld id="{0F40EE0F-3D5D-4E7E-9C3F-44BCD00311B7}" type="datetimeFigureOut">
               <a:rPr lang="en-US" smtClean="0"/>
-              <a:t>8/6/2025</a:t>
+              <a:t>7/31/2026</a:t>
             </a:fld>
             <a:endParaRPr lang="en-US"/>
           </a:p>
@@ -6595,7 +6581,7 @@
           <a:p>
             <a:fld id="{0F40EE0F-3D5D-4E7E-9C3F-44BCD00311B7}" type="datetimeFigureOut">
               <a:rPr lang="en-US" smtClean="0"/>
-              <a:t>8/6/2025</a:t>
+              <a:t>7/31/2026</a:t>
             </a:fld>
             <a:endParaRPr lang="en-US"/>
           </a:p>
@@ -7007,7 +6993,7 @@
           <a:p>
             <a:fld id="{0F40EE0F-3D5D-4E7E-9C3F-44BCD00311B7}" type="datetimeFigureOut">
               <a:rPr lang="en-US" smtClean="0"/>
-              <a:t>8/6/2025</a:t>
+              <a:t>7/31/2026</a:t>
             </a:fld>
             <a:endParaRPr lang="en-US"/>
           </a:p>
@@ -7148,7 +7134,7 @@
           <a:p>
             <a:fld id="{0F40EE0F-3D5D-4E7E-9C3F-44BCD00311B7}" type="datetimeFigureOut">
               <a:rPr lang="en-US" smtClean="0"/>
-              <a:t>8/6/2025</a:t>
+              <a:t>7/31/2026</a:t>
             </a:fld>
             <a:endParaRPr lang="en-US"/>
           </a:p>
@@ -7261,7 +7247,7 @@
           <a:p>
             <a:fld id="{0F40EE0F-3D5D-4E7E-9C3F-44BCD00311B7}" type="datetimeFigureOut">
               <a:rPr lang="en-US" smtClean="0"/>
-              <a:t>8/6/2025</a:t>
+              <a:t>7/31/2026</a:t>
             </a:fld>
             <a:endParaRPr lang="en-US"/>
           </a:p>
@@ -7572,7 +7558,7 @@
           <a:p>
             <a:fld id="{0F40EE0F-3D5D-4E7E-9C3F-44BCD00311B7}" type="datetimeFigureOut">
               <a:rPr lang="en-US" smtClean="0"/>
-              <a:t>8/6/2025</a:t>
+              <a:t>7/31/2026</a:t>
             </a:fld>
             <a:endParaRPr lang="en-US"/>
           </a:p>
@@ -7860,7 +7846,7 @@
           <a:p>
             <a:fld id="{0F40EE0F-3D5D-4E7E-9C3F-44BCD00311B7}" type="datetimeFigureOut">
               <a:rPr lang="en-US" smtClean="0"/>
-              <a:t>8/6/2025</a:t>
+              <a:t>7/31/2026</a:t>
             </a:fld>
             <a:endParaRPr lang="en-US"/>
           </a:p>
@@ -8101,7 +8087,7 @@
           <a:p>
             <a:fld id="{0F40EE0F-3D5D-4E7E-9C3F-44BCD00311B7}" type="datetimeFigureOut">
               <a:rPr lang="en-US" smtClean="0"/>
-              <a:t>8/6/2025</a:t>
+              <a:t>7/31/2026</a:t>
             </a:fld>
             <a:endParaRPr lang="en-US"/>
           </a:p>
@@ -9072,8 +9058,8 @@
         </p:blipFill>
         <p:spPr>
           <a:xfrm>
-            <a:off x="6749205" y="1626375"/>
-            <a:ext cx="5245617" cy="1722846"/>
+            <a:off x="6836837" y="1890091"/>
+            <a:ext cx="5050363" cy="1658718"/>
           </a:xfrm>
           <a:prstGeom prst="rect">
             <a:avLst/>
@@ -9229,110 +9215,6 @@
       </p:sp>
       <p:sp>
         <p:nvSpPr>
-          <p:cNvPr id="12" name="TextBox 11">
-            <a:extLst>
-              <a:ext uri="{FF2B5EF4-FFF2-40B4-BE49-F238E27FC236}">
-                <a16:creationId xmlns:a16="http://schemas.microsoft.com/office/drawing/2014/main" id="{B1AF5018-DCEC-731D-B489-FF464851241D}"/>
-              </a:ext>
-            </a:extLst>
-          </p:cNvPr>
-          <p:cNvSpPr txBox="1"/>
-          <p:nvPr/>
-        </p:nvSpPr>
-        <p:spPr>
-          <a:xfrm>
-            <a:off x="206791" y="2463350"/>
-            <a:ext cx="3532442" cy="1477328"/>
-          </a:xfrm>
-          <a:prstGeom prst="rect">
-            <a:avLst/>
-          </a:prstGeom>
-          <a:noFill/>
-        </p:spPr>
-        <p:txBody>
-          <a:bodyPr wrap="none" rtlCol="0">
-            <a:spAutoFit/>
-          </a:bodyPr>
-          <a:lstStyle/>
-          <a:p>
-            <a:r>
-              <a:rPr lang="en-US" sz="2000" dirty="0">
-                <a:solidFill>
-                  <a:srgbClr val="165C7D"/>
-                </a:solidFill>
-              </a:rPr>
-              <a:t>Jared A. Stabach, PhD</a:t>
-            </a:r>
-          </a:p>
-          <a:p>
-            <a:r>
-              <a:rPr lang="en-US" sz="1400" i="1" dirty="0">
-                <a:solidFill>
-                  <a:schemeClr val="tx1">
-                    <a:lumMod val="75000"/>
-                    <a:lumOff val="25000"/>
-                  </a:schemeClr>
-                </a:solidFill>
-              </a:rPr>
-              <a:t>Research Ecologist</a:t>
-            </a:r>
-          </a:p>
-          <a:p>
-            <a:r>
-              <a:rPr lang="en-US" sz="1400" i="1" dirty="0">
-                <a:solidFill>
-                  <a:schemeClr val="tx1">
-                    <a:lumMod val="75000"/>
-                    <a:lumOff val="25000"/>
-                  </a:schemeClr>
-                </a:solidFill>
-              </a:rPr>
-              <a:t>Terrestrial Lead – Movement of Life Initiative</a:t>
-            </a:r>
-          </a:p>
-          <a:p>
-            <a:r>
-              <a:rPr lang="en-US" sz="1400" i="1" dirty="0">
-                <a:solidFill>
-                  <a:schemeClr val="tx1">
-                    <a:lumMod val="75000"/>
-                    <a:lumOff val="25000"/>
-                  </a:schemeClr>
-                </a:solidFill>
-              </a:rPr>
-              <a:t>Conservation Ecology Center</a:t>
-            </a:r>
-          </a:p>
-          <a:p>
-            <a:r>
-              <a:rPr lang="en-US" sz="1400" i="1" dirty="0">
-                <a:solidFill>
-                  <a:schemeClr val="tx1">
-                    <a:lumMod val="75000"/>
-                    <a:lumOff val="25000"/>
-                  </a:schemeClr>
-                </a:solidFill>
-              </a:rPr>
-              <a:t>Smithsonian’s National Zoo &amp;</a:t>
-            </a:r>
-          </a:p>
-          <a:p>
-            <a:r>
-              <a:rPr lang="en-US" sz="1400" i="1" dirty="0">
-                <a:solidFill>
-                  <a:schemeClr val="tx1">
-                    <a:lumMod val="75000"/>
-                    <a:lumOff val="25000"/>
-                  </a:schemeClr>
-                </a:solidFill>
-              </a:rPr>
-              <a:t>Conservation Biology Institute</a:t>
-            </a:r>
-          </a:p>
-        </p:txBody>
-      </p:sp>
-      <p:sp>
-        <p:nvSpPr>
           <p:cNvPr id="13" name="TextBox 12">
             <a:extLst>
               <a:ext uri="{FF2B5EF4-FFF2-40B4-BE49-F238E27FC236}">
@@ -9422,7 +9304,7 @@
         <p:spPr>
           <a:xfrm>
             <a:off x="206791" y="1581510"/>
-            <a:ext cx="4461478" cy="461665"/>
+            <a:ext cx="4732386" cy="461665"/>
           </a:xfrm>
           <a:prstGeom prst="rect">
             <a:avLst/>
@@ -9439,7 +9321,7 @@
               <a:rPr lang="en-US" sz="2400" dirty="0">
                 <a:latin typeface="Century Gothic" panose="020B0502020202020204" pitchFamily="34" charset="0"/>
               </a:rPr>
-              <a:t>Categorizing Behavior States</a:t>
+              <a:t>Categorizing Behavioral States</a:t>
             </a:r>
           </a:p>
         </p:txBody>
@@ -9521,7 +9403,7 @@
         </p:blipFill>
         <p:spPr>
           <a:xfrm>
-            <a:off x="2815262" y="3477027"/>
+            <a:off x="1120253" y="2661054"/>
             <a:ext cx="3933943" cy="2024049"/>
           </a:xfrm>
           <a:prstGeom prst="rect">
@@ -10108,7 +9990,7 @@
 </file>
 
 <file path=ppt/slides/slide11.xml><?xml version="1.0" encoding="utf-8"?>
-<p:sld xmlns:a="http://schemas.openxmlformats.org/drawingml/2006/main" xmlns:r="http://schemas.openxmlformats.org/officeDocument/2006/relationships" xmlns:p="http://schemas.openxmlformats.org/presentationml/2006/main">
+<p:sld xmlns:a="http://schemas.openxmlformats.org/drawingml/2006/main" xmlns:r="http://schemas.openxmlformats.org/officeDocument/2006/relationships" xmlns:p="http://schemas.openxmlformats.org/presentationml/2006/main" show="0">
   <p:cSld>
     <p:spTree>
       <p:nvGrpSpPr>
@@ -10296,10 +10178,10 @@
       </p:grpSpPr>
       <p:sp>
         <p:nvSpPr>
-          <p:cNvPr id="4" name="Title 1">
-            <a:extLst>
-              <a:ext uri="{FF2B5EF4-FFF2-40B4-BE49-F238E27FC236}">
-                <a16:creationId xmlns:a16="http://schemas.microsoft.com/office/drawing/2014/main" id="{D8E4D343-E403-96F1-07FE-A9B868F8B2C9}"/>
+          <p:cNvPr id="2" name="Title 1">
+            <a:extLst>
+              <a:ext uri="{FF2B5EF4-FFF2-40B4-BE49-F238E27FC236}">
+                <a16:creationId xmlns:a16="http://schemas.microsoft.com/office/drawing/2014/main" id="{DC9275EF-69E9-91D5-E500-AFF6C8F15A1A}"/>
               </a:ext>
             </a:extLst>
           </p:cNvPr>
@@ -10311,7 +10193,7 @@
         <p:spPr>
           <a:xfrm>
             <a:off x="496675" y="322824"/>
-            <a:ext cx="10515600" cy="1325563"/>
+            <a:ext cx="10515600" cy="1244719"/>
           </a:xfrm>
           <a:prstGeom prst="rect">
             <a:avLst/>
@@ -10347,377 +10229,238 @@
                   <a:srgbClr val="000000"/>
                 </a:solidFill>
               </a:rPr>
-              <a:t>Challenges to HMMs</a:t>
-            </a:r>
-            <a:br>
-              <a:rPr lang="en-US" sz="3200" b="1" dirty="0">
-                <a:solidFill>
-                  <a:srgbClr val="000000"/>
-                </a:solidFill>
-              </a:rPr>
-            </a:br>
+              <a:t>Common Challenges</a:t>
+            </a:r>
             <a:endParaRPr lang="en-US" sz="3200" b="1" dirty="0"/>
           </a:p>
         </p:txBody>
       </p:sp>
-      <p:sp>
-        <p:nvSpPr>
-          <p:cNvPr id="5" name="Content Placeholder 2">
-            <a:extLst>
-              <a:ext uri="{FF2B5EF4-FFF2-40B4-BE49-F238E27FC236}">
-                <a16:creationId xmlns:a16="http://schemas.microsoft.com/office/drawing/2014/main" id="{1A7E6DF1-1F3D-2A2F-4B4E-8D7EAEEB7444}"/>
-              </a:ext>
-            </a:extLst>
-          </p:cNvPr>
-          <p:cNvSpPr txBox="1">
-            <a:spLocks/>
-          </p:cNvSpPr>
+      <p:pic>
+        <p:nvPicPr>
+          <p:cNvPr id="4" name="Picture 3">
+            <a:extLst>
+              <a:ext uri="{FF2B5EF4-FFF2-40B4-BE49-F238E27FC236}">
+                <a16:creationId xmlns:a16="http://schemas.microsoft.com/office/drawing/2014/main" id="{07487032-3A21-6872-19AD-E2353EBF4DEA}"/>
+              </a:ext>
+            </a:extLst>
+          </p:cNvPr>
+          <p:cNvPicPr>
+            <a:picLocks noChangeAspect="1"/>
+          </p:cNvPicPr>
           <p:nvPr/>
-        </p:nvSpPr>
+        </p:nvPicPr>
+        <p:blipFill>
+          <a:blip r:embed="rId2"/>
+          <a:srcRect t="32780" b="12370"/>
+          <a:stretch>
+            <a:fillRect/>
+          </a:stretch>
+        </p:blipFill>
         <p:spPr>
           <a:xfrm>
-            <a:off x="969484" y="1420465"/>
-            <a:ext cx="10515600" cy="3478857"/>
+            <a:off x="1037355" y="2980222"/>
+            <a:ext cx="10639006" cy="2679567"/>
           </a:xfrm>
           <a:prstGeom prst="rect">
             <a:avLst/>
           </a:prstGeom>
         </p:spPr>
-        <p:txBody>
-          <a:bodyPr vert="horz" lIns="91440" tIns="45720" rIns="91440" bIns="45720" rtlCol="0">
-            <a:noAutofit/>
+      </p:pic>
+      <p:sp>
+        <p:nvSpPr>
+          <p:cNvPr id="5" name="TextBox 4">
+            <a:extLst>
+              <a:ext uri="{FF2B5EF4-FFF2-40B4-BE49-F238E27FC236}">
+                <a16:creationId xmlns:a16="http://schemas.microsoft.com/office/drawing/2014/main" id="{698FB48F-78D4-56CC-5668-13DAC8577411}"/>
+              </a:ext>
+            </a:extLst>
+          </p:cNvPr>
+          <p:cNvSpPr txBox="1"/>
+          <p:nvPr/>
+        </p:nvSpPr>
+        <p:spPr>
+          <a:xfrm>
+            <a:off x="1445740" y="1198211"/>
+            <a:ext cx="2959465" cy="369332"/>
+          </a:xfrm>
+          <a:prstGeom prst="rect">
+            <a:avLst/>
+          </a:prstGeom>
+          <a:noFill/>
+        </p:spPr>
+        <p:txBody>
+          <a:bodyPr wrap="none" rtlCol="0">
+            <a:spAutoFit/>
           </a:bodyPr>
-          <a:lstStyle>
-            <a:lvl1pPr marL="228600" indent="-228600" algn="l" defTabSz="914400" rtl="0" eaLnBrk="1" latinLnBrk="0" hangingPunct="1">
-              <a:lnSpc>
-                <a:spcPct val="90000"/>
-              </a:lnSpc>
-              <a:spcBef>
-                <a:spcPts val="1000"/>
-              </a:spcBef>
-              <a:buFont typeface="Arial" panose="020B0604020202020204" pitchFamily="34" charset="0"/>
-              <a:buChar char="•"/>
-              <a:defRPr sz="2800" kern="1200">
-                <a:solidFill>
-                  <a:schemeClr val="tx1"/>
-                </a:solidFill>
-                <a:latin typeface="+mn-lt"/>
-                <a:ea typeface="+mn-ea"/>
-                <a:cs typeface="+mn-cs"/>
-              </a:defRPr>
-            </a:lvl1pPr>
-            <a:lvl2pPr marL="685800" indent="-228600" algn="l" defTabSz="914400" rtl="0" eaLnBrk="1" latinLnBrk="0" hangingPunct="1">
-              <a:lnSpc>
-                <a:spcPct val="90000"/>
-              </a:lnSpc>
-              <a:spcBef>
-                <a:spcPts val="500"/>
-              </a:spcBef>
-              <a:buFont typeface="Arial" panose="020B0604020202020204" pitchFamily="34" charset="0"/>
-              <a:buChar char="•"/>
-              <a:defRPr sz="2400" kern="1200">
-                <a:solidFill>
-                  <a:schemeClr val="tx1"/>
-                </a:solidFill>
-                <a:latin typeface="+mn-lt"/>
-                <a:ea typeface="+mn-ea"/>
-                <a:cs typeface="+mn-cs"/>
-              </a:defRPr>
-            </a:lvl2pPr>
-            <a:lvl3pPr marL="1143000" indent="-228600" algn="l" defTabSz="914400" rtl="0" eaLnBrk="1" latinLnBrk="0" hangingPunct="1">
-              <a:lnSpc>
-                <a:spcPct val="90000"/>
-              </a:lnSpc>
-              <a:spcBef>
-                <a:spcPts val="500"/>
-              </a:spcBef>
-              <a:buFont typeface="Arial" panose="020B0604020202020204" pitchFamily="34" charset="0"/>
-              <a:buChar char="•"/>
-              <a:defRPr sz="2000" kern="1200">
-                <a:solidFill>
-                  <a:schemeClr val="tx1"/>
-                </a:solidFill>
-                <a:latin typeface="+mn-lt"/>
-                <a:ea typeface="+mn-ea"/>
-                <a:cs typeface="+mn-cs"/>
-              </a:defRPr>
-            </a:lvl3pPr>
-            <a:lvl4pPr marL="1600200" indent="-228600" algn="l" defTabSz="914400" rtl="0" eaLnBrk="1" latinLnBrk="0" hangingPunct="1">
-              <a:lnSpc>
-                <a:spcPct val="90000"/>
-              </a:lnSpc>
-              <a:spcBef>
-                <a:spcPts val="500"/>
-              </a:spcBef>
-              <a:buFont typeface="Arial" panose="020B0604020202020204" pitchFamily="34" charset="0"/>
-              <a:buChar char="•"/>
-              <a:defRPr sz="1800" kern="1200">
-                <a:solidFill>
-                  <a:schemeClr val="tx1"/>
-                </a:solidFill>
-                <a:latin typeface="+mn-lt"/>
-                <a:ea typeface="+mn-ea"/>
-                <a:cs typeface="+mn-cs"/>
-              </a:defRPr>
-            </a:lvl4pPr>
-            <a:lvl5pPr marL="2057400" indent="-228600" algn="l" defTabSz="914400" rtl="0" eaLnBrk="1" latinLnBrk="0" hangingPunct="1">
-              <a:lnSpc>
-                <a:spcPct val="90000"/>
-              </a:lnSpc>
-              <a:spcBef>
-                <a:spcPts val="500"/>
-              </a:spcBef>
-              <a:buFont typeface="Arial" panose="020B0604020202020204" pitchFamily="34" charset="0"/>
-              <a:buChar char="•"/>
-              <a:defRPr sz="1800" kern="1200">
-                <a:solidFill>
-                  <a:schemeClr val="tx1"/>
-                </a:solidFill>
-                <a:latin typeface="+mn-lt"/>
-                <a:ea typeface="+mn-ea"/>
-                <a:cs typeface="+mn-cs"/>
-              </a:defRPr>
-            </a:lvl5pPr>
-            <a:lvl6pPr marL="2514600" indent="-228600" algn="l" defTabSz="914400" rtl="0" eaLnBrk="1" latinLnBrk="0" hangingPunct="1">
-              <a:lnSpc>
-                <a:spcPct val="90000"/>
-              </a:lnSpc>
-              <a:spcBef>
-                <a:spcPts val="500"/>
-              </a:spcBef>
-              <a:buFont typeface="Arial" panose="020B0604020202020204" pitchFamily="34" charset="0"/>
-              <a:buChar char="•"/>
-              <a:defRPr sz="1800" kern="1200">
-                <a:solidFill>
-                  <a:schemeClr val="tx1"/>
-                </a:solidFill>
-                <a:latin typeface="+mn-lt"/>
-                <a:ea typeface="+mn-ea"/>
-                <a:cs typeface="+mn-cs"/>
-              </a:defRPr>
-            </a:lvl6pPr>
-            <a:lvl7pPr marL="2971800" indent="-228600" algn="l" defTabSz="914400" rtl="0" eaLnBrk="1" latinLnBrk="0" hangingPunct="1">
-              <a:lnSpc>
-                <a:spcPct val="90000"/>
-              </a:lnSpc>
-              <a:spcBef>
-                <a:spcPts val="500"/>
-              </a:spcBef>
-              <a:buFont typeface="Arial" panose="020B0604020202020204" pitchFamily="34" charset="0"/>
-              <a:buChar char="•"/>
-              <a:defRPr sz="1800" kern="1200">
-                <a:solidFill>
-                  <a:schemeClr val="tx1"/>
-                </a:solidFill>
-                <a:latin typeface="+mn-lt"/>
-                <a:ea typeface="+mn-ea"/>
-                <a:cs typeface="+mn-cs"/>
-              </a:defRPr>
-            </a:lvl7pPr>
-            <a:lvl8pPr marL="3429000" indent="-228600" algn="l" defTabSz="914400" rtl="0" eaLnBrk="1" latinLnBrk="0" hangingPunct="1">
-              <a:lnSpc>
-                <a:spcPct val="90000"/>
-              </a:lnSpc>
-              <a:spcBef>
-                <a:spcPts val="500"/>
-              </a:spcBef>
-              <a:buFont typeface="Arial" panose="020B0604020202020204" pitchFamily="34" charset="0"/>
-              <a:buChar char="•"/>
-              <a:defRPr sz="1800" kern="1200">
-                <a:solidFill>
-                  <a:schemeClr val="tx1"/>
-                </a:solidFill>
-                <a:latin typeface="+mn-lt"/>
-                <a:ea typeface="+mn-ea"/>
-                <a:cs typeface="+mn-cs"/>
-              </a:defRPr>
-            </a:lvl8pPr>
-            <a:lvl9pPr marL="3886200" indent="-228600" algn="l" defTabSz="914400" rtl="0" eaLnBrk="1" latinLnBrk="0" hangingPunct="1">
-              <a:lnSpc>
-                <a:spcPct val="90000"/>
-              </a:lnSpc>
-              <a:spcBef>
-                <a:spcPts val="500"/>
-              </a:spcBef>
-              <a:buFont typeface="Arial" panose="020B0604020202020204" pitchFamily="34" charset="0"/>
-              <a:buChar char="•"/>
-              <a:defRPr sz="1800" kern="1200">
-                <a:solidFill>
-                  <a:schemeClr val="tx1"/>
-                </a:solidFill>
-                <a:latin typeface="+mn-lt"/>
-                <a:ea typeface="+mn-ea"/>
-                <a:cs typeface="+mn-cs"/>
-              </a:defRPr>
-            </a:lvl9pPr>
-          </a:lstStyle>
-          <a:p>
-            <a:r>
-              <a:rPr lang="en-US" sz="2400" dirty="0">
-                <a:solidFill>
-                  <a:srgbClr val="000000"/>
-                </a:solidFill>
-                <a:latin typeface="Century Gothic" panose="020B0502020202020204" pitchFamily="34" charset="0"/>
-              </a:rPr>
-              <a:t>Starting parameters values and correct distributional forms</a:t>
-            </a:r>
-          </a:p>
-          <a:p>
-            <a:r>
-              <a:rPr lang="en-US" sz="2400" dirty="0">
-                <a:solidFill>
-                  <a:srgbClr val="000000"/>
-                </a:solidFill>
-                <a:latin typeface="Century Gothic" panose="020B0502020202020204" pitchFamily="34" charset="0"/>
-              </a:rPr>
-              <a:t>Choosing the # of states to model (</a:t>
-            </a:r>
-            <a:r>
-              <a:rPr lang="en-US" sz="2400" dirty="0" err="1">
-                <a:solidFill>
-                  <a:srgbClr val="000000"/>
-                </a:solidFill>
-                <a:latin typeface="Century Gothic" panose="020B0502020202020204" pitchFamily="34" charset="0"/>
-              </a:rPr>
-              <a:t>Pohle</a:t>
-            </a:r>
-            <a:r>
-              <a:rPr lang="en-US" sz="2400" dirty="0">
-                <a:solidFill>
-                  <a:srgbClr val="000000"/>
-                </a:solidFill>
-                <a:latin typeface="Century Gothic" panose="020B0502020202020204" pitchFamily="34" charset="0"/>
-              </a:rPr>
-              <a:t> et al. 2017)</a:t>
-            </a:r>
-          </a:p>
-          <a:p>
-            <a:r>
-              <a:rPr lang="en-US" sz="2400" dirty="0">
-                <a:solidFill>
-                  <a:srgbClr val="000000"/>
-                </a:solidFill>
-                <a:latin typeface="Century Gothic" panose="020B0502020202020204" pitchFamily="34" charset="0"/>
-              </a:rPr>
-              <a:t>Impact of sampling schedule (P</a:t>
-            </a:r>
-            <a:r>
-              <a:rPr lang="en-US" sz="2400" b="0" i="0" u="none" strike="noStrike" baseline="0" dirty="0">
-                <a:solidFill>
-                  <a:srgbClr val="000000"/>
-                </a:solidFill>
-                <a:latin typeface="Avenir Next LT Pro" panose="020B0504020202020204" pitchFamily="34" charset="0"/>
-              </a:rPr>
-              <a:t>ostlethwaite and Dennis, 2013)</a:t>
-            </a:r>
-          </a:p>
-          <a:p>
-            <a:pPr lvl="1"/>
-            <a:r>
-              <a:rPr lang="en-US" sz="2000" dirty="0">
-                <a:solidFill>
-                  <a:srgbClr val="000000"/>
-                </a:solidFill>
-                <a:latin typeface="+mj-lt"/>
-              </a:rPr>
-              <a:t>Higher resolution tends to improve identification of behavioral states as long as error is much smaller than step length</a:t>
-            </a:r>
-            <a:endParaRPr lang="en-US" sz="2000" b="0" i="0" u="none" strike="noStrike" baseline="0" dirty="0">
-              <a:solidFill>
-                <a:srgbClr val="000000"/>
-              </a:solidFill>
-              <a:latin typeface="+mj-lt"/>
-            </a:endParaRPr>
-          </a:p>
-          <a:p>
-            <a:r>
-              <a:rPr lang="en-US" sz="2400" dirty="0">
-                <a:solidFill>
-                  <a:srgbClr val="000000"/>
-                </a:solidFill>
-                <a:latin typeface="Avenir Next LT Pro" panose="020B0504020202020204" pitchFamily="34" charset="0"/>
-              </a:rPr>
-              <a:t>Irregular sampling</a:t>
-            </a:r>
-          </a:p>
-          <a:p>
-            <a:pPr lvl="1"/>
-            <a:r>
-              <a:rPr lang="en-US" sz="2000" b="0" i="0" u="none" strike="noStrike" baseline="0" dirty="0">
-                <a:solidFill>
-                  <a:srgbClr val="000000"/>
-                </a:solidFill>
-                <a:latin typeface="+mj-lt"/>
-              </a:rPr>
-              <a:t>State space models with </a:t>
-            </a:r>
-            <a:r>
-              <a:rPr lang="en-US" sz="2000" b="0" i="0" u="none" strike="noStrike" baseline="0" dirty="0">
-                <a:solidFill>
-                  <a:srgbClr val="000000"/>
-                </a:solidFill>
-                <a:latin typeface="Courier New" panose="02070309020205020404" pitchFamily="49" charset="0"/>
-              </a:rPr>
-              <a:t>crawl </a:t>
-            </a:r>
-            <a:r>
-              <a:rPr lang="en-US" sz="2000" b="0" i="0" u="none" strike="noStrike" baseline="0" dirty="0">
-                <a:solidFill>
-                  <a:srgbClr val="000000"/>
-                </a:solidFill>
-                <a:latin typeface="+mj-lt"/>
-              </a:rPr>
-              <a:t>or </a:t>
-            </a:r>
-            <a:r>
-              <a:rPr lang="en-US" sz="2000" b="0" i="0" u="none" strike="noStrike" baseline="0" dirty="0" err="1">
-                <a:solidFill>
-                  <a:srgbClr val="000000"/>
-                </a:solidFill>
-                <a:latin typeface="Courier New" panose="02070309020205020404" pitchFamily="49" charset="0"/>
-              </a:rPr>
-              <a:t>aniMotum</a:t>
-            </a:r>
-            <a:r>
-              <a:rPr lang="en-US" sz="2000" b="0" i="0" u="none" strike="noStrike" baseline="0" dirty="0">
-                <a:solidFill>
-                  <a:srgbClr val="000000"/>
-                </a:solidFill>
-                <a:latin typeface="Courier New" panose="02070309020205020404" pitchFamily="49" charset="0"/>
-              </a:rPr>
-              <a:t> or </a:t>
-            </a:r>
-            <a:r>
-              <a:rPr lang="en-US" sz="2000" b="0" i="0" u="none" strike="noStrike" baseline="0" dirty="0">
-                <a:solidFill>
-                  <a:srgbClr val="000000"/>
-                </a:solidFill>
-                <a:latin typeface="Century Gothic" panose="020B0502020202020204" pitchFamily="34" charset="0"/>
-              </a:rPr>
-              <a:t>continuous time models with </a:t>
-            </a:r>
-            <a:r>
-              <a:rPr lang="en-US" sz="2000" b="0" i="0" u="none" strike="noStrike" baseline="0" dirty="0" err="1">
-                <a:solidFill>
-                  <a:srgbClr val="000000"/>
-                </a:solidFill>
-                <a:latin typeface="Courier New" panose="02070309020205020404" pitchFamily="49" charset="0"/>
-              </a:rPr>
-              <a:t>ctmm</a:t>
-            </a:r>
-            <a:endParaRPr lang="en-US" sz="2000" b="0" i="0" u="none" strike="noStrike" baseline="0" dirty="0">
-              <a:solidFill>
-                <a:srgbClr val="000000"/>
-              </a:solidFill>
-              <a:latin typeface="+mj-lt"/>
-            </a:endParaRPr>
+          <a:lstStyle/>
+          <a:p>
+            <a:r>
+              <a:rPr lang="en-US" b="1" dirty="0">
+                <a:solidFill>
+                  <a:schemeClr val="tx2">
+                    <a:lumMod val="75000"/>
+                    <a:lumOff val="25000"/>
+                  </a:schemeClr>
+                </a:solidFill>
+              </a:rPr>
+              <a:t>Choosing Starting Values</a:t>
+            </a:r>
+          </a:p>
+        </p:txBody>
+      </p:sp>
+      <p:sp>
+        <p:nvSpPr>
+          <p:cNvPr id="6" name="TextBox 5">
+            <a:extLst>
+              <a:ext uri="{FF2B5EF4-FFF2-40B4-BE49-F238E27FC236}">
+                <a16:creationId xmlns:a16="http://schemas.microsoft.com/office/drawing/2014/main" id="{24F5D7F9-8E80-843C-EB27-17E4B7A62C99}"/>
+              </a:ext>
+            </a:extLst>
+          </p:cNvPr>
+          <p:cNvSpPr txBox="1"/>
+          <p:nvPr/>
+        </p:nvSpPr>
+        <p:spPr>
+          <a:xfrm>
+            <a:off x="902043" y="1888318"/>
+            <a:ext cx="10291600" cy="923330"/>
+          </a:xfrm>
+          <a:prstGeom prst="rect">
+            <a:avLst/>
+          </a:prstGeom>
+          <a:noFill/>
+        </p:spPr>
+        <p:txBody>
+          <a:bodyPr wrap="none" rtlCol="0">
+            <a:spAutoFit/>
+          </a:bodyPr>
+          <a:lstStyle/>
+          <a:p>
+            <a:r>
+              <a:rPr lang="en-US" dirty="0"/>
+              <a:t>HMMs are fitted by numerical optimization (to find parameters that </a:t>
+            </a:r>
+            <a:r>
+              <a:rPr lang="en-US" dirty="0" err="1"/>
+              <a:t>maximise</a:t>
+            </a:r>
+            <a:r>
+              <a:rPr lang="en-US" dirty="0"/>
+              <a:t> the likelihood</a:t>
+            </a:r>
+          </a:p>
+          <a:p>
+            <a:pPr marL="285750" indent="-285750">
+              <a:buFont typeface="Wingdings" panose="05000000000000000000" pitchFamily="2" charset="2"/>
+              <a:buChar char="§"/>
+            </a:pPr>
+            <a:r>
+              <a:rPr lang="en-US" dirty="0"/>
+              <a:t>User needs to set a starting point</a:t>
+            </a:r>
+          </a:p>
+          <a:p>
+            <a:pPr marL="285750" indent="-285750">
+              <a:buFont typeface="Wingdings" panose="05000000000000000000" pitchFamily="2" charset="2"/>
+              <a:buChar char="§"/>
+            </a:pPr>
+            <a:r>
+              <a:rPr lang="en-US" dirty="0"/>
+              <a:t>Convergence to “global” maximum (i.e., best model) requires a good starting point</a:t>
+            </a:r>
+          </a:p>
+        </p:txBody>
+      </p:sp>
+      <p:sp>
+        <p:nvSpPr>
+          <p:cNvPr id="7" name="TextBox 6">
+            <a:extLst>
+              <a:ext uri="{FF2B5EF4-FFF2-40B4-BE49-F238E27FC236}">
+                <a16:creationId xmlns:a16="http://schemas.microsoft.com/office/drawing/2014/main" id="{9B8EFD19-FD3A-44AE-AEA6-730463D5E7F1}"/>
+              </a:ext>
+            </a:extLst>
+          </p:cNvPr>
+          <p:cNvSpPr txBox="1"/>
+          <p:nvPr/>
+        </p:nvSpPr>
+        <p:spPr>
+          <a:xfrm>
+            <a:off x="902043" y="5854502"/>
+            <a:ext cx="8956298" cy="369332"/>
+          </a:xfrm>
+          <a:prstGeom prst="rect">
+            <a:avLst/>
+          </a:prstGeom>
+          <a:noFill/>
+        </p:spPr>
+        <p:txBody>
+          <a:bodyPr wrap="none" rtlCol="0">
+            <a:spAutoFit/>
+          </a:bodyPr>
+          <a:lstStyle/>
+          <a:p>
+            <a:r>
+              <a:rPr lang="en-US" b="1" dirty="0">
+                <a:solidFill>
+                  <a:schemeClr val="tx2">
+                    <a:lumMod val="75000"/>
+                    <a:lumOff val="25000"/>
+                  </a:schemeClr>
+                </a:solidFill>
+              </a:rPr>
+              <a:t>Partial solution: </a:t>
+            </a:r>
+            <a:r>
+              <a:rPr lang="en-US" dirty="0"/>
+              <a:t>try many starting values; look at data to pick plausible values</a:t>
+            </a:r>
+          </a:p>
+        </p:txBody>
+      </p:sp>
+      <p:sp>
+        <p:nvSpPr>
+          <p:cNvPr id="8" name="TextBox 7">
+            <a:extLst>
+              <a:ext uri="{FF2B5EF4-FFF2-40B4-BE49-F238E27FC236}">
+                <a16:creationId xmlns:a16="http://schemas.microsoft.com/office/drawing/2014/main" id="{C3D86CB4-99F6-A924-7728-843D58F80DD5}"/>
+              </a:ext>
+            </a:extLst>
+          </p:cNvPr>
+          <p:cNvSpPr txBox="1"/>
+          <p:nvPr/>
+        </p:nvSpPr>
+        <p:spPr>
+          <a:xfrm>
+            <a:off x="10436391" y="6154194"/>
+            <a:ext cx="1755609" cy="276999"/>
+          </a:xfrm>
+          <a:prstGeom prst="rect">
+            <a:avLst/>
+          </a:prstGeom>
+          <a:noFill/>
+        </p:spPr>
+        <p:txBody>
+          <a:bodyPr wrap="none" rtlCol="0">
+            <a:spAutoFit/>
+          </a:bodyPr>
+          <a:lstStyle/>
+          <a:p>
+            <a:r>
+              <a:rPr lang="en-US" sz="1200" dirty="0"/>
+              <a:t>Slide from T. </a:t>
+            </a:r>
+            <a:r>
+              <a:rPr lang="en-US" sz="1200" dirty="0" err="1"/>
+              <a:t>Michelot</a:t>
+            </a:r>
+            <a:endParaRPr lang="en-US" sz="1200" dirty="0"/>
           </a:p>
         </p:txBody>
       </p:sp>
     </p:spTree>
     <p:extLst>
       <p:ext uri="{BB962C8B-B14F-4D97-AF65-F5344CB8AC3E}">
-        <p14:creationId xmlns:p14="http://schemas.microsoft.com/office/powerpoint/2010/main" val="4247730567"/>
+        <p14:creationId xmlns:p14="http://schemas.microsoft.com/office/powerpoint/2010/main" val="944129415"/>
       </p:ext>
     </p:extLst>
   </p:cSld>
@@ -10744,78 +10487,12 @@
           <a:chExt cx="0" cy="0"/>
         </a:xfrm>
       </p:grpSpPr>
-      <p:pic>
-        <p:nvPicPr>
-          <p:cNvPr id="8" name="Picture 7">
-            <a:extLst>
-              <a:ext uri="{FF2B5EF4-FFF2-40B4-BE49-F238E27FC236}">
-                <a16:creationId xmlns:a16="http://schemas.microsoft.com/office/drawing/2014/main" id="{AFABFC51-4893-07E0-77DE-DF6497684D21}"/>
-              </a:ext>
-            </a:extLst>
-          </p:cNvPr>
-          <p:cNvPicPr>
-            <a:picLocks noChangeAspect="1"/>
-          </p:cNvPicPr>
-          <p:nvPr/>
-        </p:nvPicPr>
-        <p:blipFill rotWithShape="1">
-          <a:blip r:embed="rId3"/>
-          <a:srcRect b="19001"/>
-          <a:stretch/>
-        </p:blipFill>
-        <p:spPr>
-          <a:xfrm>
-            <a:off x="151730" y="2208809"/>
-            <a:ext cx="6722743" cy="3827609"/>
-          </a:xfrm>
-          <a:prstGeom prst="rect">
-            <a:avLst/>
-          </a:prstGeom>
-        </p:spPr>
-      </p:pic>
-      <p:pic>
-        <p:nvPicPr>
-          <p:cNvPr id="5" name="Picture 4">
-            <a:extLst>
-              <a:ext uri="{FF2B5EF4-FFF2-40B4-BE49-F238E27FC236}">
-                <a16:creationId xmlns:a16="http://schemas.microsoft.com/office/drawing/2014/main" id="{A61A141B-1F05-0A9C-58BD-88FA4DCC2E8A}"/>
-              </a:ext>
-            </a:extLst>
-          </p:cNvPr>
-          <p:cNvPicPr>
-            <a:picLocks noChangeAspect="1"/>
-          </p:cNvPicPr>
-          <p:nvPr/>
-        </p:nvPicPr>
-        <p:blipFill>
-          <a:blip r:embed="rId4"/>
-          <a:stretch>
-            <a:fillRect/>
-          </a:stretch>
-        </p:blipFill>
-        <p:spPr>
-          <a:xfrm>
-            <a:off x="7887373" y="5319887"/>
-            <a:ext cx="4221498" cy="993965"/>
-          </a:xfrm>
-          <a:prstGeom prst="rect">
-            <a:avLst/>
-          </a:prstGeom>
-          <a:effectLst>
-            <a:outerShdw blurRad="50800" dist="38100" dir="2700000" algn="tl" rotWithShape="0">
-              <a:prstClr val="black">
-                <a:alpha val="40000"/>
-              </a:prstClr>
-            </a:outerShdw>
-          </a:effectLst>
-        </p:spPr>
-      </p:pic>
-      <p:sp>
-        <p:nvSpPr>
-          <p:cNvPr id="6" name="Title 1">
-            <a:extLst>
-              <a:ext uri="{FF2B5EF4-FFF2-40B4-BE49-F238E27FC236}">
-                <a16:creationId xmlns:a16="http://schemas.microsoft.com/office/drawing/2014/main" id="{9295E781-5852-468D-1186-F7549C10C57F}"/>
+      <p:sp>
+        <p:nvSpPr>
+          <p:cNvPr id="2" name="Title 1">
+            <a:extLst>
+              <a:ext uri="{FF2B5EF4-FFF2-40B4-BE49-F238E27FC236}">
+                <a16:creationId xmlns:a16="http://schemas.microsoft.com/office/drawing/2014/main" id="{54725985-724E-370F-E1A0-F9369003A784}"/>
               </a:ext>
             </a:extLst>
           </p:cNvPr>
@@ -10827,7 +10504,7 @@
         <p:spPr>
           <a:xfrm>
             <a:off x="496675" y="322824"/>
-            <a:ext cx="10515600" cy="1325563"/>
+            <a:ext cx="10515600" cy="1244719"/>
           </a:xfrm>
           <a:prstGeom prst="rect">
             <a:avLst/>
@@ -10863,25 +10540,212 @@
                   <a:srgbClr val="000000"/>
                 </a:solidFill>
               </a:rPr>
-              <a:t>HMM Examples/Applications</a:t>
-            </a:r>
-            <a:br>
-              <a:rPr lang="en-US" sz="3200" b="1" dirty="0">
-                <a:solidFill>
-                  <a:srgbClr val="000000"/>
-                </a:solidFill>
-              </a:rPr>
-            </a:br>
+              <a:t>Common Challenges</a:t>
+            </a:r>
             <a:endParaRPr lang="en-US" sz="3200" b="1" dirty="0"/>
+          </a:p>
+        </p:txBody>
+      </p:sp>
+      <p:sp>
+        <p:nvSpPr>
+          <p:cNvPr id="3" name="TextBox 2">
+            <a:extLst>
+              <a:ext uri="{FF2B5EF4-FFF2-40B4-BE49-F238E27FC236}">
+                <a16:creationId xmlns:a16="http://schemas.microsoft.com/office/drawing/2014/main" id="{0DEDDDFF-7E76-D9A4-C03B-657355580AA7}"/>
+              </a:ext>
+            </a:extLst>
+          </p:cNvPr>
+          <p:cNvSpPr txBox="1"/>
+          <p:nvPr/>
+        </p:nvSpPr>
+        <p:spPr>
+          <a:xfrm>
+            <a:off x="1445740" y="1198211"/>
+            <a:ext cx="3725700" cy="369332"/>
+          </a:xfrm>
+          <a:prstGeom prst="rect">
+            <a:avLst/>
+          </a:prstGeom>
+          <a:noFill/>
+        </p:spPr>
+        <p:txBody>
+          <a:bodyPr wrap="none" rtlCol="0">
+            <a:spAutoFit/>
+          </a:bodyPr>
+          <a:lstStyle/>
+          <a:p>
+            <a:r>
+              <a:rPr lang="en-US" b="1" dirty="0">
+                <a:solidFill>
+                  <a:schemeClr val="tx2">
+                    <a:lumMod val="75000"/>
+                    <a:lumOff val="25000"/>
+                  </a:schemeClr>
+                </a:solidFill>
+              </a:rPr>
+              <a:t>Choosing the Number of States</a:t>
+            </a:r>
+          </a:p>
+        </p:txBody>
+      </p:sp>
+      <p:sp>
+        <p:nvSpPr>
+          <p:cNvPr id="6" name="TextBox 5">
+            <a:extLst>
+              <a:ext uri="{FF2B5EF4-FFF2-40B4-BE49-F238E27FC236}">
+                <a16:creationId xmlns:a16="http://schemas.microsoft.com/office/drawing/2014/main" id="{3C3A074C-9181-902F-F3AF-A96947E16DC8}"/>
+              </a:ext>
+            </a:extLst>
+          </p:cNvPr>
+          <p:cNvSpPr txBox="1"/>
+          <p:nvPr/>
+        </p:nvSpPr>
+        <p:spPr>
+          <a:xfrm>
+            <a:off x="10436391" y="6154194"/>
+            <a:ext cx="1755609" cy="276999"/>
+          </a:xfrm>
+          <a:prstGeom prst="rect">
+            <a:avLst/>
+          </a:prstGeom>
+          <a:noFill/>
+        </p:spPr>
+        <p:txBody>
+          <a:bodyPr wrap="none" rtlCol="0">
+            <a:spAutoFit/>
+          </a:bodyPr>
+          <a:lstStyle/>
+          <a:p>
+            <a:r>
+              <a:rPr lang="en-US" sz="1200" dirty="0"/>
+              <a:t>Slide from T. </a:t>
+            </a:r>
+            <a:r>
+              <a:rPr lang="en-US" sz="1200" dirty="0" err="1"/>
+              <a:t>Michelot</a:t>
+            </a:r>
+            <a:endParaRPr lang="en-US" sz="1200" dirty="0"/>
+          </a:p>
+        </p:txBody>
+      </p:sp>
+      <p:sp>
+        <p:nvSpPr>
+          <p:cNvPr id="8" name="TextBox 7">
+            <a:extLst>
+              <a:ext uri="{FF2B5EF4-FFF2-40B4-BE49-F238E27FC236}">
+                <a16:creationId xmlns:a16="http://schemas.microsoft.com/office/drawing/2014/main" id="{5AD00B93-8E57-016E-6E25-6A52E6AA95D8}"/>
+              </a:ext>
+            </a:extLst>
+          </p:cNvPr>
+          <p:cNvSpPr txBox="1"/>
+          <p:nvPr/>
+        </p:nvSpPr>
+        <p:spPr>
+          <a:xfrm>
+            <a:off x="902043" y="5854502"/>
+            <a:ext cx="9597499" cy="369332"/>
+          </a:xfrm>
+          <a:prstGeom prst="rect">
+            <a:avLst/>
+          </a:prstGeom>
+          <a:noFill/>
+        </p:spPr>
+        <p:txBody>
+          <a:bodyPr wrap="none" rtlCol="0">
+            <a:spAutoFit/>
+          </a:bodyPr>
+          <a:lstStyle/>
+          <a:p>
+            <a:r>
+              <a:rPr lang="en-US" b="1" dirty="0">
+                <a:solidFill>
+                  <a:schemeClr val="tx2">
+                    <a:lumMod val="75000"/>
+                    <a:lumOff val="25000"/>
+                  </a:schemeClr>
+                </a:solidFill>
+              </a:rPr>
+              <a:t>Partial solution: </a:t>
+            </a:r>
+            <a:r>
+              <a:rPr lang="en-US" dirty="0"/>
+              <a:t>Use a combination of model checking and biological knowledge</a:t>
+            </a:r>
+          </a:p>
+        </p:txBody>
+      </p:sp>
+      <p:sp>
+        <p:nvSpPr>
+          <p:cNvPr id="9" name="TextBox 8">
+            <a:extLst>
+              <a:ext uri="{FF2B5EF4-FFF2-40B4-BE49-F238E27FC236}">
+                <a16:creationId xmlns:a16="http://schemas.microsoft.com/office/drawing/2014/main" id="{DFB5D7F7-7897-C616-2641-2C4F457B3D9B}"/>
+              </a:ext>
+            </a:extLst>
+          </p:cNvPr>
+          <p:cNvSpPr txBox="1"/>
+          <p:nvPr/>
+        </p:nvSpPr>
+        <p:spPr>
+          <a:xfrm>
+            <a:off x="902043" y="1910529"/>
+            <a:ext cx="9240030" cy="1200329"/>
+          </a:xfrm>
+          <a:prstGeom prst="rect">
+            <a:avLst/>
+          </a:prstGeom>
+          <a:noFill/>
+        </p:spPr>
+        <p:txBody>
+          <a:bodyPr wrap="none" rtlCol="0">
+            <a:spAutoFit/>
+          </a:bodyPr>
+          <a:lstStyle/>
+          <a:p>
+            <a:r>
+              <a:rPr lang="en-US" dirty="0"/>
+              <a:t>We need to choose the number of states </a:t>
+            </a:r>
+            <a:endParaRPr lang="en-US" i="1" dirty="0"/>
+          </a:p>
+          <a:p>
+            <a:pPr marL="285750" indent="-285750">
+              <a:buFont typeface="Wingdings" panose="05000000000000000000" pitchFamily="2" charset="2"/>
+              <a:buChar char="§"/>
+            </a:pPr>
+            <a:r>
+              <a:rPr lang="en-US" dirty="0"/>
+              <a:t>Most studies use 2 states (“slow” and “fast”)</a:t>
+            </a:r>
+          </a:p>
+          <a:p>
+            <a:pPr marL="285750" indent="-285750">
+              <a:buFont typeface="Wingdings" panose="05000000000000000000" pitchFamily="2" charset="2"/>
+              <a:buChar char="§"/>
+            </a:pPr>
+            <a:r>
+              <a:rPr lang="en-US" dirty="0"/>
+              <a:t>3-4 can sometimes be interpreted biologically – beyond that it may be difficult</a:t>
+            </a:r>
+          </a:p>
+          <a:p>
+            <a:pPr marL="285750" indent="-285750">
+              <a:buFont typeface="Wingdings" panose="05000000000000000000" pitchFamily="2" charset="2"/>
+              <a:buChar char="§"/>
+            </a:pPr>
+            <a:r>
+              <a:rPr lang="en-US" dirty="0"/>
+              <a:t>AIC/BIC often select much more complex models</a:t>
+            </a:r>
           </a:p>
         </p:txBody>
       </p:sp>
       <p:pic>
         <p:nvPicPr>
-          <p:cNvPr id="10" name="Picture 9">
-            <a:extLst>
-              <a:ext uri="{FF2B5EF4-FFF2-40B4-BE49-F238E27FC236}">
-                <a16:creationId xmlns:a16="http://schemas.microsoft.com/office/drawing/2014/main" id="{2149552D-DB4C-5ABD-0B53-199A4501989B}"/>
+          <p:cNvPr id="11" name="Picture 10">
+            <a:extLst>
+              <a:ext uri="{FF2B5EF4-FFF2-40B4-BE49-F238E27FC236}">
+                <a16:creationId xmlns:a16="http://schemas.microsoft.com/office/drawing/2014/main" id="{EC571E55-0D68-A795-8123-19DD87DF065E}"/>
               </a:ext>
             </a:extLst>
           </p:cNvPr>
@@ -10890,286 +10754,26 @@
           </p:cNvPicPr>
           <p:nvPr/>
         </p:nvPicPr>
-        <p:blipFill rotWithShape="1">
-          <a:blip r:embed="rId5"/>
-          <a:srcRect b="11402"/>
+        <p:blipFill>
+          <a:blip r:embed="rId2"/>
           <a:stretch>
             <a:fillRect/>
           </a:stretch>
         </p:blipFill>
         <p:spPr>
           <a:xfrm>
-            <a:off x="6850153" y="0"/>
-            <a:ext cx="4221498" cy="5143954"/>
+            <a:off x="1445740" y="3110857"/>
+            <a:ext cx="10047922" cy="2663777"/>
           </a:xfrm>
           <a:prstGeom prst="rect">
             <a:avLst/>
           </a:prstGeom>
         </p:spPr>
       </p:pic>
-      <p:sp>
-        <p:nvSpPr>
-          <p:cNvPr id="11" name="Content Placeholder 2">
-            <a:extLst>
-              <a:ext uri="{FF2B5EF4-FFF2-40B4-BE49-F238E27FC236}">
-                <a16:creationId xmlns:a16="http://schemas.microsoft.com/office/drawing/2014/main" id="{709AC01A-B934-CBE8-C54E-A9235034FF74}"/>
-              </a:ext>
-            </a:extLst>
-          </p:cNvPr>
-          <p:cNvSpPr txBox="1">
-            <a:spLocks/>
-          </p:cNvSpPr>
-          <p:nvPr/>
-        </p:nvSpPr>
-        <p:spPr>
-          <a:xfrm>
-            <a:off x="969484" y="1167789"/>
-            <a:ext cx="10515600" cy="796562"/>
-          </a:xfrm>
-          <a:prstGeom prst="rect">
-            <a:avLst/>
-          </a:prstGeom>
-        </p:spPr>
-        <p:txBody>
-          <a:bodyPr vert="horz" lIns="91440" tIns="45720" rIns="91440" bIns="45720" rtlCol="0">
-            <a:noAutofit/>
-          </a:bodyPr>
-          <a:lstStyle>
-            <a:lvl1pPr marL="228600" indent="-228600" algn="l" defTabSz="914400" rtl="0" eaLnBrk="1" latinLnBrk="0" hangingPunct="1">
-              <a:lnSpc>
-                <a:spcPct val="90000"/>
-              </a:lnSpc>
-              <a:spcBef>
-                <a:spcPts val="1000"/>
-              </a:spcBef>
-              <a:buFont typeface="Arial" panose="020B0604020202020204" pitchFamily="34" charset="0"/>
-              <a:buChar char="•"/>
-              <a:defRPr sz="2800" kern="1200">
-                <a:solidFill>
-                  <a:schemeClr val="tx1"/>
-                </a:solidFill>
-                <a:latin typeface="+mn-lt"/>
-                <a:ea typeface="+mn-ea"/>
-                <a:cs typeface="+mn-cs"/>
-              </a:defRPr>
-            </a:lvl1pPr>
-            <a:lvl2pPr marL="685800" indent="-228600" algn="l" defTabSz="914400" rtl="0" eaLnBrk="1" latinLnBrk="0" hangingPunct="1">
-              <a:lnSpc>
-                <a:spcPct val="90000"/>
-              </a:lnSpc>
-              <a:spcBef>
-                <a:spcPts val="500"/>
-              </a:spcBef>
-              <a:buFont typeface="Arial" panose="020B0604020202020204" pitchFamily="34" charset="0"/>
-              <a:buChar char="•"/>
-              <a:defRPr sz="2400" kern="1200">
-                <a:solidFill>
-                  <a:schemeClr val="tx1"/>
-                </a:solidFill>
-                <a:latin typeface="+mn-lt"/>
-                <a:ea typeface="+mn-ea"/>
-                <a:cs typeface="+mn-cs"/>
-              </a:defRPr>
-            </a:lvl2pPr>
-            <a:lvl3pPr marL="1143000" indent="-228600" algn="l" defTabSz="914400" rtl="0" eaLnBrk="1" latinLnBrk="0" hangingPunct="1">
-              <a:lnSpc>
-                <a:spcPct val="90000"/>
-              </a:lnSpc>
-              <a:spcBef>
-                <a:spcPts val="500"/>
-              </a:spcBef>
-              <a:buFont typeface="Arial" panose="020B0604020202020204" pitchFamily="34" charset="0"/>
-              <a:buChar char="•"/>
-              <a:defRPr sz="2000" kern="1200">
-                <a:solidFill>
-                  <a:schemeClr val="tx1"/>
-                </a:solidFill>
-                <a:latin typeface="+mn-lt"/>
-                <a:ea typeface="+mn-ea"/>
-                <a:cs typeface="+mn-cs"/>
-              </a:defRPr>
-            </a:lvl3pPr>
-            <a:lvl4pPr marL="1600200" indent="-228600" algn="l" defTabSz="914400" rtl="0" eaLnBrk="1" latinLnBrk="0" hangingPunct="1">
-              <a:lnSpc>
-                <a:spcPct val="90000"/>
-              </a:lnSpc>
-              <a:spcBef>
-                <a:spcPts val="500"/>
-              </a:spcBef>
-              <a:buFont typeface="Arial" panose="020B0604020202020204" pitchFamily="34" charset="0"/>
-              <a:buChar char="•"/>
-              <a:defRPr sz="1800" kern="1200">
-                <a:solidFill>
-                  <a:schemeClr val="tx1"/>
-                </a:solidFill>
-                <a:latin typeface="+mn-lt"/>
-                <a:ea typeface="+mn-ea"/>
-                <a:cs typeface="+mn-cs"/>
-              </a:defRPr>
-            </a:lvl4pPr>
-            <a:lvl5pPr marL="2057400" indent="-228600" algn="l" defTabSz="914400" rtl="0" eaLnBrk="1" latinLnBrk="0" hangingPunct="1">
-              <a:lnSpc>
-                <a:spcPct val="90000"/>
-              </a:lnSpc>
-              <a:spcBef>
-                <a:spcPts val="500"/>
-              </a:spcBef>
-              <a:buFont typeface="Arial" panose="020B0604020202020204" pitchFamily="34" charset="0"/>
-              <a:buChar char="•"/>
-              <a:defRPr sz="1800" kern="1200">
-                <a:solidFill>
-                  <a:schemeClr val="tx1"/>
-                </a:solidFill>
-                <a:latin typeface="+mn-lt"/>
-                <a:ea typeface="+mn-ea"/>
-                <a:cs typeface="+mn-cs"/>
-              </a:defRPr>
-            </a:lvl5pPr>
-            <a:lvl6pPr marL="2514600" indent="-228600" algn="l" defTabSz="914400" rtl="0" eaLnBrk="1" latinLnBrk="0" hangingPunct="1">
-              <a:lnSpc>
-                <a:spcPct val="90000"/>
-              </a:lnSpc>
-              <a:spcBef>
-                <a:spcPts val="500"/>
-              </a:spcBef>
-              <a:buFont typeface="Arial" panose="020B0604020202020204" pitchFamily="34" charset="0"/>
-              <a:buChar char="•"/>
-              <a:defRPr sz="1800" kern="1200">
-                <a:solidFill>
-                  <a:schemeClr val="tx1"/>
-                </a:solidFill>
-                <a:latin typeface="+mn-lt"/>
-                <a:ea typeface="+mn-ea"/>
-                <a:cs typeface="+mn-cs"/>
-              </a:defRPr>
-            </a:lvl6pPr>
-            <a:lvl7pPr marL="2971800" indent="-228600" algn="l" defTabSz="914400" rtl="0" eaLnBrk="1" latinLnBrk="0" hangingPunct="1">
-              <a:lnSpc>
-                <a:spcPct val="90000"/>
-              </a:lnSpc>
-              <a:spcBef>
-                <a:spcPts val="500"/>
-              </a:spcBef>
-              <a:buFont typeface="Arial" panose="020B0604020202020204" pitchFamily="34" charset="0"/>
-              <a:buChar char="•"/>
-              <a:defRPr sz="1800" kern="1200">
-                <a:solidFill>
-                  <a:schemeClr val="tx1"/>
-                </a:solidFill>
-                <a:latin typeface="+mn-lt"/>
-                <a:ea typeface="+mn-ea"/>
-                <a:cs typeface="+mn-cs"/>
-              </a:defRPr>
-            </a:lvl7pPr>
-            <a:lvl8pPr marL="3429000" indent="-228600" algn="l" defTabSz="914400" rtl="0" eaLnBrk="1" latinLnBrk="0" hangingPunct="1">
-              <a:lnSpc>
-                <a:spcPct val="90000"/>
-              </a:lnSpc>
-              <a:spcBef>
-                <a:spcPts val="500"/>
-              </a:spcBef>
-              <a:buFont typeface="Arial" panose="020B0604020202020204" pitchFamily="34" charset="0"/>
-              <a:buChar char="•"/>
-              <a:defRPr sz="1800" kern="1200">
-                <a:solidFill>
-                  <a:schemeClr val="tx1"/>
-                </a:solidFill>
-                <a:latin typeface="+mn-lt"/>
-                <a:ea typeface="+mn-ea"/>
-                <a:cs typeface="+mn-cs"/>
-              </a:defRPr>
-            </a:lvl8pPr>
-            <a:lvl9pPr marL="3886200" indent="-228600" algn="l" defTabSz="914400" rtl="0" eaLnBrk="1" latinLnBrk="0" hangingPunct="1">
-              <a:lnSpc>
-                <a:spcPct val="90000"/>
-              </a:lnSpc>
-              <a:spcBef>
-                <a:spcPts val="500"/>
-              </a:spcBef>
-              <a:buFont typeface="Arial" panose="020B0604020202020204" pitchFamily="34" charset="0"/>
-              <a:buChar char="•"/>
-              <a:defRPr sz="1800" kern="1200">
-                <a:solidFill>
-                  <a:schemeClr val="tx1"/>
-                </a:solidFill>
-                <a:latin typeface="+mn-lt"/>
-                <a:ea typeface="+mn-ea"/>
-                <a:cs typeface="+mn-cs"/>
-              </a:defRPr>
-            </a:lvl9pPr>
-          </a:lstStyle>
-          <a:p>
-            <a:pPr marL="0" indent="0">
-              <a:buNone/>
-            </a:pPr>
-            <a:r>
-              <a:rPr lang="en-US" sz="2400" dirty="0">
-                <a:solidFill>
-                  <a:srgbClr val="000000"/>
-                </a:solidFill>
-                <a:latin typeface="Century Gothic" panose="020B0502020202020204" pitchFamily="34" charset="0"/>
-              </a:rPr>
-              <a:t>Humpback whales</a:t>
-            </a:r>
-          </a:p>
-        </p:txBody>
-      </p:sp>
-      <p:sp>
-        <p:nvSpPr>
-          <p:cNvPr id="2" name="Rectangle 1">
-            <a:extLst>
-              <a:ext uri="{FF2B5EF4-FFF2-40B4-BE49-F238E27FC236}">
-                <a16:creationId xmlns:a16="http://schemas.microsoft.com/office/drawing/2014/main" id="{CB421A68-93EF-019A-B1EA-E7F7A220940D}"/>
-              </a:ext>
-            </a:extLst>
-          </p:cNvPr>
-          <p:cNvSpPr/>
-          <p:nvPr/>
-        </p:nvSpPr>
-        <p:spPr>
-          <a:xfrm>
-            <a:off x="9416955" y="3903260"/>
-            <a:ext cx="1595320" cy="1100663"/>
-          </a:xfrm>
-          <a:prstGeom prst="rect">
-            <a:avLst/>
-          </a:prstGeom>
-          <a:noFill/>
-          <a:ln w="25400">
-            <a:solidFill>
-              <a:srgbClr val="FF0000"/>
-            </a:solidFill>
-          </a:ln>
-        </p:spPr>
-        <p:style>
-          <a:lnRef idx="2">
-            <a:schemeClr val="accent1">
-              <a:shade val="15000"/>
-            </a:schemeClr>
-          </a:lnRef>
-          <a:fillRef idx="1">
-            <a:schemeClr val="accent1"/>
-          </a:fillRef>
-          <a:effectRef idx="0">
-            <a:schemeClr val="accent1"/>
-          </a:effectRef>
-          <a:fontRef idx="minor">
-            <a:schemeClr val="lt1"/>
-          </a:fontRef>
-        </p:style>
-        <p:txBody>
-          <a:bodyPr rtlCol="0" anchor="ctr"/>
-          <a:lstStyle/>
-          <a:p>
-            <a:pPr algn="ctr"/>
-            <a:endParaRPr lang="en-US"/>
-          </a:p>
-        </p:txBody>
-      </p:sp>
     </p:spTree>
     <p:extLst>
       <p:ext uri="{BB962C8B-B14F-4D97-AF65-F5344CB8AC3E}">
-        <p14:creationId xmlns:p14="http://schemas.microsoft.com/office/powerpoint/2010/main" val="2790739131"/>
+        <p14:creationId xmlns:p14="http://schemas.microsoft.com/office/powerpoint/2010/main" val="1902705238"/>
       </p:ext>
     </p:extLst>
   </p:cSld>
@@ -11180,6 +10784,315 @@
 </file>
 
 <file path=ppt/slides/slide15.xml><?xml version="1.0" encoding="utf-8"?>
+<p:sld xmlns:a="http://schemas.openxmlformats.org/drawingml/2006/main" xmlns:r="http://schemas.openxmlformats.org/officeDocument/2006/relationships" xmlns:p="http://schemas.openxmlformats.org/presentationml/2006/main">
+  <p:cSld>
+    <p:spTree>
+      <p:nvGrpSpPr>
+        <p:cNvPr id="1" name="">
+          <a:extLst>
+            <a:ext uri="{FF2B5EF4-FFF2-40B4-BE49-F238E27FC236}">
+              <a16:creationId xmlns:a16="http://schemas.microsoft.com/office/drawing/2014/main" id="{E437CC52-4769-A77D-4199-A57B6B1F9DB5}"/>
+            </a:ext>
+          </a:extLst>
+        </p:cNvPr>
+        <p:cNvGrpSpPr/>
+        <p:nvPr/>
+      </p:nvGrpSpPr>
+      <p:grpSpPr>
+        <a:xfrm>
+          <a:off x="0" y="0"/>
+          <a:ext cx="0" cy="0"/>
+          <a:chOff x="0" y="0"/>
+          <a:chExt cx="0" cy="0"/>
+        </a:xfrm>
+      </p:grpSpPr>
+      <p:sp>
+        <p:nvSpPr>
+          <p:cNvPr id="2" name="Title 1">
+            <a:extLst>
+              <a:ext uri="{FF2B5EF4-FFF2-40B4-BE49-F238E27FC236}">
+                <a16:creationId xmlns:a16="http://schemas.microsoft.com/office/drawing/2014/main" id="{96803DB1-67FE-6523-8393-9841938F7D99}"/>
+              </a:ext>
+            </a:extLst>
+          </p:cNvPr>
+          <p:cNvSpPr txBox="1">
+            <a:spLocks/>
+          </p:cNvSpPr>
+          <p:nvPr/>
+        </p:nvSpPr>
+        <p:spPr>
+          <a:xfrm>
+            <a:off x="496675" y="322824"/>
+            <a:ext cx="10515600" cy="1244719"/>
+          </a:xfrm>
+          <a:prstGeom prst="rect">
+            <a:avLst/>
+          </a:prstGeom>
+        </p:spPr>
+        <p:txBody>
+          <a:bodyPr vert="horz" lIns="91440" tIns="45720" rIns="91440" bIns="45720" rtlCol="0" anchor="ctr">
+            <a:normAutofit/>
+          </a:bodyPr>
+          <a:lstStyle>
+            <a:lvl1pPr algn="l" defTabSz="914400" rtl="0" eaLnBrk="1" latinLnBrk="0" hangingPunct="1">
+              <a:lnSpc>
+                <a:spcPct val="90000"/>
+              </a:lnSpc>
+              <a:spcBef>
+                <a:spcPct val="0"/>
+              </a:spcBef>
+              <a:buNone/>
+              <a:defRPr sz="4400" kern="1200">
+                <a:solidFill>
+                  <a:schemeClr val="tx1"/>
+                </a:solidFill>
+                <a:latin typeface="+mj-lt"/>
+                <a:ea typeface="+mj-ea"/>
+                <a:cs typeface="+mj-cs"/>
+              </a:defRPr>
+            </a:lvl1pPr>
+          </a:lstStyle>
+          <a:p>
+            <a:r>
+              <a:rPr lang="en-US" sz="3200" b="1" dirty="0">
+                <a:solidFill>
+                  <a:srgbClr val="000000"/>
+                </a:solidFill>
+              </a:rPr>
+              <a:t>Common Challenges</a:t>
+            </a:r>
+            <a:endParaRPr lang="en-US" sz="3200" b="1" dirty="0"/>
+          </a:p>
+        </p:txBody>
+      </p:sp>
+      <p:sp>
+        <p:nvSpPr>
+          <p:cNvPr id="3" name="TextBox 2">
+            <a:extLst>
+              <a:ext uri="{FF2B5EF4-FFF2-40B4-BE49-F238E27FC236}">
+                <a16:creationId xmlns:a16="http://schemas.microsoft.com/office/drawing/2014/main" id="{3D57F8E6-0999-E6D7-46C2-065CC2D9439D}"/>
+              </a:ext>
+            </a:extLst>
+          </p:cNvPr>
+          <p:cNvSpPr txBox="1"/>
+          <p:nvPr/>
+        </p:nvSpPr>
+        <p:spPr>
+          <a:xfrm>
+            <a:off x="1445740" y="1198211"/>
+            <a:ext cx="3199915" cy="369332"/>
+          </a:xfrm>
+          <a:prstGeom prst="rect">
+            <a:avLst/>
+          </a:prstGeom>
+          <a:noFill/>
+        </p:spPr>
+        <p:txBody>
+          <a:bodyPr wrap="none" rtlCol="0">
+            <a:spAutoFit/>
+          </a:bodyPr>
+          <a:lstStyle/>
+          <a:p>
+            <a:r>
+              <a:rPr lang="en-US" b="1" dirty="0">
+                <a:solidFill>
+                  <a:schemeClr val="tx2">
+                    <a:lumMod val="75000"/>
+                    <a:lumOff val="25000"/>
+                  </a:schemeClr>
+                </a:solidFill>
+              </a:rPr>
+              <a:t>Irregular or Noisy Locations</a:t>
+            </a:r>
+          </a:p>
+        </p:txBody>
+      </p:sp>
+      <p:sp>
+        <p:nvSpPr>
+          <p:cNvPr id="6" name="TextBox 5">
+            <a:extLst>
+              <a:ext uri="{FF2B5EF4-FFF2-40B4-BE49-F238E27FC236}">
+                <a16:creationId xmlns:a16="http://schemas.microsoft.com/office/drawing/2014/main" id="{EECE4928-DA19-FF51-3827-DA5507FDE59D}"/>
+              </a:ext>
+            </a:extLst>
+          </p:cNvPr>
+          <p:cNvSpPr txBox="1"/>
+          <p:nvPr/>
+        </p:nvSpPr>
+        <p:spPr>
+          <a:xfrm>
+            <a:off x="10436391" y="6154194"/>
+            <a:ext cx="1755609" cy="276999"/>
+          </a:xfrm>
+          <a:prstGeom prst="rect">
+            <a:avLst/>
+          </a:prstGeom>
+          <a:noFill/>
+        </p:spPr>
+        <p:txBody>
+          <a:bodyPr wrap="none" rtlCol="0">
+            <a:spAutoFit/>
+          </a:bodyPr>
+          <a:lstStyle/>
+          <a:p>
+            <a:r>
+              <a:rPr lang="en-US" sz="1200" dirty="0"/>
+              <a:t>Slide from T. </a:t>
+            </a:r>
+            <a:r>
+              <a:rPr lang="en-US" sz="1200" dirty="0" err="1"/>
+              <a:t>Michelot</a:t>
+            </a:r>
+            <a:endParaRPr lang="en-US" sz="1200" dirty="0"/>
+          </a:p>
+        </p:txBody>
+      </p:sp>
+      <p:sp>
+        <p:nvSpPr>
+          <p:cNvPr id="8" name="TextBox 7">
+            <a:extLst>
+              <a:ext uri="{FF2B5EF4-FFF2-40B4-BE49-F238E27FC236}">
+                <a16:creationId xmlns:a16="http://schemas.microsoft.com/office/drawing/2014/main" id="{6E0DD6AD-EDE6-78FF-77BC-C9E7ECBC37B1}"/>
+              </a:ext>
+            </a:extLst>
+          </p:cNvPr>
+          <p:cNvSpPr txBox="1"/>
+          <p:nvPr/>
+        </p:nvSpPr>
+        <p:spPr>
+          <a:xfrm>
+            <a:off x="902043" y="5854502"/>
+            <a:ext cx="10264348" cy="369332"/>
+          </a:xfrm>
+          <a:prstGeom prst="rect">
+            <a:avLst/>
+          </a:prstGeom>
+          <a:noFill/>
+        </p:spPr>
+        <p:txBody>
+          <a:bodyPr wrap="none" rtlCol="0">
+            <a:spAutoFit/>
+          </a:bodyPr>
+          <a:lstStyle/>
+          <a:p>
+            <a:r>
+              <a:rPr lang="en-US" b="1" dirty="0">
+                <a:solidFill>
+                  <a:schemeClr val="tx2">
+                    <a:lumMod val="75000"/>
+                    <a:lumOff val="25000"/>
+                  </a:schemeClr>
+                </a:solidFill>
+              </a:rPr>
+              <a:t>Partial solution: </a:t>
+            </a:r>
+            <a:r>
+              <a:rPr lang="en-US" dirty="0"/>
+              <a:t>Filter noise and regularize tracks with a state-space or simulation approach</a:t>
+            </a:r>
+          </a:p>
+        </p:txBody>
+      </p:sp>
+      <p:sp>
+        <p:nvSpPr>
+          <p:cNvPr id="9" name="TextBox 8">
+            <a:extLst>
+              <a:ext uri="{FF2B5EF4-FFF2-40B4-BE49-F238E27FC236}">
+                <a16:creationId xmlns:a16="http://schemas.microsoft.com/office/drawing/2014/main" id="{F49C0796-5214-16E3-12D6-DF652AE00C10}"/>
+              </a:ext>
+            </a:extLst>
+          </p:cNvPr>
+          <p:cNvSpPr txBox="1"/>
+          <p:nvPr/>
+        </p:nvSpPr>
+        <p:spPr>
+          <a:xfrm>
+            <a:off x="902043" y="1910529"/>
+            <a:ext cx="6676828" cy="923330"/>
+          </a:xfrm>
+          <a:prstGeom prst="rect">
+            <a:avLst/>
+          </a:prstGeom>
+          <a:noFill/>
+        </p:spPr>
+        <p:txBody>
+          <a:bodyPr wrap="none" rtlCol="0">
+            <a:spAutoFit/>
+          </a:bodyPr>
+          <a:lstStyle/>
+          <a:p>
+            <a:r>
+              <a:rPr lang="en-US" dirty="0"/>
+              <a:t>HMM  requirements: </a:t>
+            </a:r>
+            <a:endParaRPr lang="en-US" i="1" dirty="0"/>
+          </a:p>
+          <a:p>
+            <a:pPr marL="285750" indent="-285750">
+              <a:buFont typeface="Wingdings" panose="05000000000000000000" pitchFamily="2" charset="2"/>
+              <a:buChar char="§"/>
+            </a:pPr>
+            <a:r>
+              <a:rPr lang="en-US" dirty="0"/>
+              <a:t>Measurement error should be negligible</a:t>
+            </a:r>
+          </a:p>
+          <a:p>
+            <a:pPr marL="285750" indent="-285750">
+              <a:buFont typeface="Wingdings" panose="05000000000000000000" pitchFamily="2" charset="2"/>
+              <a:buChar char="§"/>
+            </a:pPr>
+            <a:r>
+              <a:rPr lang="en-US" dirty="0"/>
+              <a:t>Locations should be observed at regularly time intervals</a:t>
+            </a:r>
+          </a:p>
+        </p:txBody>
+      </p:sp>
+      <p:pic>
+        <p:nvPicPr>
+          <p:cNvPr id="5" name="Picture 4">
+            <a:extLst>
+              <a:ext uri="{FF2B5EF4-FFF2-40B4-BE49-F238E27FC236}">
+                <a16:creationId xmlns:a16="http://schemas.microsoft.com/office/drawing/2014/main" id="{4D19A1BE-FBEA-5E62-DA79-684FB925DA4F}"/>
+              </a:ext>
+            </a:extLst>
+          </p:cNvPr>
+          <p:cNvPicPr>
+            <a:picLocks noChangeAspect="1"/>
+          </p:cNvPicPr>
+          <p:nvPr/>
+        </p:nvPicPr>
+        <p:blipFill>
+          <a:blip r:embed="rId2"/>
+          <a:stretch>
+            <a:fillRect/>
+          </a:stretch>
+        </p:blipFill>
+        <p:spPr>
+          <a:xfrm>
+            <a:off x="939856" y="2995782"/>
+            <a:ext cx="10226535" cy="2813284"/>
+          </a:xfrm>
+          <a:prstGeom prst="rect">
+            <a:avLst/>
+          </a:prstGeom>
+        </p:spPr>
+      </p:pic>
+    </p:spTree>
+    <p:extLst>
+      <p:ext uri="{BB962C8B-B14F-4D97-AF65-F5344CB8AC3E}">
+        <p14:creationId xmlns:p14="http://schemas.microsoft.com/office/powerpoint/2010/main" val="3026138059"/>
+      </p:ext>
+    </p:extLst>
+  </p:cSld>
+  <p:clrMapOvr>
+    <a:masterClrMapping/>
+  </p:clrMapOvr>
+</p:sld>
+</file>
+
+<file path=ppt/slides/slide16.xml><?xml version="1.0" encoding="utf-8"?>
 <p:sld xmlns:a="http://schemas.openxmlformats.org/drawingml/2006/main" xmlns:r="http://schemas.openxmlformats.org/officeDocument/2006/relationships" xmlns:p="http://schemas.openxmlformats.org/presentationml/2006/main">
   <p:cSld>
     <p:spTree>
@@ -11198,39 +11111,10 @@
       </p:grpSpPr>
       <p:pic>
         <p:nvPicPr>
-          <p:cNvPr id="9" name="Picture 8">
-            <a:extLst>
-              <a:ext uri="{FF2B5EF4-FFF2-40B4-BE49-F238E27FC236}">
-                <a16:creationId xmlns:a16="http://schemas.microsoft.com/office/drawing/2014/main" id="{6E5FB656-3AEC-70A7-E91D-13DF1474A922}"/>
-              </a:ext>
-            </a:extLst>
-          </p:cNvPr>
-          <p:cNvPicPr>
-            <a:picLocks noChangeAspect="1"/>
-          </p:cNvPicPr>
-          <p:nvPr/>
-        </p:nvPicPr>
-        <p:blipFill rotWithShape="1">
-          <a:blip r:embed="rId3"/>
-          <a:srcRect b="12434"/>
-          <a:stretch/>
-        </p:blipFill>
-        <p:spPr>
-          <a:xfrm>
-            <a:off x="1414115" y="1448031"/>
-            <a:ext cx="9423157" cy="4905268"/>
-          </a:xfrm>
-          <a:prstGeom prst="rect">
-            <a:avLst/>
-          </a:prstGeom>
-        </p:spPr>
-      </p:pic>
-      <p:pic>
-        <p:nvPicPr>
-          <p:cNvPr id="5" name="Picture 4">
-            <a:extLst>
-              <a:ext uri="{FF2B5EF4-FFF2-40B4-BE49-F238E27FC236}">
-                <a16:creationId xmlns:a16="http://schemas.microsoft.com/office/drawing/2014/main" id="{29AA7E6B-0015-F857-1CEC-DF7EA4C83668}"/>
+          <p:cNvPr id="3" name="Picture 2">
+            <a:extLst>
+              <a:ext uri="{FF2B5EF4-FFF2-40B4-BE49-F238E27FC236}">
+                <a16:creationId xmlns:a16="http://schemas.microsoft.com/office/drawing/2014/main" id="{F1591047-BE00-0DE1-AEAC-E18F71DAFA14}"/>
               </a:ext>
             </a:extLst>
           </p:cNvPr>
@@ -11240,305 +11124,181 @@
           <p:nvPr/>
         </p:nvPicPr>
         <p:blipFill>
-          <a:blip r:embed="rId4"/>
+          <a:blip r:embed="rId2"/>
+          <a:srcRect l="66890"/>
           <a:stretch>
             <a:fillRect/>
           </a:stretch>
         </p:blipFill>
         <p:spPr>
           <a:xfrm>
-            <a:off x="8478983" y="114821"/>
-            <a:ext cx="3514550" cy="1186806"/>
-          </a:xfrm>
-          <a:prstGeom prst="rect">
-            <a:avLst/>
-          </a:prstGeom>
-          <a:effectLst>
-            <a:outerShdw blurRad="50800" dist="38100" dir="2700000" algn="tl" rotWithShape="0">
-              <a:prstClr val="black">
-                <a:alpha val="40000"/>
-              </a:prstClr>
-            </a:outerShdw>
-          </a:effectLst>
-        </p:spPr>
-      </p:pic>
-      <p:sp>
-        <p:nvSpPr>
-          <p:cNvPr id="6" name="Title 1">
-            <a:extLst>
-              <a:ext uri="{FF2B5EF4-FFF2-40B4-BE49-F238E27FC236}">
-                <a16:creationId xmlns:a16="http://schemas.microsoft.com/office/drawing/2014/main" id="{5D7403EA-D47B-2F1D-8CB6-8C1F76AA6A39}"/>
-              </a:ext>
-            </a:extLst>
-          </p:cNvPr>
-          <p:cNvSpPr txBox="1">
-            <a:spLocks/>
-          </p:cNvSpPr>
-          <p:nvPr/>
-        </p:nvSpPr>
-        <p:spPr>
-          <a:xfrm>
-            <a:off x="496675" y="322824"/>
-            <a:ext cx="10515600" cy="1325563"/>
+            <a:off x="7126360" y="949733"/>
+            <a:ext cx="3735127" cy="4578932"/>
           </a:xfrm>
           <a:prstGeom prst="rect">
             <a:avLst/>
           </a:prstGeom>
         </p:spPr>
-        <p:txBody>
-          <a:bodyPr vert="horz" lIns="91440" tIns="45720" rIns="91440" bIns="45720" rtlCol="0" anchor="ctr">
-            <a:normAutofit/>
-          </a:bodyPr>
-          <a:lstStyle>
-            <a:lvl1pPr algn="l" defTabSz="914400" rtl="0" eaLnBrk="1" latinLnBrk="0" hangingPunct="1">
-              <a:lnSpc>
-                <a:spcPct val="90000"/>
-              </a:lnSpc>
-              <a:spcBef>
-                <a:spcPct val="0"/>
-              </a:spcBef>
-              <a:buNone/>
-              <a:defRPr sz="4400" kern="1200">
-                <a:solidFill>
-                  <a:schemeClr val="tx1"/>
-                </a:solidFill>
-                <a:latin typeface="+mj-lt"/>
-                <a:ea typeface="+mj-ea"/>
-                <a:cs typeface="+mj-cs"/>
-              </a:defRPr>
-            </a:lvl1pPr>
-          </a:lstStyle>
-          <a:p>
-            <a:r>
-              <a:rPr lang="en-US" sz="3200" b="1" dirty="0">
-                <a:solidFill>
-                  <a:srgbClr val="000000"/>
-                </a:solidFill>
-              </a:rPr>
-              <a:t>HMM Examples/Applications</a:t>
-            </a:r>
-            <a:br>
-              <a:rPr lang="en-US" sz="3200" b="1" dirty="0">
-                <a:solidFill>
-                  <a:srgbClr val="000000"/>
-                </a:solidFill>
-              </a:rPr>
-            </a:br>
-            <a:endParaRPr lang="en-US" sz="3200" b="1" dirty="0"/>
-          </a:p>
-        </p:txBody>
-      </p:sp>
-      <p:sp>
-        <p:nvSpPr>
-          <p:cNvPr id="7" name="Content Placeholder 2">
-            <a:extLst>
-              <a:ext uri="{FF2B5EF4-FFF2-40B4-BE49-F238E27FC236}">
-                <a16:creationId xmlns:a16="http://schemas.microsoft.com/office/drawing/2014/main" id="{8E89E664-D3F4-3311-95A8-725AA170EFB7}"/>
-              </a:ext>
-            </a:extLst>
-          </p:cNvPr>
-          <p:cNvSpPr txBox="1">
-            <a:spLocks/>
-          </p:cNvSpPr>
+      </p:pic>
+      <p:sp>
+        <p:nvSpPr>
+          <p:cNvPr id="4" name="TextBox 3">
+            <a:extLst>
+              <a:ext uri="{FF2B5EF4-FFF2-40B4-BE49-F238E27FC236}">
+                <a16:creationId xmlns:a16="http://schemas.microsoft.com/office/drawing/2014/main" id="{9A8CA001-8B46-7C35-468A-6467B74C7993}"/>
+              </a:ext>
+            </a:extLst>
+          </p:cNvPr>
+          <p:cNvSpPr txBox="1"/>
           <p:nvPr/>
         </p:nvSpPr>
         <p:spPr>
           <a:xfrm>
-            <a:off x="969484" y="1167789"/>
-            <a:ext cx="10515600" cy="796562"/>
+            <a:off x="1445740" y="1198211"/>
+            <a:ext cx="3619902" cy="369332"/>
           </a:xfrm>
           <a:prstGeom prst="rect">
             <a:avLst/>
           </a:prstGeom>
+          <a:noFill/>
         </p:spPr>
         <p:txBody>
-          <a:bodyPr vert="horz" lIns="91440" tIns="45720" rIns="91440" bIns="45720" rtlCol="0">
-            <a:noAutofit/>
+          <a:bodyPr wrap="none" rtlCol="0">
+            <a:spAutoFit/>
           </a:bodyPr>
-          <a:lstStyle>
-            <a:lvl1pPr marL="228600" indent="-228600" algn="l" defTabSz="914400" rtl="0" eaLnBrk="1" latinLnBrk="0" hangingPunct="1">
-              <a:lnSpc>
-                <a:spcPct val="90000"/>
-              </a:lnSpc>
-              <a:spcBef>
-                <a:spcPts val="1000"/>
-              </a:spcBef>
-              <a:buFont typeface="Arial" panose="020B0604020202020204" pitchFamily="34" charset="0"/>
-              <a:buChar char="•"/>
-              <a:defRPr sz="2800" kern="1200">
-                <a:solidFill>
-                  <a:schemeClr val="tx1"/>
-                </a:solidFill>
-                <a:latin typeface="+mn-lt"/>
-                <a:ea typeface="+mn-ea"/>
-                <a:cs typeface="+mn-cs"/>
-              </a:defRPr>
-            </a:lvl1pPr>
-            <a:lvl2pPr marL="685800" indent="-228600" algn="l" defTabSz="914400" rtl="0" eaLnBrk="1" latinLnBrk="0" hangingPunct="1">
-              <a:lnSpc>
-                <a:spcPct val="90000"/>
-              </a:lnSpc>
-              <a:spcBef>
-                <a:spcPts val="500"/>
-              </a:spcBef>
-              <a:buFont typeface="Arial" panose="020B0604020202020204" pitchFamily="34" charset="0"/>
-              <a:buChar char="•"/>
-              <a:defRPr sz="2400" kern="1200">
-                <a:solidFill>
-                  <a:schemeClr val="tx1"/>
-                </a:solidFill>
-                <a:latin typeface="+mn-lt"/>
-                <a:ea typeface="+mn-ea"/>
-                <a:cs typeface="+mn-cs"/>
-              </a:defRPr>
-            </a:lvl2pPr>
-            <a:lvl3pPr marL="1143000" indent="-228600" algn="l" defTabSz="914400" rtl="0" eaLnBrk="1" latinLnBrk="0" hangingPunct="1">
-              <a:lnSpc>
-                <a:spcPct val="90000"/>
-              </a:lnSpc>
-              <a:spcBef>
-                <a:spcPts val="500"/>
-              </a:spcBef>
-              <a:buFont typeface="Arial" panose="020B0604020202020204" pitchFamily="34" charset="0"/>
-              <a:buChar char="•"/>
-              <a:defRPr sz="2000" kern="1200">
-                <a:solidFill>
-                  <a:schemeClr val="tx1"/>
-                </a:solidFill>
-                <a:latin typeface="+mn-lt"/>
-                <a:ea typeface="+mn-ea"/>
-                <a:cs typeface="+mn-cs"/>
-              </a:defRPr>
-            </a:lvl3pPr>
-            <a:lvl4pPr marL="1600200" indent="-228600" algn="l" defTabSz="914400" rtl="0" eaLnBrk="1" latinLnBrk="0" hangingPunct="1">
-              <a:lnSpc>
-                <a:spcPct val="90000"/>
-              </a:lnSpc>
-              <a:spcBef>
-                <a:spcPts val="500"/>
-              </a:spcBef>
-              <a:buFont typeface="Arial" panose="020B0604020202020204" pitchFamily="34" charset="0"/>
-              <a:buChar char="•"/>
-              <a:defRPr sz="1800" kern="1200">
-                <a:solidFill>
-                  <a:schemeClr val="tx1"/>
-                </a:solidFill>
-                <a:latin typeface="+mn-lt"/>
-                <a:ea typeface="+mn-ea"/>
-                <a:cs typeface="+mn-cs"/>
-              </a:defRPr>
-            </a:lvl4pPr>
-            <a:lvl5pPr marL="2057400" indent="-228600" algn="l" defTabSz="914400" rtl="0" eaLnBrk="1" latinLnBrk="0" hangingPunct="1">
-              <a:lnSpc>
-                <a:spcPct val="90000"/>
-              </a:lnSpc>
-              <a:spcBef>
-                <a:spcPts val="500"/>
-              </a:spcBef>
-              <a:buFont typeface="Arial" panose="020B0604020202020204" pitchFamily="34" charset="0"/>
-              <a:buChar char="•"/>
-              <a:defRPr sz="1800" kern="1200">
-                <a:solidFill>
-                  <a:schemeClr val="tx1"/>
-                </a:solidFill>
-                <a:latin typeface="+mn-lt"/>
-                <a:ea typeface="+mn-ea"/>
-                <a:cs typeface="+mn-cs"/>
-              </a:defRPr>
-            </a:lvl5pPr>
-            <a:lvl6pPr marL="2514600" indent="-228600" algn="l" defTabSz="914400" rtl="0" eaLnBrk="1" latinLnBrk="0" hangingPunct="1">
-              <a:lnSpc>
-                <a:spcPct val="90000"/>
-              </a:lnSpc>
-              <a:spcBef>
-                <a:spcPts val="500"/>
-              </a:spcBef>
-              <a:buFont typeface="Arial" panose="020B0604020202020204" pitchFamily="34" charset="0"/>
-              <a:buChar char="•"/>
-              <a:defRPr sz="1800" kern="1200">
-                <a:solidFill>
-                  <a:schemeClr val="tx1"/>
-                </a:solidFill>
-                <a:latin typeface="+mn-lt"/>
-                <a:ea typeface="+mn-ea"/>
-                <a:cs typeface="+mn-cs"/>
-              </a:defRPr>
-            </a:lvl6pPr>
-            <a:lvl7pPr marL="2971800" indent="-228600" algn="l" defTabSz="914400" rtl="0" eaLnBrk="1" latinLnBrk="0" hangingPunct="1">
-              <a:lnSpc>
-                <a:spcPct val="90000"/>
-              </a:lnSpc>
-              <a:spcBef>
-                <a:spcPts val="500"/>
-              </a:spcBef>
-              <a:buFont typeface="Arial" panose="020B0604020202020204" pitchFamily="34" charset="0"/>
-              <a:buChar char="•"/>
-              <a:defRPr sz="1800" kern="1200">
-                <a:solidFill>
-                  <a:schemeClr val="tx1"/>
-                </a:solidFill>
-                <a:latin typeface="+mn-lt"/>
-                <a:ea typeface="+mn-ea"/>
-                <a:cs typeface="+mn-cs"/>
-              </a:defRPr>
-            </a:lvl7pPr>
-            <a:lvl8pPr marL="3429000" indent="-228600" algn="l" defTabSz="914400" rtl="0" eaLnBrk="1" latinLnBrk="0" hangingPunct="1">
-              <a:lnSpc>
-                <a:spcPct val="90000"/>
-              </a:lnSpc>
-              <a:spcBef>
-                <a:spcPts val="500"/>
-              </a:spcBef>
-              <a:buFont typeface="Arial" panose="020B0604020202020204" pitchFamily="34" charset="0"/>
-              <a:buChar char="•"/>
-              <a:defRPr sz="1800" kern="1200">
-                <a:solidFill>
-                  <a:schemeClr val="tx1"/>
-                </a:solidFill>
-                <a:latin typeface="+mn-lt"/>
-                <a:ea typeface="+mn-ea"/>
-                <a:cs typeface="+mn-cs"/>
-              </a:defRPr>
-            </a:lvl8pPr>
-            <a:lvl9pPr marL="3886200" indent="-228600" algn="l" defTabSz="914400" rtl="0" eaLnBrk="1" latinLnBrk="0" hangingPunct="1">
-              <a:lnSpc>
-                <a:spcPct val="90000"/>
-              </a:lnSpc>
-              <a:spcBef>
-                <a:spcPts val="500"/>
-              </a:spcBef>
-              <a:buFont typeface="Arial" panose="020B0604020202020204" pitchFamily="34" charset="0"/>
-              <a:buChar char="•"/>
-              <a:defRPr sz="1800" kern="1200">
-                <a:solidFill>
-                  <a:schemeClr val="tx1"/>
-                </a:solidFill>
-                <a:latin typeface="+mn-lt"/>
-                <a:ea typeface="+mn-ea"/>
-                <a:cs typeface="+mn-cs"/>
-              </a:defRPr>
-            </a:lvl9pPr>
-          </a:lstStyle>
-          <a:p>
-            <a:pPr marL="0" indent="0">
-              <a:buNone/>
+          <a:lstStyle/>
+          <a:p>
+            <a:r>
+              <a:rPr lang="en-US" b="1" dirty="0">
+                <a:solidFill>
+                  <a:schemeClr val="tx2">
+                    <a:lumMod val="75000"/>
+                    <a:lumOff val="25000"/>
+                  </a:schemeClr>
+                </a:solidFill>
+              </a:rPr>
+              <a:t>Multiple Imputation Procedure:</a:t>
+            </a:r>
+          </a:p>
+        </p:txBody>
+      </p:sp>
+      <p:sp>
+        <p:nvSpPr>
+          <p:cNvPr id="5" name="TextBox 4">
+            <a:extLst>
+              <a:ext uri="{FF2B5EF4-FFF2-40B4-BE49-F238E27FC236}">
+                <a16:creationId xmlns:a16="http://schemas.microsoft.com/office/drawing/2014/main" id="{46D2630A-956E-9067-6F05-9BD8D4541AE2}"/>
+              </a:ext>
+            </a:extLst>
+          </p:cNvPr>
+          <p:cNvSpPr txBox="1"/>
+          <p:nvPr/>
+        </p:nvSpPr>
+        <p:spPr>
+          <a:xfrm>
+            <a:off x="1445740" y="2049677"/>
+            <a:ext cx="5280096" cy="2031325"/>
+          </a:xfrm>
+          <a:prstGeom prst="rect">
+            <a:avLst/>
+          </a:prstGeom>
+          <a:noFill/>
+        </p:spPr>
+        <p:txBody>
+          <a:bodyPr wrap="square" rtlCol="0">
+            <a:spAutoFit/>
+          </a:bodyPr>
+          <a:lstStyle/>
+          <a:p>
+            <a:pPr marL="285750" indent="-285750">
+              <a:buFont typeface="Wingdings" panose="05000000000000000000" pitchFamily="2" charset="2"/>
+              <a:buChar char="§"/>
             </a:pPr>
             <a:r>
-              <a:rPr lang="en-US" sz="2400" dirty="0">
-                <a:solidFill>
-                  <a:srgbClr val="000000"/>
-                </a:solidFill>
-                <a:latin typeface="Century Gothic" panose="020B0502020202020204" pitchFamily="34" charset="0"/>
-              </a:rPr>
-              <a:t>White sharks</a:t>
-            </a:r>
+              <a:rPr lang="en-US" dirty="0"/>
+              <a:t>Generate several plausible filtered/regularized tracks</a:t>
+            </a:r>
+          </a:p>
+          <a:p>
+            <a:pPr marL="285750" indent="-285750">
+              <a:buFont typeface="Wingdings" panose="05000000000000000000" pitchFamily="2" charset="2"/>
+              <a:buChar char="§"/>
+            </a:pPr>
+            <a:endParaRPr lang="en-US" dirty="0"/>
+          </a:p>
+          <a:p>
+            <a:pPr marL="285750" indent="-285750">
+              <a:buFont typeface="Wingdings" panose="05000000000000000000" pitchFamily="2" charset="2"/>
+              <a:buChar char="§"/>
+            </a:pPr>
+            <a:r>
+              <a:rPr lang="en-US" dirty="0"/>
+              <a:t>Fit an HMM to each imputed regular track</a:t>
+            </a:r>
+          </a:p>
+          <a:p>
+            <a:pPr marL="285750" indent="-285750">
+              <a:buFont typeface="Wingdings" panose="05000000000000000000" pitchFamily="2" charset="2"/>
+              <a:buChar char="§"/>
+            </a:pPr>
+            <a:endParaRPr lang="en-US" dirty="0"/>
+          </a:p>
+          <a:p>
+            <a:pPr marL="285750" indent="-285750">
+              <a:buFont typeface="Wingdings" panose="05000000000000000000" pitchFamily="2" charset="2"/>
+              <a:buChar char="§"/>
+            </a:pPr>
+            <a:r>
+              <a:rPr lang="en-US" dirty="0"/>
+              <a:t>Combine HMMs to get parameters with better uncertainty estimates</a:t>
+            </a:r>
+          </a:p>
+        </p:txBody>
+      </p:sp>
+      <p:sp>
+        <p:nvSpPr>
+          <p:cNvPr id="6" name="TextBox 5">
+            <a:extLst>
+              <a:ext uri="{FF2B5EF4-FFF2-40B4-BE49-F238E27FC236}">
+                <a16:creationId xmlns:a16="http://schemas.microsoft.com/office/drawing/2014/main" id="{64A33355-12E5-F28F-82A4-29C6E2450BD8}"/>
+              </a:ext>
+            </a:extLst>
+          </p:cNvPr>
+          <p:cNvSpPr txBox="1"/>
+          <p:nvPr/>
+        </p:nvSpPr>
+        <p:spPr>
+          <a:xfrm>
+            <a:off x="10436391" y="6154194"/>
+            <a:ext cx="1755609" cy="276999"/>
+          </a:xfrm>
+          <a:prstGeom prst="rect">
+            <a:avLst/>
+          </a:prstGeom>
+          <a:noFill/>
+        </p:spPr>
+        <p:txBody>
+          <a:bodyPr wrap="none" rtlCol="0">
+            <a:spAutoFit/>
+          </a:bodyPr>
+          <a:lstStyle/>
+          <a:p>
+            <a:r>
+              <a:rPr lang="en-US" sz="1200" dirty="0"/>
+              <a:t>Slide from T. </a:t>
+            </a:r>
+            <a:r>
+              <a:rPr lang="en-US" sz="1200" dirty="0" err="1"/>
+              <a:t>Michelot</a:t>
+            </a:r>
+            <a:endParaRPr lang="en-US" sz="1200" dirty="0"/>
           </a:p>
         </p:txBody>
       </p:sp>
     </p:spTree>
     <p:extLst>
       <p:ext uri="{BB962C8B-B14F-4D97-AF65-F5344CB8AC3E}">
-        <p14:creationId xmlns:p14="http://schemas.microsoft.com/office/powerpoint/2010/main" val="2030565029"/>
+        <p14:creationId xmlns:p14="http://schemas.microsoft.com/office/powerpoint/2010/main" val="1082991806"/>
       </p:ext>
     </p:extLst>
   </p:cSld>
@@ -11548,7 +11308,7 @@
 </p:sld>
 </file>
 
-<file path=ppt/slides/slide16.xml><?xml version="1.0" encoding="utf-8"?>
+<file path=ppt/slides/slide17.xml><?xml version="1.0" encoding="utf-8"?>
 <p:sld xmlns:a="http://schemas.openxmlformats.org/drawingml/2006/main" xmlns:r="http://schemas.openxmlformats.org/officeDocument/2006/relationships" xmlns:p="http://schemas.openxmlformats.org/presentationml/2006/main" show="0">
   <p:cSld>
     <p:spTree>
@@ -11565,49 +11325,12 @@
           <a:chExt cx="0" cy="0"/>
         </a:xfrm>
       </p:grpSpPr>
-      <p:pic>
-        <p:nvPicPr>
-          <p:cNvPr id="5" name="Picture 4">
-            <a:extLst>
-              <a:ext uri="{FF2B5EF4-FFF2-40B4-BE49-F238E27FC236}">
-                <a16:creationId xmlns:a16="http://schemas.microsoft.com/office/drawing/2014/main" id="{13A95B28-469D-456F-E149-DBA3DD45F9D4}"/>
-              </a:ext>
-            </a:extLst>
-          </p:cNvPr>
-          <p:cNvPicPr>
-            <a:picLocks noChangeAspect="1"/>
-          </p:cNvPicPr>
-          <p:nvPr/>
-        </p:nvPicPr>
-        <p:blipFill>
-          <a:blip r:embed="rId3"/>
-          <a:stretch>
-            <a:fillRect/>
-          </a:stretch>
-        </p:blipFill>
-        <p:spPr>
-          <a:xfrm>
-            <a:off x="8755035" y="189912"/>
-            <a:ext cx="3202858" cy="1202108"/>
-          </a:xfrm>
-          <a:prstGeom prst="rect">
-            <a:avLst/>
-          </a:prstGeom>
-          <a:effectLst>
-            <a:outerShdw blurRad="50800" dist="38100" dir="2700000" algn="tl" rotWithShape="0">
-              <a:prstClr val="black">
-                <a:alpha val="40000"/>
-              </a:prstClr>
-            </a:outerShdw>
-          </a:effectLst>
-        </p:spPr>
-      </p:pic>
-      <p:sp>
-        <p:nvSpPr>
-          <p:cNvPr id="6" name="Title 1">
-            <a:extLst>
-              <a:ext uri="{FF2B5EF4-FFF2-40B4-BE49-F238E27FC236}">
-                <a16:creationId xmlns:a16="http://schemas.microsoft.com/office/drawing/2014/main" id="{D2423119-BDFC-20DD-5D3C-34ED838E21B3}"/>
+      <p:sp>
+        <p:nvSpPr>
+          <p:cNvPr id="4" name="Title 1">
+            <a:extLst>
+              <a:ext uri="{FF2B5EF4-FFF2-40B4-BE49-F238E27FC236}">
+                <a16:creationId xmlns:a16="http://schemas.microsoft.com/office/drawing/2014/main" id="{D8E4D343-E403-96F1-07FE-A9B868F8B2C9}"/>
               </a:ext>
             </a:extLst>
           </p:cNvPr>
@@ -11655,7 +11378,7 @@
                   <a:srgbClr val="000000"/>
                 </a:solidFill>
               </a:rPr>
-              <a:t>HMM Examples/Applications</a:t>
+              <a:t>Challenges to HMMs</a:t>
             </a:r>
             <a:br>
               <a:rPr lang="en-US" sz="3200" b="1" dirty="0">
@@ -11670,10 +11393,10 @@
       </p:sp>
       <p:sp>
         <p:nvSpPr>
-          <p:cNvPr id="7" name="Content Placeholder 2">
-            <a:extLst>
-              <a:ext uri="{FF2B5EF4-FFF2-40B4-BE49-F238E27FC236}">
-                <a16:creationId xmlns:a16="http://schemas.microsoft.com/office/drawing/2014/main" id="{0763D88C-3DF0-1858-4DF6-215074FE45D0}"/>
+          <p:cNvPr id="5" name="Content Placeholder 2">
+            <a:extLst>
+              <a:ext uri="{FF2B5EF4-FFF2-40B4-BE49-F238E27FC236}">
+                <a16:creationId xmlns:a16="http://schemas.microsoft.com/office/drawing/2014/main" id="{1A7E6DF1-1F3D-2A2F-4B4E-8D7EAEEB7444}"/>
               </a:ext>
             </a:extLst>
           </p:cNvPr>
@@ -11684,8 +11407,8 @@
         </p:nvSpPr>
         <p:spPr>
           <a:xfrm>
-            <a:off x="969484" y="1167789"/>
-            <a:ext cx="10515600" cy="796562"/>
+            <a:off x="969484" y="1420465"/>
+            <a:ext cx="10515600" cy="3478857"/>
           </a:xfrm>
           <a:prstGeom prst="rect">
             <a:avLst/>
@@ -11860,9 +11583,6 @@
             </a:lvl9pPr>
           </a:lstStyle>
           <a:p>
-            <a:pPr marL="0" indent="0">
-              <a:buNone/>
-            </a:pPr>
             <a:r>
               <a:rPr lang="en-US" sz="2400" dirty="0">
                 <a:solidFill>
@@ -11870,602 +11590,165 @@
                 </a:solidFill>
                 <a:latin typeface="Century Gothic" panose="020B0502020202020204" pitchFamily="34" charset="0"/>
               </a:rPr>
-              <a:t>Black bears</a:t>
-            </a:r>
-          </a:p>
-        </p:txBody>
-      </p:sp>
-      <p:pic>
-        <p:nvPicPr>
-          <p:cNvPr id="10" name="Picture 9">
-            <a:extLst>
-              <a:ext uri="{FF2B5EF4-FFF2-40B4-BE49-F238E27FC236}">
-                <a16:creationId xmlns:a16="http://schemas.microsoft.com/office/drawing/2014/main" id="{F5861BC6-536A-FD03-42D8-A46494586F76}"/>
-              </a:ext>
-            </a:extLst>
-          </p:cNvPr>
-          <p:cNvPicPr>
-            <a:picLocks noChangeAspect="1"/>
-          </p:cNvPicPr>
-          <p:nvPr/>
-        </p:nvPicPr>
-        <p:blipFill>
-          <a:blip r:embed="rId4"/>
-          <a:stretch>
-            <a:fillRect/>
-          </a:stretch>
-        </p:blipFill>
-        <p:spPr>
-          <a:xfrm>
-            <a:off x="674803" y="1781299"/>
-            <a:ext cx="6111547" cy="4342978"/>
-          </a:xfrm>
-          <a:prstGeom prst="rect">
-            <a:avLst/>
-          </a:prstGeom>
-        </p:spPr>
-      </p:pic>
-      <p:sp>
-        <p:nvSpPr>
-          <p:cNvPr id="13" name="Rectangle 12">
-            <a:extLst>
-              <a:ext uri="{FF2B5EF4-FFF2-40B4-BE49-F238E27FC236}">
-                <a16:creationId xmlns:a16="http://schemas.microsoft.com/office/drawing/2014/main" id="{31074A89-6955-FFB3-98B0-677BC9540B55}"/>
-              </a:ext>
-            </a:extLst>
-          </p:cNvPr>
-          <p:cNvSpPr/>
-          <p:nvPr/>
-        </p:nvSpPr>
-        <p:spPr>
-          <a:xfrm>
-            <a:off x="5617029" y="3289465"/>
-            <a:ext cx="1009403" cy="796562"/>
-          </a:xfrm>
-          <a:prstGeom prst="rect">
-            <a:avLst/>
-          </a:prstGeom>
-          <a:solidFill>
-            <a:schemeClr val="bg1"/>
-          </a:solidFill>
-          <a:ln>
-            <a:noFill/>
-          </a:ln>
-        </p:spPr>
-        <p:style>
-          <a:lnRef idx="2">
-            <a:schemeClr val="accent1">
-              <a:shade val="15000"/>
-            </a:schemeClr>
-          </a:lnRef>
-          <a:fillRef idx="1">
-            <a:schemeClr val="accent1"/>
-          </a:fillRef>
-          <a:effectRef idx="0">
-            <a:schemeClr val="accent1"/>
-          </a:effectRef>
-          <a:fontRef idx="minor">
-            <a:schemeClr val="lt1"/>
-          </a:fontRef>
-        </p:style>
-        <p:txBody>
-          <a:bodyPr rtlCol="0" anchor="ctr"/>
-          <a:lstStyle/>
-          <a:p>
-            <a:pPr algn="ctr"/>
-            <a:endParaRPr lang="en-US"/>
-          </a:p>
-        </p:txBody>
-      </p:sp>
-      <p:pic>
-        <p:nvPicPr>
-          <p:cNvPr id="12" name="Picture 11">
-            <a:extLst>
-              <a:ext uri="{FF2B5EF4-FFF2-40B4-BE49-F238E27FC236}">
-                <a16:creationId xmlns:a16="http://schemas.microsoft.com/office/drawing/2014/main" id="{4456C346-A9C1-7918-9774-B9658D8BAB89}"/>
-              </a:ext>
-            </a:extLst>
-          </p:cNvPr>
-          <p:cNvPicPr>
-            <a:picLocks noChangeAspect="1"/>
-          </p:cNvPicPr>
-          <p:nvPr/>
-        </p:nvPicPr>
-        <p:blipFill>
-          <a:blip r:embed="rId5"/>
-          <a:stretch>
-            <a:fillRect/>
-          </a:stretch>
-        </p:blipFill>
-        <p:spPr>
-          <a:xfrm>
-            <a:off x="6143501" y="1781299"/>
-            <a:ext cx="5790520" cy="4441273"/>
-          </a:xfrm>
-          <a:prstGeom prst="rect">
-            <a:avLst/>
-          </a:prstGeom>
-        </p:spPr>
-      </p:pic>
-      <p:sp>
-        <p:nvSpPr>
-          <p:cNvPr id="14" name="TextBox 13">
-            <a:extLst>
-              <a:ext uri="{FF2B5EF4-FFF2-40B4-BE49-F238E27FC236}">
-                <a16:creationId xmlns:a16="http://schemas.microsoft.com/office/drawing/2014/main" id="{66145727-7141-F147-1126-2E01ED5C11EE}"/>
-              </a:ext>
-            </a:extLst>
-          </p:cNvPr>
-          <p:cNvSpPr txBox="1"/>
-          <p:nvPr/>
-        </p:nvSpPr>
-        <p:spPr>
-          <a:xfrm>
-            <a:off x="65600" y="2428234"/>
-            <a:ext cx="734496" cy="307777"/>
-          </a:xfrm>
-          <a:prstGeom prst="rect">
-            <a:avLst/>
-          </a:prstGeom>
-          <a:noFill/>
-        </p:spPr>
-        <p:txBody>
-          <a:bodyPr wrap="none" rtlCol="0">
-            <a:spAutoFit/>
-          </a:bodyPr>
-          <a:lstStyle/>
-          <a:p>
-            <a:r>
-              <a:rPr lang="en-US" sz="1400" dirty="0"/>
-              <a:t>Winter</a:t>
-            </a:r>
-          </a:p>
-        </p:txBody>
-      </p:sp>
-      <p:sp>
-        <p:nvSpPr>
-          <p:cNvPr id="15" name="TextBox 14">
-            <a:extLst>
-              <a:ext uri="{FF2B5EF4-FFF2-40B4-BE49-F238E27FC236}">
-                <a16:creationId xmlns:a16="http://schemas.microsoft.com/office/drawing/2014/main" id="{77531B7A-22AC-4433-58FC-3DD9017B0A26}"/>
-              </a:ext>
-            </a:extLst>
-          </p:cNvPr>
-          <p:cNvSpPr txBox="1"/>
-          <p:nvPr/>
-        </p:nvSpPr>
-        <p:spPr>
-          <a:xfrm>
-            <a:off x="81151" y="3662775"/>
-            <a:ext cx="891591" cy="307777"/>
-          </a:xfrm>
-          <a:prstGeom prst="rect">
-            <a:avLst/>
-          </a:prstGeom>
-          <a:noFill/>
-        </p:spPr>
-        <p:txBody>
-          <a:bodyPr wrap="none" rtlCol="0">
-            <a:spAutoFit/>
-          </a:bodyPr>
-          <a:lstStyle/>
-          <a:p>
-            <a:r>
-              <a:rPr lang="en-US" sz="1400" dirty="0"/>
-              <a:t>Summer</a:t>
-            </a:r>
-          </a:p>
-        </p:txBody>
-      </p:sp>
-      <p:sp>
-        <p:nvSpPr>
-          <p:cNvPr id="16" name="TextBox 15">
-            <a:extLst>
-              <a:ext uri="{FF2B5EF4-FFF2-40B4-BE49-F238E27FC236}">
-                <a16:creationId xmlns:a16="http://schemas.microsoft.com/office/drawing/2014/main" id="{BED18DDD-4629-5EB8-FF83-9F0FCA545D5F}"/>
-              </a:ext>
-            </a:extLst>
-          </p:cNvPr>
-          <p:cNvSpPr txBox="1"/>
-          <p:nvPr/>
-        </p:nvSpPr>
-        <p:spPr>
-          <a:xfrm>
-            <a:off x="62754" y="4908656"/>
-            <a:ext cx="465192" cy="307777"/>
-          </a:xfrm>
-          <a:prstGeom prst="rect">
-            <a:avLst/>
-          </a:prstGeom>
-          <a:noFill/>
-        </p:spPr>
-        <p:txBody>
-          <a:bodyPr wrap="none" rtlCol="0">
-            <a:spAutoFit/>
-          </a:bodyPr>
-          <a:lstStyle/>
-          <a:p>
-            <a:r>
-              <a:rPr lang="en-US" sz="1400" dirty="0"/>
-              <a:t>Fall</a:t>
-            </a:r>
+              <a:t>Starting parameters values and correct distributional forms</a:t>
+            </a:r>
+          </a:p>
+          <a:p>
+            <a:r>
+              <a:rPr lang="en-US" sz="2400" dirty="0">
+                <a:solidFill>
+                  <a:srgbClr val="000000"/>
+                </a:solidFill>
+                <a:latin typeface="Century Gothic" panose="020B0502020202020204" pitchFamily="34" charset="0"/>
+              </a:rPr>
+              <a:t>Choosing the # of states to model (</a:t>
+            </a:r>
+            <a:r>
+              <a:rPr lang="en-US" sz="2400" dirty="0" err="1">
+                <a:solidFill>
+                  <a:srgbClr val="000000"/>
+                </a:solidFill>
+                <a:latin typeface="Century Gothic" panose="020B0502020202020204" pitchFamily="34" charset="0"/>
+              </a:rPr>
+              <a:t>Pohle</a:t>
+            </a:r>
+            <a:r>
+              <a:rPr lang="en-US" sz="2400" dirty="0">
+                <a:solidFill>
+                  <a:srgbClr val="000000"/>
+                </a:solidFill>
+                <a:latin typeface="Century Gothic" panose="020B0502020202020204" pitchFamily="34" charset="0"/>
+              </a:rPr>
+              <a:t> et al. 2017)</a:t>
+            </a:r>
+          </a:p>
+          <a:p>
+            <a:r>
+              <a:rPr lang="en-US" sz="2400" dirty="0">
+                <a:solidFill>
+                  <a:srgbClr val="000000"/>
+                </a:solidFill>
+                <a:latin typeface="Century Gothic" panose="020B0502020202020204" pitchFamily="34" charset="0"/>
+              </a:rPr>
+              <a:t>Impact of sampling schedule (P</a:t>
+            </a:r>
+            <a:r>
+              <a:rPr lang="en-US" sz="2400" b="0" i="0" u="none" strike="noStrike" baseline="0" dirty="0">
+                <a:solidFill>
+                  <a:srgbClr val="000000"/>
+                </a:solidFill>
+                <a:latin typeface="Avenir Next LT Pro" panose="020B0504020202020204" pitchFamily="34" charset="0"/>
+              </a:rPr>
+              <a:t>ostlethwaite and Dennis, 2013)</a:t>
+            </a:r>
+          </a:p>
+          <a:p>
+            <a:pPr lvl="1"/>
+            <a:r>
+              <a:rPr lang="en-US" sz="2000" dirty="0">
+                <a:solidFill>
+                  <a:srgbClr val="000000"/>
+                </a:solidFill>
+                <a:latin typeface="+mj-lt"/>
+              </a:rPr>
+              <a:t>Higher resolution tends to improve identification of behavioral states as long as error is much smaller than step length</a:t>
+            </a:r>
+            <a:endParaRPr lang="en-US" sz="2000" b="0" i="0" u="none" strike="noStrike" baseline="0" dirty="0">
+              <a:solidFill>
+                <a:srgbClr val="000000"/>
+              </a:solidFill>
+              <a:latin typeface="+mj-lt"/>
+            </a:endParaRPr>
+          </a:p>
+          <a:p>
+            <a:r>
+              <a:rPr lang="en-US" sz="2400" dirty="0">
+                <a:solidFill>
+                  <a:srgbClr val="000000"/>
+                </a:solidFill>
+                <a:latin typeface="Avenir Next LT Pro" panose="020B0504020202020204" pitchFamily="34" charset="0"/>
+              </a:rPr>
+              <a:t>Irregular sampling</a:t>
+            </a:r>
+          </a:p>
+          <a:p>
+            <a:pPr lvl="1"/>
+            <a:r>
+              <a:rPr lang="en-US" sz="2000" b="0" i="0" u="none" strike="noStrike" baseline="0" dirty="0">
+                <a:solidFill>
+                  <a:srgbClr val="000000"/>
+                </a:solidFill>
+                <a:latin typeface="+mj-lt"/>
+              </a:rPr>
+              <a:t>State space models with </a:t>
+            </a:r>
+            <a:r>
+              <a:rPr lang="en-US" sz="2000" b="0" i="0" u="none" strike="noStrike" baseline="0" dirty="0">
+                <a:solidFill>
+                  <a:srgbClr val="000000"/>
+                </a:solidFill>
+                <a:latin typeface="Courier New" panose="02070309020205020404" pitchFamily="49" charset="0"/>
+              </a:rPr>
+              <a:t>crawl </a:t>
+            </a:r>
+            <a:r>
+              <a:rPr lang="en-US" sz="2000" b="0" i="0" u="none" strike="noStrike" baseline="0" dirty="0">
+                <a:solidFill>
+                  <a:srgbClr val="000000"/>
+                </a:solidFill>
+                <a:latin typeface="+mj-lt"/>
+              </a:rPr>
+              <a:t>or </a:t>
+            </a:r>
+            <a:r>
+              <a:rPr lang="en-US" sz="2000" b="0" i="0" u="none" strike="noStrike" baseline="0" dirty="0" err="1">
+                <a:solidFill>
+                  <a:srgbClr val="000000"/>
+                </a:solidFill>
+                <a:latin typeface="Courier New" panose="02070309020205020404" pitchFamily="49" charset="0"/>
+              </a:rPr>
+              <a:t>aniMotum</a:t>
+            </a:r>
+            <a:r>
+              <a:rPr lang="en-US" sz="2000" b="0" i="0" u="none" strike="noStrike" baseline="0" dirty="0">
+                <a:solidFill>
+                  <a:srgbClr val="000000"/>
+                </a:solidFill>
+                <a:latin typeface="Courier New" panose="02070309020205020404" pitchFamily="49" charset="0"/>
+              </a:rPr>
+              <a:t> or </a:t>
+            </a:r>
+            <a:r>
+              <a:rPr lang="en-US" sz="2000" b="0" i="0" u="none" strike="noStrike" baseline="0" dirty="0">
+                <a:solidFill>
+                  <a:srgbClr val="000000"/>
+                </a:solidFill>
+                <a:latin typeface="Century Gothic" panose="020B0502020202020204" pitchFamily="34" charset="0"/>
+              </a:rPr>
+              <a:t>continuous time models with </a:t>
+            </a:r>
+            <a:r>
+              <a:rPr lang="en-US" sz="2000" b="0" i="0" u="none" strike="noStrike" baseline="0" dirty="0" err="1">
+                <a:solidFill>
+                  <a:srgbClr val="000000"/>
+                </a:solidFill>
+                <a:latin typeface="Courier New" panose="02070309020205020404" pitchFamily="49" charset="0"/>
+              </a:rPr>
+              <a:t>ctmm</a:t>
+            </a:r>
+            <a:endParaRPr lang="en-US" sz="2000" b="0" i="0" u="none" strike="noStrike" baseline="0" dirty="0">
+              <a:solidFill>
+                <a:srgbClr val="000000"/>
+              </a:solidFill>
+              <a:latin typeface="+mj-lt"/>
+            </a:endParaRPr>
           </a:p>
         </p:txBody>
       </p:sp>
     </p:spTree>
     <p:extLst>
       <p:ext uri="{BB962C8B-B14F-4D97-AF65-F5344CB8AC3E}">
-        <p14:creationId xmlns:p14="http://schemas.microsoft.com/office/powerpoint/2010/main" val="3592145699"/>
-      </p:ext>
-    </p:extLst>
-  </p:cSld>
-  <p:clrMapOvr>
-    <a:masterClrMapping/>
-  </p:clrMapOvr>
-</p:sld>
-</file>
-
-<file path=ppt/slides/slide17.xml><?xml version="1.0" encoding="utf-8"?>
-<p:sld xmlns:a="http://schemas.openxmlformats.org/drawingml/2006/main" xmlns:r="http://schemas.openxmlformats.org/officeDocument/2006/relationships" xmlns:p="http://schemas.openxmlformats.org/presentationml/2006/main">
-  <p:cSld>
-    <p:spTree>
-      <p:nvGrpSpPr>
-        <p:cNvPr id="1" name=""/>
-        <p:cNvGrpSpPr/>
-        <p:nvPr/>
-      </p:nvGrpSpPr>
-      <p:grpSpPr>
-        <a:xfrm>
-          <a:off x="0" y="0"/>
-          <a:ext cx="0" cy="0"/>
-          <a:chOff x="0" y="0"/>
-          <a:chExt cx="0" cy="0"/>
-        </a:xfrm>
-      </p:grpSpPr>
-      <p:pic>
-        <p:nvPicPr>
-          <p:cNvPr id="9" name="Picture 8">
-            <a:extLst>
-              <a:ext uri="{FF2B5EF4-FFF2-40B4-BE49-F238E27FC236}">
-                <a16:creationId xmlns:a16="http://schemas.microsoft.com/office/drawing/2014/main" id="{E36BE2B3-53A8-66AD-9577-C1DF401C8D77}"/>
-              </a:ext>
-            </a:extLst>
-          </p:cNvPr>
-          <p:cNvPicPr>
-            <a:picLocks noChangeAspect="1"/>
-          </p:cNvPicPr>
-          <p:nvPr/>
-        </p:nvPicPr>
-        <p:blipFill>
-          <a:blip r:embed="rId3"/>
-          <a:stretch>
-            <a:fillRect/>
-          </a:stretch>
-        </p:blipFill>
-        <p:spPr>
-          <a:xfrm>
-            <a:off x="1839010" y="926275"/>
-            <a:ext cx="8827216" cy="5402986"/>
-          </a:xfrm>
-          <a:prstGeom prst="rect">
-            <a:avLst/>
-          </a:prstGeom>
-        </p:spPr>
-      </p:pic>
-      <p:pic>
-        <p:nvPicPr>
-          <p:cNvPr id="6" name="Picture 5">
-            <a:extLst>
-              <a:ext uri="{FF2B5EF4-FFF2-40B4-BE49-F238E27FC236}">
-                <a16:creationId xmlns:a16="http://schemas.microsoft.com/office/drawing/2014/main" id="{30B4319F-9470-C945-884E-761E598B0367}"/>
-              </a:ext>
-            </a:extLst>
-          </p:cNvPr>
-          <p:cNvPicPr>
-            <a:picLocks noChangeAspect="1"/>
-          </p:cNvPicPr>
-          <p:nvPr/>
-        </p:nvPicPr>
-        <p:blipFill>
-          <a:blip r:embed="rId4"/>
-          <a:stretch>
-            <a:fillRect/>
-          </a:stretch>
-        </p:blipFill>
-        <p:spPr>
-          <a:xfrm>
-            <a:off x="7931753" y="109130"/>
-            <a:ext cx="4144171" cy="977462"/>
-          </a:xfrm>
-          <a:prstGeom prst="rect">
-            <a:avLst/>
-          </a:prstGeom>
-          <a:effectLst>
-            <a:outerShdw blurRad="50800" dist="38100" dir="2700000" algn="tl" rotWithShape="0">
-              <a:prstClr val="black">
-                <a:alpha val="40000"/>
-              </a:prstClr>
-            </a:outerShdw>
-          </a:effectLst>
-        </p:spPr>
-      </p:pic>
-      <p:sp>
-        <p:nvSpPr>
-          <p:cNvPr id="10" name="Content Placeholder 2">
-            <a:extLst>
-              <a:ext uri="{FF2B5EF4-FFF2-40B4-BE49-F238E27FC236}">
-                <a16:creationId xmlns:a16="http://schemas.microsoft.com/office/drawing/2014/main" id="{C76A4B64-63E5-5DBD-FA2F-22FC97AE2331}"/>
-              </a:ext>
-            </a:extLst>
-          </p:cNvPr>
-          <p:cNvSpPr txBox="1">
-            <a:spLocks/>
-          </p:cNvSpPr>
-          <p:nvPr/>
-        </p:nvSpPr>
-        <p:spPr>
-          <a:xfrm>
-            <a:off x="969484" y="1167789"/>
-            <a:ext cx="10515600" cy="796562"/>
-          </a:xfrm>
-          <a:prstGeom prst="rect">
-            <a:avLst/>
-          </a:prstGeom>
-        </p:spPr>
-        <p:txBody>
-          <a:bodyPr vert="horz" lIns="91440" tIns="45720" rIns="91440" bIns="45720" rtlCol="0">
-            <a:noAutofit/>
-          </a:bodyPr>
-          <a:lstStyle>
-            <a:lvl1pPr marL="228600" indent="-228600" algn="l" defTabSz="914400" rtl="0" eaLnBrk="1" latinLnBrk="0" hangingPunct="1">
-              <a:lnSpc>
-                <a:spcPct val="90000"/>
-              </a:lnSpc>
-              <a:spcBef>
-                <a:spcPts val="1000"/>
-              </a:spcBef>
-              <a:buFont typeface="Arial" panose="020B0604020202020204" pitchFamily="34" charset="0"/>
-              <a:buChar char="•"/>
-              <a:defRPr sz="2800" kern="1200">
-                <a:solidFill>
-                  <a:schemeClr val="tx1"/>
-                </a:solidFill>
-                <a:latin typeface="+mn-lt"/>
-                <a:ea typeface="+mn-ea"/>
-                <a:cs typeface="+mn-cs"/>
-              </a:defRPr>
-            </a:lvl1pPr>
-            <a:lvl2pPr marL="685800" indent="-228600" algn="l" defTabSz="914400" rtl="0" eaLnBrk="1" latinLnBrk="0" hangingPunct="1">
-              <a:lnSpc>
-                <a:spcPct val="90000"/>
-              </a:lnSpc>
-              <a:spcBef>
-                <a:spcPts val="500"/>
-              </a:spcBef>
-              <a:buFont typeface="Arial" panose="020B0604020202020204" pitchFamily="34" charset="0"/>
-              <a:buChar char="•"/>
-              <a:defRPr sz="2400" kern="1200">
-                <a:solidFill>
-                  <a:schemeClr val="tx1"/>
-                </a:solidFill>
-                <a:latin typeface="+mn-lt"/>
-                <a:ea typeface="+mn-ea"/>
-                <a:cs typeface="+mn-cs"/>
-              </a:defRPr>
-            </a:lvl2pPr>
-            <a:lvl3pPr marL="1143000" indent="-228600" algn="l" defTabSz="914400" rtl="0" eaLnBrk="1" latinLnBrk="0" hangingPunct="1">
-              <a:lnSpc>
-                <a:spcPct val="90000"/>
-              </a:lnSpc>
-              <a:spcBef>
-                <a:spcPts val="500"/>
-              </a:spcBef>
-              <a:buFont typeface="Arial" panose="020B0604020202020204" pitchFamily="34" charset="0"/>
-              <a:buChar char="•"/>
-              <a:defRPr sz="2000" kern="1200">
-                <a:solidFill>
-                  <a:schemeClr val="tx1"/>
-                </a:solidFill>
-                <a:latin typeface="+mn-lt"/>
-                <a:ea typeface="+mn-ea"/>
-                <a:cs typeface="+mn-cs"/>
-              </a:defRPr>
-            </a:lvl3pPr>
-            <a:lvl4pPr marL="1600200" indent="-228600" algn="l" defTabSz="914400" rtl="0" eaLnBrk="1" latinLnBrk="0" hangingPunct="1">
-              <a:lnSpc>
-                <a:spcPct val="90000"/>
-              </a:lnSpc>
-              <a:spcBef>
-                <a:spcPts val="500"/>
-              </a:spcBef>
-              <a:buFont typeface="Arial" panose="020B0604020202020204" pitchFamily="34" charset="0"/>
-              <a:buChar char="•"/>
-              <a:defRPr sz="1800" kern="1200">
-                <a:solidFill>
-                  <a:schemeClr val="tx1"/>
-                </a:solidFill>
-                <a:latin typeface="+mn-lt"/>
-                <a:ea typeface="+mn-ea"/>
-                <a:cs typeface="+mn-cs"/>
-              </a:defRPr>
-            </a:lvl4pPr>
-            <a:lvl5pPr marL="2057400" indent="-228600" algn="l" defTabSz="914400" rtl="0" eaLnBrk="1" latinLnBrk="0" hangingPunct="1">
-              <a:lnSpc>
-                <a:spcPct val="90000"/>
-              </a:lnSpc>
-              <a:spcBef>
-                <a:spcPts val="500"/>
-              </a:spcBef>
-              <a:buFont typeface="Arial" panose="020B0604020202020204" pitchFamily="34" charset="0"/>
-              <a:buChar char="•"/>
-              <a:defRPr sz="1800" kern="1200">
-                <a:solidFill>
-                  <a:schemeClr val="tx1"/>
-                </a:solidFill>
-                <a:latin typeface="+mn-lt"/>
-                <a:ea typeface="+mn-ea"/>
-                <a:cs typeface="+mn-cs"/>
-              </a:defRPr>
-            </a:lvl5pPr>
-            <a:lvl6pPr marL="2514600" indent="-228600" algn="l" defTabSz="914400" rtl="0" eaLnBrk="1" latinLnBrk="0" hangingPunct="1">
-              <a:lnSpc>
-                <a:spcPct val="90000"/>
-              </a:lnSpc>
-              <a:spcBef>
-                <a:spcPts val="500"/>
-              </a:spcBef>
-              <a:buFont typeface="Arial" panose="020B0604020202020204" pitchFamily="34" charset="0"/>
-              <a:buChar char="•"/>
-              <a:defRPr sz="1800" kern="1200">
-                <a:solidFill>
-                  <a:schemeClr val="tx1"/>
-                </a:solidFill>
-                <a:latin typeface="+mn-lt"/>
-                <a:ea typeface="+mn-ea"/>
-                <a:cs typeface="+mn-cs"/>
-              </a:defRPr>
-            </a:lvl6pPr>
-            <a:lvl7pPr marL="2971800" indent="-228600" algn="l" defTabSz="914400" rtl="0" eaLnBrk="1" latinLnBrk="0" hangingPunct="1">
-              <a:lnSpc>
-                <a:spcPct val="90000"/>
-              </a:lnSpc>
-              <a:spcBef>
-                <a:spcPts val="500"/>
-              </a:spcBef>
-              <a:buFont typeface="Arial" panose="020B0604020202020204" pitchFamily="34" charset="0"/>
-              <a:buChar char="•"/>
-              <a:defRPr sz="1800" kern="1200">
-                <a:solidFill>
-                  <a:schemeClr val="tx1"/>
-                </a:solidFill>
-                <a:latin typeface="+mn-lt"/>
-                <a:ea typeface="+mn-ea"/>
-                <a:cs typeface="+mn-cs"/>
-              </a:defRPr>
-            </a:lvl7pPr>
-            <a:lvl8pPr marL="3429000" indent="-228600" algn="l" defTabSz="914400" rtl="0" eaLnBrk="1" latinLnBrk="0" hangingPunct="1">
-              <a:lnSpc>
-                <a:spcPct val="90000"/>
-              </a:lnSpc>
-              <a:spcBef>
-                <a:spcPts val="500"/>
-              </a:spcBef>
-              <a:buFont typeface="Arial" panose="020B0604020202020204" pitchFamily="34" charset="0"/>
-              <a:buChar char="•"/>
-              <a:defRPr sz="1800" kern="1200">
-                <a:solidFill>
-                  <a:schemeClr val="tx1"/>
-                </a:solidFill>
-                <a:latin typeface="+mn-lt"/>
-                <a:ea typeface="+mn-ea"/>
-                <a:cs typeface="+mn-cs"/>
-              </a:defRPr>
-            </a:lvl8pPr>
-            <a:lvl9pPr marL="3886200" indent="-228600" algn="l" defTabSz="914400" rtl="0" eaLnBrk="1" latinLnBrk="0" hangingPunct="1">
-              <a:lnSpc>
-                <a:spcPct val="90000"/>
-              </a:lnSpc>
-              <a:spcBef>
-                <a:spcPts val="500"/>
-              </a:spcBef>
-              <a:buFont typeface="Arial" panose="020B0604020202020204" pitchFamily="34" charset="0"/>
-              <a:buChar char="•"/>
-              <a:defRPr sz="1800" kern="1200">
-                <a:solidFill>
-                  <a:schemeClr val="tx1"/>
-                </a:solidFill>
-                <a:latin typeface="+mn-lt"/>
-                <a:ea typeface="+mn-ea"/>
-                <a:cs typeface="+mn-cs"/>
-              </a:defRPr>
-            </a:lvl9pPr>
-          </a:lstStyle>
-          <a:p>
-            <a:pPr marL="0" indent="0">
-              <a:buNone/>
-            </a:pPr>
-            <a:r>
-              <a:rPr lang="en-US" sz="2400" dirty="0">
-                <a:solidFill>
-                  <a:srgbClr val="000000"/>
-                </a:solidFill>
-                <a:latin typeface="Century Gothic" panose="020B0502020202020204" pitchFamily="34" charset="0"/>
-              </a:rPr>
-              <a:t>Plains zebra</a:t>
-            </a:r>
-          </a:p>
-        </p:txBody>
-      </p:sp>
-      <p:sp>
-        <p:nvSpPr>
-          <p:cNvPr id="2" name="Title 1">
-            <a:extLst>
-              <a:ext uri="{FF2B5EF4-FFF2-40B4-BE49-F238E27FC236}">
-                <a16:creationId xmlns:a16="http://schemas.microsoft.com/office/drawing/2014/main" id="{39C317FC-C373-42DA-BD34-BE9D7137F610}"/>
-              </a:ext>
-            </a:extLst>
-          </p:cNvPr>
-          <p:cNvSpPr txBox="1">
-            <a:spLocks/>
-          </p:cNvSpPr>
-          <p:nvPr/>
-        </p:nvSpPr>
-        <p:spPr>
-          <a:xfrm>
-            <a:off x="496675" y="322824"/>
-            <a:ext cx="10515600" cy="1325563"/>
-          </a:xfrm>
-          <a:prstGeom prst="rect">
-            <a:avLst/>
-          </a:prstGeom>
-        </p:spPr>
-        <p:txBody>
-          <a:bodyPr vert="horz" lIns="91440" tIns="45720" rIns="91440" bIns="45720" rtlCol="0" anchor="ctr">
-            <a:normAutofit/>
-          </a:bodyPr>
-          <a:lstStyle>
-            <a:lvl1pPr algn="l" defTabSz="914400" rtl="0" eaLnBrk="1" latinLnBrk="0" hangingPunct="1">
-              <a:lnSpc>
-                <a:spcPct val="90000"/>
-              </a:lnSpc>
-              <a:spcBef>
-                <a:spcPct val="0"/>
-              </a:spcBef>
-              <a:buNone/>
-              <a:defRPr sz="4400" kern="1200">
-                <a:solidFill>
-                  <a:schemeClr val="tx1"/>
-                </a:solidFill>
-                <a:latin typeface="+mj-lt"/>
-                <a:ea typeface="+mj-ea"/>
-                <a:cs typeface="+mj-cs"/>
-              </a:defRPr>
-            </a:lvl1pPr>
-          </a:lstStyle>
-          <a:p>
-            <a:r>
-              <a:rPr lang="en-US" sz="3200" b="1" dirty="0">
-                <a:solidFill>
-                  <a:srgbClr val="000000"/>
-                </a:solidFill>
-              </a:rPr>
-              <a:t>HMM Examples/Applications</a:t>
-            </a:r>
-            <a:br>
-              <a:rPr lang="en-US" sz="3200" b="1" dirty="0">
-                <a:solidFill>
-                  <a:srgbClr val="000000"/>
-                </a:solidFill>
-              </a:rPr>
-            </a:br>
-            <a:endParaRPr lang="en-US" sz="3200" b="1" dirty="0"/>
-          </a:p>
-        </p:txBody>
-      </p:sp>
-    </p:spTree>
-    <p:extLst>
-      <p:ext uri="{BB962C8B-B14F-4D97-AF65-F5344CB8AC3E}">
-        <p14:creationId xmlns:p14="http://schemas.microsoft.com/office/powerpoint/2010/main" val="1604556284"/>
+        <p14:creationId xmlns:p14="http://schemas.microsoft.com/office/powerpoint/2010/main" val="4247730567"/>
       </p:ext>
     </p:extLst>
   </p:cSld>
@@ -12494,10 +11777,39 @@
       </p:grpSpPr>
       <p:pic>
         <p:nvPicPr>
-          <p:cNvPr id="3" name="Picture 2">
-            <a:extLst>
-              <a:ext uri="{FF2B5EF4-FFF2-40B4-BE49-F238E27FC236}">
-                <a16:creationId xmlns:a16="http://schemas.microsoft.com/office/drawing/2014/main" id="{E6DBBC0C-73CC-29FB-2A11-CD401788A449}"/>
+          <p:cNvPr id="8" name="Picture 7">
+            <a:extLst>
+              <a:ext uri="{FF2B5EF4-FFF2-40B4-BE49-F238E27FC236}">
+                <a16:creationId xmlns:a16="http://schemas.microsoft.com/office/drawing/2014/main" id="{AFABFC51-4893-07E0-77DE-DF6497684D21}"/>
+              </a:ext>
+            </a:extLst>
+          </p:cNvPr>
+          <p:cNvPicPr>
+            <a:picLocks noChangeAspect="1"/>
+          </p:cNvPicPr>
+          <p:nvPr/>
+        </p:nvPicPr>
+        <p:blipFill rotWithShape="1">
+          <a:blip r:embed="rId3"/>
+          <a:srcRect b="19001"/>
+          <a:stretch/>
+        </p:blipFill>
+        <p:spPr>
+          <a:xfrm>
+            <a:off x="151730" y="2208809"/>
+            <a:ext cx="6722743" cy="3827609"/>
+          </a:xfrm>
+          <a:prstGeom prst="rect">
+            <a:avLst/>
+          </a:prstGeom>
+        </p:spPr>
+      </p:pic>
+      <p:pic>
+        <p:nvPicPr>
+          <p:cNvPr id="5" name="Picture 4">
+            <a:extLst>
+              <a:ext uri="{FF2B5EF4-FFF2-40B4-BE49-F238E27FC236}">
+                <a16:creationId xmlns:a16="http://schemas.microsoft.com/office/drawing/2014/main" id="{A61A141B-1F05-0A9C-58BD-88FA4DCC2E8A}"/>
               </a:ext>
             </a:extLst>
           </p:cNvPr>
@@ -12507,15 +11819,15 @@
           <p:nvPr/>
         </p:nvPicPr>
         <p:blipFill>
-          <a:blip r:embed="rId2"/>
+          <a:blip r:embed="rId4"/>
           <a:stretch>
             <a:fillRect/>
           </a:stretch>
         </p:blipFill>
         <p:spPr>
           <a:xfrm>
-            <a:off x="7796232" y="85543"/>
-            <a:ext cx="4291675" cy="1325563"/>
+            <a:off x="7887373" y="5319887"/>
+            <a:ext cx="4221498" cy="993965"/>
           </a:xfrm>
           <a:prstGeom prst="rect">
             <a:avLst/>
@@ -12531,10 +11843,10 @@
       </p:pic>
       <p:sp>
         <p:nvSpPr>
-          <p:cNvPr id="4" name="Title 1">
-            <a:extLst>
-              <a:ext uri="{FF2B5EF4-FFF2-40B4-BE49-F238E27FC236}">
-                <a16:creationId xmlns:a16="http://schemas.microsoft.com/office/drawing/2014/main" id="{5F5CB036-49B3-7911-0438-78B8FDB7BEF9}"/>
+          <p:cNvPr id="6" name="Title 1">
+            <a:extLst>
+              <a:ext uri="{FF2B5EF4-FFF2-40B4-BE49-F238E27FC236}">
+                <a16:creationId xmlns:a16="http://schemas.microsoft.com/office/drawing/2014/main" id="{9295E781-5852-468D-1186-F7549C10C57F}"/>
               </a:ext>
             </a:extLst>
           </p:cNvPr>
@@ -12595,12 +11907,43 @@
           </a:p>
         </p:txBody>
       </p:sp>
-      <p:sp>
-        <p:nvSpPr>
-          <p:cNvPr id="5" name="Content Placeholder 2">
-            <a:extLst>
-              <a:ext uri="{FF2B5EF4-FFF2-40B4-BE49-F238E27FC236}">
-                <a16:creationId xmlns:a16="http://schemas.microsoft.com/office/drawing/2014/main" id="{65637429-5341-0104-56D7-C9D78E6881AF}"/>
+      <p:pic>
+        <p:nvPicPr>
+          <p:cNvPr id="10" name="Picture 9">
+            <a:extLst>
+              <a:ext uri="{FF2B5EF4-FFF2-40B4-BE49-F238E27FC236}">
+                <a16:creationId xmlns:a16="http://schemas.microsoft.com/office/drawing/2014/main" id="{2149552D-DB4C-5ABD-0B53-199A4501989B}"/>
+              </a:ext>
+            </a:extLst>
+          </p:cNvPr>
+          <p:cNvPicPr>
+            <a:picLocks noChangeAspect="1"/>
+          </p:cNvPicPr>
+          <p:nvPr/>
+        </p:nvPicPr>
+        <p:blipFill rotWithShape="1">
+          <a:blip r:embed="rId5"/>
+          <a:srcRect b="11402"/>
+          <a:stretch>
+            <a:fillRect/>
+          </a:stretch>
+        </p:blipFill>
+        <p:spPr>
+          <a:xfrm>
+            <a:off x="6850153" y="0"/>
+            <a:ext cx="4221498" cy="5143954"/>
+          </a:xfrm>
+          <a:prstGeom prst="rect">
+            <a:avLst/>
+          </a:prstGeom>
+        </p:spPr>
+      </p:pic>
+      <p:sp>
+        <p:nvSpPr>
+          <p:cNvPr id="11" name="Content Placeholder 2">
+            <a:extLst>
+              <a:ext uri="{FF2B5EF4-FFF2-40B4-BE49-F238E27FC236}">
+                <a16:creationId xmlns:a16="http://schemas.microsoft.com/office/drawing/2014/main" id="{709AC01A-B934-CBE8-C54E-A9235034FF74}"/>
               </a:ext>
             </a:extLst>
           </p:cNvPr>
@@ -12797,45 +12140,67 @@
                 </a:solidFill>
                 <a:latin typeface="Century Gothic" panose="020B0502020202020204" pitchFamily="34" charset="0"/>
               </a:rPr>
-              <a:t>Albatross</a:t>
-            </a:r>
-          </a:p>
-        </p:txBody>
-      </p:sp>
-      <p:pic>
-        <p:nvPicPr>
-          <p:cNvPr id="7" name="Picture 6">
-            <a:extLst>
-              <a:ext uri="{FF2B5EF4-FFF2-40B4-BE49-F238E27FC236}">
-                <a16:creationId xmlns:a16="http://schemas.microsoft.com/office/drawing/2014/main" id="{54D9E5D1-CE16-75A9-FBF6-C95C7FB3A491}"/>
-              </a:ext>
-            </a:extLst>
-          </p:cNvPr>
-          <p:cNvPicPr>
-            <a:picLocks noChangeAspect="1"/>
-          </p:cNvPicPr>
+              <a:t>Humpback whales</a:t>
+            </a:r>
+          </a:p>
+        </p:txBody>
+      </p:sp>
+      <p:sp>
+        <p:nvSpPr>
+          <p:cNvPr id="2" name="Rectangle 1">
+            <a:extLst>
+              <a:ext uri="{FF2B5EF4-FFF2-40B4-BE49-F238E27FC236}">
+                <a16:creationId xmlns:a16="http://schemas.microsoft.com/office/drawing/2014/main" id="{CB421A68-93EF-019A-B1EA-E7F7A220940D}"/>
+              </a:ext>
+            </a:extLst>
+          </p:cNvPr>
+          <p:cNvSpPr/>
           <p:nvPr/>
-        </p:nvPicPr>
-        <p:blipFill>
-          <a:blip r:embed="rId3"/>
-          <a:stretch>
-            <a:fillRect/>
-          </a:stretch>
-        </p:blipFill>
+        </p:nvSpPr>
         <p:spPr>
           <a:xfrm>
-            <a:off x="2079172" y="1615730"/>
-            <a:ext cx="7849948" cy="4716930"/>
+            <a:off x="9416955" y="3903260"/>
+            <a:ext cx="1595320" cy="1100663"/>
           </a:xfrm>
           <a:prstGeom prst="rect">
             <a:avLst/>
           </a:prstGeom>
+          <a:noFill/>
+          <a:ln w="25400">
+            <a:solidFill>
+              <a:srgbClr val="FF0000"/>
+            </a:solidFill>
+          </a:ln>
         </p:spPr>
-      </p:pic>
+        <p:style>
+          <a:lnRef idx="2">
+            <a:schemeClr val="accent1">
+              <a:shade val="15000"/>
+            </a:schemeClr>
+          </a:lnRef>
+          <a:fillRef idx="1">
+            <a:schemeClr val="accent1"/>
+          </a:fillRef>
+          <a:effectRef idx="0">
+            <a:schemeClr val="accent1"/>
+          </a:effectRef>
+          <a:fontRef idx="minor">
+            <a:schemeClr val="lt1"/>
+          </a:fontRef>
+        </p:style>
+        <p:txBody>
+          <a:bodyPr rtlCol="0" anchor="ctr"/>
+          <a:lstStyle/>
+          <a:p>
+            <a:pPr algn="ctr"/>
+            <a:endParaRPr lang="en-US"/>
+          </a:p>
+        </p:txBody>
+      </p:sp>
     </p:spTree>
     <p:extLst>
       <p:ext uri="{BB962C8B-B14F-4D97-AF65-F5344CB8AC3E}">
-        <p14:creationId xmlns:p14="http://schemas.microsoft.com/office/powerpoint/2010/main" val="3517056293"/>
+        <p14:creationId xmlns:p14="http://schemas.microsoft.com/office/powerpoint/2010/main" val="2790739131"/>
       </p:ext>
     </p:extLst>
   </p:cSld>
@@ -12862,451 +12227,78 @@
           <a:chExt cx="0" cy="0"/>
         </a:xfrm>
       </p:grpSpPr>
-      <p:sp>
-        <p:nvSpPr>
-          <p:cNvPr id="3" name="Content Placeholder 2">
-            <a:extLst>
-              <a:ext uri="{FF2B5EF4-FFF2-40B4-BE49-F238E27FC236}">
-                <a16:creationId xmlns:a16="http://schemas.microsoft.com/office/drawing/2014/main" id="{8E7664B6-E591-768E-08A1-E2467FE3AA0A}"/>
-              </a:ext>
-            </a:extLst>
-          </p:cNvPr>
-          <p:cNvSpPr>
-            <a:spLocks noGrp="1"/>
-          </p:cNvSpPr>
-          <p:nvPr>
-            <p:ph idx="4294967295"/>
-          </p:nvPr>
-        </p:nvSpPr>
+      <p:pic>
+        <p:nvPicPr>
+          <p:cNvPr id="9" name="Picture 8">
+            <a:extLst>
+              <a:ext uri="{FF2B5EF4-FFF2-40B4-BE49-F238E27FC236}">
+                <a16:creationId xmlns:a16="http://schemas.microsoft.com/office/drawing/2014/main" id="{6E5FB656-3AEC-70A7-E91D-13DF1474A922}"/>
+              </a:ext>
+            </a:extLst>
+          </p:cNvPr>
+          <p:cNvPicPr>
+            <a:picLocks noChangeAspect="1"/>
+          </p:cNvPicPr>
+          <p:nvPr/>
+        </p:nvPicPr>
+        <p:blipFill rotWithShape="1">
+          <a:blip r:embed="rId3"/>
+          <a:srcRect b="12434"/>
+          <a:stretch/>
+        </p:blipFill>
         <p:spPr>
           <a:xfrm>
-            <a:off x="605641" y="1164664"/>
-            <a:ext cx="10770919" cy="5069881"/>
-          </a:xfrm>
+            <a:off x="1414115" y="1448031"/>
+            <a:ext cx="9423157" cy="4905268"/>
+          </a:xfrm>
+          <a:prstGeom prst="rect">
+            <a:avLst/>
+          </a:prstGeom>
         </p:spPr>
-        <p:txBody>
-          <a:bodyPr>
-            <a:normAutofit/>
-          </a:bodyPr>
-          <a:lstStyle/>
-          <a:p>
-            <a:r>
-              <a:rPr lang="en-US" sz="1600" b="0" i="0" u="none" strike="noStrike" baseline="0" dirty="0">
-                <a:solidFill>
-                  <a:srgbClr val="000000"/>
-                </a:solidFill>
-              </a:rPr>
-              <a:t>Cagnacci, F., Focardi, S., </a:t>
-            </a:r>
-            <a:r>
-              <a:rPr lang="en-US" sz="1600" b="0" i="0" u="none" strike="noStrike" baseline="0" dirty="0" err="1">
-                <a:solidFill>
-                  <a:srgbClr val="000000"/>
-                </a:solidFill>
-              </a:rPr>
-              <a:t>Ghisla</a:t>
-            </a:r>
-            <a:r>
-              <a:rPr lang="en-US" sz="1600" b="0" i="0" u="none" strike="noStrike" baseline="0" dirty="0">
-                <a:solidFill>
-                  <a:srgbClr val="000000"/>
-                </a:solidFill>
-              </a:rPr>
-              <a:t>, A., van </a:t>
-            </a:r>
-            <a:r>
-              <a:rPr lang="en-US" sz="1600" b="0" i="0" u="none" strike="noStrike" baseline="0" dirty="0" err="1">
-                <a:solidFill>
-                  <a:srgbClr val="000000"/>
-                </a:solidFill>
-              </a:rPr>
-              <a:t>Moorter</a:t>
-            </a:r>
-            <a:r>
-              <a:rPr lang="en-US" sz="1600" b="0" i="0" u="none" strike="noStrike" baseline="0" dirty="0">
-                <a:solidFill>
-                  <a:srgbClr val="000000"/>
-                </a:solidFill>
-              </a:rPr>
-              <a:t>, B., Merrill, E.H., Gurarie, E., </a:t>
-            </a:r>
-            <a:r>
-              <a:rPr lang="en-US" sz="1600" b="0" i="0" u="none" strike="noStrike" baseline="0" dirty="0" err="1">
-                <a:solidFill>
-                  <a:srgbClr val="000000"/>
-                </a:solidFill>
-              </a:rPr>
-              <a:t>Heurich</a:t>
-            </a:r>
-            <a:r>
-              <a:rPr lang="en-US" sz="1600" b="0" i="0" u="none" strike="noStrike" baseline="0" dirty="0">
-                <a:solidFill>
-                  <a:srgbClr val="000000"/>
-                </a:solidFill>
-              </a:rPr>
-              <a:t>, M., Mysterud, A., Linnell, J., </a:t>
-            </a:r>
-            <a:r>
-              <a:rPr lang="en-US" sz="1600" b="0" i="0" u="none" strike="noStrike" baseline="0" dirty="0" err="1">
-                <a:solidFill>
-                  <a:srgbClr val="000000"/>
-                </a:solidFill>
-              </a:rPr>
-              <a:t>Panzacchi</a:t>
-            </a:r>
-            <a:r>
-              <a:rPr lang="en-US" sz="1600" b="0" i="0" u="none" strike="noStrike" baseline="0" dirty="0">
-                <a:solidFill>
-                  <a:srgbClr val="000000"/>
-                </a:solidFill>
-              </a:rPr>
-              <a:t>, M., May, R., </a:t>
-            </a:r>
-            <a:r>
-              <a:rPr lang="en-US" sz="1600" b="0" i="0" u="none" strike="noStrike" baseline="0" dirty="0" err="1">
-                <a:solidFill>
-                  <a:srgbClr val="000000"/>
-                </a:solidFill>
-              </a:rPr>
-              <a:t>Nygård</a:t>
-            </a:r>
-            <a:r>
-              <a:rPr lang="en-US" sz="1600" b="0" i="0" u="none" strike="noStrike" baseline="0" dirty="0">
-                <a:solidFill>
-                  <a:srgbClr val="000000"/>
-                </a:solidFill>
-              </a:rPr>
-              <a:t>, T., </a:t>
-            </a:r>
-            <a:r>
-              <a:rPr lang="en-US" sz="1600" b="0" i="0" u="none" strike="noStrike" baseline="0" dirty="0" err="1">
-                <a:solidFill>
-                  <a:srgbClr val="000000"/>
-                </a:solidFill>
-              </a:rPr>
-              <a:t>Rolandsen</a:t>
-            </a:r>
-            <a:r>
-              <a:rPr lang="en-US" sz="1600" b="0" i="0" u="none" strike="noStrike" baseline="0" dirty="0">
-                <a:solidFill>
-                  <a:srgbClr val="000000"/>
-                </a:solidFill>
-              </a:rPr>
-              <a:t>, C. and Hebblewhite, M. (2016), How many routes lead to migration? Comparison of methods to assess and characterize migratory movements. J Anim </a:t>
-            </a:r>
-            <a:r>
-              <a:rPr lang="en-US" sz="1600" b="0" i="0" u="none" strike="noStrike" baseline="0" dirty="0" err="1">
-                <a:solidFill>
-                  <a:srgbClr val="000000"/>
-                </a:solidFill>
-              </a:rPr>
-              <a:t>Ecol</a:t>
-            </a:r>
-            <a:r>
-              <a:rPr lang="en-US" sz="1600" b="0" i="0" u="none" strike="noStrike" baseline="0" dirty="0">
-                <a:solidFill>
-                  <a:srgbClr val="000000"/>
-                </a:solidFill>
-              </a:rPr>
-              <a:t>, 85: 54-68. </a:t>
-            </a:r>
-          </a:p>
-          <a:p>
-            <a:r>
-              <a:rPr lang="en-US" sz="1600" b="0" i="0" u="none" strike="noStrike" baseline="0" dirty="0" err="1">
-                <a:solidFill>
-                  <a:srgbClr val="000000"/>
-                </a:solidFill>
-              </a:rPr>
-              <a:t>Karelus</a:t>
-            </a:r>
-            <a:r>
-              <a:rPr lang="en-US" sz="1600" b="0" i="0" u="none" strike="noStrike" baseline="0" dirty="0">
-                <a:solidFill>
-                  <a:srgbClr val="000000"/>
-                </a:solidFill>
-              </a:rPr>
-              <a:t>, D.L., J. Walter McCown, Brian K. </a:t>
-            </a:r>
-            <a:r>
-              <a:rPr lang="en-US" sz="1600" b="0" i="0" u="none" strike="noStrike" baseline="0" dirty="0" err="1">
-                <a:solidFill>
-                  <a:srgbClr val="000000"/>
-                </a:solidFill>
-              </a:rPr>
-              <a:t>Scheick</a:t>
-            </a:r>
-            <a:r>
-              <a:rPr lang="en-US" sz="1600" b="0" i="0" u="none" strike="noStrike" baseline="0" dirty="0">
-                <a:solidFill>
-                  <a:srgbClr val="000000"/>
-                </a:solidFill>
-              </a:rPr>
-              <a:t>, </a:t>
-            </a:r>
-            <a:r>
-              <a:rPr lang="en-US" sz="1600" b="0" i="0" u="none" strike="noStrike" baseline="0" dirty="0" err="1">
-                <a:solidFill>
-                  <a:srgbClr val="000000"/>
-                </a:solidFill>
-              </a:rPr>
-              <a:t>Madelonvan</a:t>
-            </a:r>
-            <a:r>
-              <a:rPr lang="en-US" sz="1600" b="0" i="0" u="none" strike="noStrike" baseline="0" dirty="0">
-                <a:solidFill>
-                  <a:srgbClr val="000000"/>
-                </a:solidFill>
-              </a:rPr>
-              <a:t> de </a:t>
-            </a:r>
-            <a:r>
-              <a:rPr lang="en-US" sz="1600" b="0" i="0" u="none" strike="noStrike" baseline="0" dirty="0" err="1">
-                <a:solidFill>
-                  <a:srgbClr val="000000"/>
-                </a:solidFill>
-              </a:rPr>
-              <a:t>Kerk</a:t>
-            </a:r>
-            <a:r>
-              <a:rPr lang="en-US" sz="1600" b="0" i="0" u="none" strike="noStrike" baseline="0" dirty="0">
-                <a:solidFill>
-                  <a:srgbClr val="000000"/>
-                </a:solidFill>
-              </a:rPr>
-              <a:t>, Benjamin M. </a:t>
-            </a:r>
-            <a:r>
-              <a:rPr lang="en-US" sz="1600" b="0" i="0" u="none" strike="noStrike" baseline="0" dirty="0" err="1">
-                <a:solidFill>
-                  <a:srgbClr val="000000"/>
-                </a:solidFill>
-              </a:rPr>
-              <a:t>Bolker</a:t>
-            </a:r>
-            <a:r>
-              <a:rPr lang="en-US" sz="1600" b="0" i="0" u="none" strike="noStrike" baseline="0" dirty="0">
-                <a:solidFill>
-                  <a:srgbClr val="000000"/>
-                </a:solidFill>
-              </a:rPr>
-              <a:t>, Madan K. Oli "Incorporating movement patterns to discern habitat selection: black bears as a case study," Wildlife Research, 46(1), 76-88, (15 February 2019) </a:t>
-            </a:r>
-          </a:p>
-          <a:p>
-            <a:r>
-              <a:rPr lang="en-US" sz="1600" b="0" i="0" u="none" strike="noStrike" baseline="0" dirty="0">
-                <a:solidFill>
-                  <a:srgbClr val="000000"/>
-                </a:solidFill>
-              </a:rPr>
-              <a:t>Kennedy, A. S., A. N. </a:t>
-            </a:r>
-            <a:r>
-              <a:rPr lang="en-US" sz="1600" b="0" i="0" u="none" strike="noStrike" baseline="0" dirty="0" err="1">
-                <a:solidFill>
-                  <a:srgbClr val="000000"/>
-                </a:solidFill>
-              </a:rPr>
-              <a:t>Zerbini</a:t>
-            </a:r>
-            <a:r>
-              <a:rPr lang="en-US" sz="1600" b="0" i="0" u="none" strike="noStrike" baseline="0" dirty="0">
-                <a:solidFill>
-                  <a:srgbClr val="000000"/>
-                </a:solidFill>
-              </a:rPr>
-              <a:t>, B. K. </a:t>
-            </a:r>
-            <a:r>
-              <a:rPr lang="en-US" sz="1600" b="0" i="0" u="none" strike="noStrike" baseline="0" dirty="0" err="1">
-                <a:solidFill>
-                  <a:srgbClr val="000000"/>
-                </a:solidFill>
-              </a:rPr>
-              <a:t>Rone</a:t>
-            </a:r>
-            <a:r>
-              <a:rPr lang="en-US" sz="1600" b="0" i="0" u="none" strike="noStrike" baseline="0" dirty="0">
-                <a:solidFill>
-                  <a:srgbClr val="000000"/>
-                </a:solidFill>
-              </a:rPr>
-              <a:t>, and P. J. Clapham. 2014. Individual variation in movements of satellite-tracked humpback whales Megaptera novaeangliae in the eastern Aleutian Islands and Bering Sea. Endangered Species Research 23:187195 </a:t>
-            </a:r>
-          </a:p>
-          <a:p>
-            <a:r>
-              <a:rPr lang="en-US" sz="1600" b="0" i="0" u="none" strike="noStrike" baseline="0" dirty="0" err="1">
-                <a:solidFill>
-                  <a:srgbClr val="000000"/>
-                </a:solidFill>
-              </a:rPr>
-              <a:t>Klappstein</a:t>
-            </a:r>
-            <a:r>
-              <a:rPr lang="en-US" sz="1600" b="0" i="0" u="none" strike="noStrike" baseline="0" dirty="0">
-                <a:solidFill>
-                  <a:srgbClr val="000000"/>
-                </a:solidFill>
-              </a:rPr>
-              <a:t> NJ, Thomas L, Michelot T. Flexible hidden Markov models for </a:t>
-            </a:r>
-            <a:r>
-              <a:rPr lang="en-US" sz="1600" b="0" i="0" u="none" strike="noStrike" baseline="0" dirty="0" err="1">
-                <a:solidFill>
-                  <a:srgbClr val="000000"/>
-                </a:solidFill>
-              </a:rPr>
-              <a:t>behaviour</a:t>
-            </a:r>
-            <a:r>
-              <a:rPr lang="en-US" sz="1600" b="0" i="0" u="none" strike="noStrike" baseline="0" dirty="0">
-                <a:solidFill>
-                  <a:srgbClr val="000000"/>
-                </a:solidFill>
-              </a:rPr>
-              <a:t>-dependent habitat selection. Mov Ecol. 2023 Jun 3;11(1):30. </a:t>
-            </a:r>
-            <a:r>
-              <a:rPr lang="en-US" sz="1600" b="0" i="0" u="none" strike="noStrike" baseline="0" dirty="0" err="1">
-                <a:solidFill>
-                  <a:srgbClr val="000000"/>
-                </a:solidFill>
-              </a:rPr>
-              <a:t>doi</a:t>
-            </a:r>
-            <a:r>
-              <a:rPr lang="en-US" sz="1600" b="0" i="0" u="none" strike="noStrike" baseline="0" dirty="0">
-                <a:solidFill>
-                  <a:srgbClr val="000000"/>
-                </a:solidFill>
-              </a:rPr>
-              <a:t>: 10.1186/s40462-023-00392-3. </a:t>
-            </a:r>
-            <a:endParaRPr lang="en-US" dirty="0"/>
-          </a:p>
-          <a:p>
-            <a:r>
-              <a:rPr lang="en-US" sz="1600" dirty="0"/>
-              <a:t>McClintock, B.T. and Michelot, T. (2018), </a:t>
-            </a:r>
-            <a:r>
-              <a:rPr lang="en-US" sz="1600" dirty="0" err="1"/>
-              <a:t>momentuHMM</a:t>
-            </a:r>
-            <a:r>
-              <a:rPr lang="en-US" sz="1600" dirty="0"/>
-              <a:t>: </a:t>
-            </a:r>
-            <a:r>
-              <a:rPr lang="en-US" sz="1600" cap="small" dirty="0"/>
-              <a:t>R</a:t>
-            </a:r>
-            <a:r>
-              <a:rPr lang="en-US" sz="1600" dirty="0"/>
-              <a:t> package for generalized hidden Markov models of animal movement. </a:t>
-            </a:r>
-            <a:r>
-              <a:rPr lang="en-US" sz="1600" dirty="0">
-                <a:solidFill>
-                  <a:srgbClr val="000000"/>
-                </a:solidFill>
-              </a:rPr>
-              <a:t>Methods </a:t>
-            </a:r>
-            <a:r>
-              <a:rPr lang="en-US" sz="1600" dirty="0" err="1">
-                <a:solidFill>
-                  <a:srgbClr val="000000"/>
-                </a:solidFill>
-              </a:rPr>
-              <a:t>Ecol</a:t>
-            </a:r>
-            <a:r>
-              <a:rPr lang="en-US" sz="1600">
-                <a:solidFill>
-                  <a:srgbClr val="000000"/>
-                </a:solidFill>
-              </a:rPr>
-              <a:t> Evol, 9(6): 1518-1530.</a:t>
-            </a:r>
-            <a:r>
-              <a:rPr lang="en-US" sz="1600"/>
-              <a:t> </a:t>
-            </a:r>
-            <a:r>
-              <a:rPr lang="en-US" sz="1600" dirty="0"/>
-              <a:t>https://doi.org/10.1111/2041-210X.12995.</a:t>
-            </a:r>
-          </a:p>
-          <a:p>
-            <a:r>
-              <a:rPr lang="en-US" sz="1600" b="0" i="0" u="none" strike="noStrike" baseline="0" dirty="0">
-                <a:solidFill>
-                  <a:srgbClr val="000000"/>
-                </a:solidFill>
-              </a:rPr>
-              <a:t>Michelot, T., Langrock, R. and Patterson, T.A. (2016), </a:t>
-            </a:r>
-            <a:r>
-              <a:rPr lang="en-US" sz="1600" b="0" i="0" u="none" strike="noStrike" baseline="0" dirty="0" err="1">
-                <a:solidFill>
-                  <a:srgbClr val="000000"/>
-                </a:solidFill>
-              </a:rPr>
-              <a:t>moveHMM</a:t>
-            </a:r>
-            <a:r>
-              <a:rPr lang="en-US" sz="1600" b="0" i="0" u="none" strike="noStrike" baseline="0" dirty="0">
-                <a:solidFill>
-                  <a:srgbClr val="000000"/>
-                </a:solidFill>
-              </a:rPr>
-              <a:t>: an R package for the statistical modelling of animal movement data using hidden Markov models. Methods </a:t>
-            </a:r>
-            <a:r>
-              <a:rPr lang="en-US" sz="1600" b="0" i="0" u="none" strike="noStrike" baseline="0" dirty="0" err="1">
-                <a:solidFill>
-                  <a:srgbClr val="000000"/>
-                </a:solidFill>
-              </a:rPr>
-              <a:t>Ecol</a:t>
-            </a:r>
-            <a:r>
-              <a:rPr lang="en-US" sz="1600" b="0" i="0" u="none" strike="noStrike" baseline="0" dirty="0">
-                <a:solidFill>
-                  <a:srgbClr val="000000"/>
-                </a:solidFill>
-              </a:rPr>
-              <a:t> </a:t>
-            </a:r>
-            <a:r>
-              <a:rPr lang="en-US" sz="1600" b="0" i="0" u="none" strike="noStrike" baseline="0" dirty="0" err="1">
-                <a:solidFill>
-                  <a:srgbClr val="000000"/>
-                </a:solidFill>
-              </a:rPr>
-              <a:t>Evol</a:t>
-            </a:r>
-            <a:r>
-              <a:rPr lang="en-US" sz="1600" b="0" i="0" u="none" strike="noStrike" baseline="0" dirty="0">
-                <a:solidFill>
-                  <a:srgbClr val="000000"/>
-                </a:solidFill>
-              </a:rPr>
-              <a:t>, 7: 1308-1315. </a:t>
-            </a:r>
-            <a:endParaRPr lang="en-US" sz="1600" dirty="0"/>
-          </a:p>
-        </p:txBody>
-      </p:sp>
-      <p:sp>
-        <p:nvSpPr>
-          <p:cNvPr id="4" name="Title 1">
-            <a:extLst>
-              <a:ext uri="{FF2B5EF4-FFF2-40B4-BE49-F238E27FC236}">
-                <a16:creationId xmlns:a16="http://schemas.microsoft.com/office/drawing/2014/main" id="{7399F66D-D444-F92A-B5F9-9B6852FEFDCE}"/>
+      </p:pic>
+      <p:pic>
+        <p:nvPicPr>
+          <p:cNvPr id="5" name="Picture 4">
+            <a:extLst>
+              <a:ext uri="{FF2B5EF4-FFF2-40B4-BE49-F238E27FC236}">
+                <a16:creationId xmlns:a16="http://schemas.microsoft.com/office/drawing/2014/main" id="{29AA7E6B-0015-F857-1CEC-DF7EA4C83668}"/>
+              </a:ext>
+            </a:extLst>
+          </p:cNvPr>
+          <p:cNvPicPr>
+            <a:picLocks noChangeAspect="1"/>
+          </p:cNvPicPr>
+          <p:nvPr/>
+        </p:nvPicPr>
+        <p:blipFill>
+          <a:blip r:embed="rId4"/>
+          <a:stretch>
+            <a:fillRect/>
+          </a:stretch>
+        </p:blipFill>
+        <p:spPr>
+          <a:xfrm>
+            <a:off x="8478983" y="114821"/>
+            <a:ext cx="3514550" cy="1186806"/>
+          </a:xfrm>
+          <a:prstGeom prst="rect">
+            <a:avLst/>
+          </a:prstGeom>
+          <a:effectLst>
+            <a:outerShdw blurRad="50800" dist="38100" dir="2700000" algn="tl" rotWithShape="0">
+              <a:prstClr val="black">
+                <a:alpha val="40000"/>
+              </a:prstClr>
+            </a:outerShdw>
+          </a:effectLst>
+        </p:spPr>
+      </p:pic>
+      <p:sp>
+        <p:nvSpPr>
+          <p:cNvPr id="6" name="Title 1">
+            <a:extLst>
+              <a:ext uri="{FF2B5EF4-FFF2-40B4-BE49-F238E27FC236}">
+                <a16:creationId xmlns:a16="http://schemas.microsoft.com/office/drawing/2014/main" id="{5D7403EA-D47B-2F1D-8CB6-8C1F76AA6A39}"/>
               </a:ext>
             </a:extLst>
           </p:cNvPr>
@@ -13354,7 +12346,7 @@
                   <a:srgbClr val="000000"/>
                 </a:solidFill>
               </a:rPr>
-              <a:t>References</a:t>
+              <a:t>HMM Examples/Applications</a:t>
             </a:r>
             <a:br>
               <a:rPr lang="en-US" sz="3200" b="1" dirty="0">
@@ -13364,13 +12356,220 @@
               </a:rPr>
             </a:br>
             <a:endParaRPr lang="en-US" sz="3200" b="1" dirty="0"/>
+          </a:p>
+        </p:txBody>
+      </p:sp>
+      <p:sp>
+        <p:nvSpPr>
+          <p:cNvPr id="7" name="Content Placeholder 2">
+            <a:extLst>
+              <a:ext uri="{FF2B5EF4-FFF2-40B4-BE49-F238E27FC236}">
+                <a16:creationId xmlns:a16="http://schemas.microsoft.com/office/drawing/2014/main" id="{8E89E664-D3F4-3311-95A8-725AA170EFB7}"/>
+              </a:ext>
+            </a:extLst>
+          </p:cNvPr>
+          <p:cNvSpPr txBox="1">
+            <a:spLocks/>
+          </p:cNvSpPr>
+          <p:nvPr/>
+        </p:nvSpPr>
+        <p:spPr>
+          <a:xfrm>
+            <a:off x="969484" y="1167789"/>
+            <a:ext cx="10515600" cy="796562"/>
+          </a:xfrm>
+          <a:prstGeom prst="rect">
+            <a:avLst/>
+          </a:prstGeom>
+        </p:spPr>
+        <p:txBody>
+          <a:bodyPr vert="horz" lIns="91440" tIns="45720" rIns="91440" bIns="45720" rtlCol="0">
+            <a:noAutofit/>
+          </a:bodyPr>
+          <a:lstStyle>
+            <a:lvl1pPr marL="228600" indent="-228600" algn="l" defTabSz="914400" rtl="0" eaLnBrk="1" latinLnBrk="0" hangingPunct="1">
+              <a:lnSpc>
+                <a:spcPct val="90000"/>
+              </a:lnSpc>
+              <a:spcBef>
+                <a:spcPts val="1000"/>
+              </a:spcBef>
+              <a:buFont typeface="Arial" panose="020B0604020202020204" pitchFamily="34" charset="0"/>
+              <a:buChar char="•"/>
+              <a:defRPr sz="2800" kern="1200">
+                <a:solidFill>
+                  <a:schemeClr val="tx1"/>
+                </a:solidFill>
+                <a:latin typeface="+mn-lt"/>
+                <a:ea typeface="+mn-ea"/>
+                <a:cs typeface="+mn-cs"/>
+              </a:defRPr>
+            </a:lvl1pPr>
+            <a:lvl2pPr marL="685800" indent="-228600" algn="l" defTabSz="914400" rtl="0" eaLnBrk="1" latinLnBrk="0" hangingPunct="1">
+              <a:lnSpc>
+                <a:spcPct val="90000"/>
+              </a:lnSpc>
+              <a:spcBef>
+                <a:spcPts val="500"/>
+              </a:spcBef>
+              <a:buFont typeface="Arial" panose="020B0604020202020204" pitchFamily="34" charset="0"/>
+              <a:buChar char="•"/>
+              <a:defRPr sz="2400" kern="1200">
+                <a:solidFill>
+                  <a:schemeClr val="tx1"/>
+                </a:solidFill>
+                <a:latin typeface="+mn-lt"/>
+                <a:ea typeface="+mn-ea"/>
+                <a:cs typeface="+mn-cs"/>
+              </a:defRPr>
+            </a:lvl2pPr>
+            <a:lvl3pPr marL="1143000" indent="-228600" algn="l" defTabSz="914400" rtl="0" eaLnBrk="1" latinLnBrk="0" hangingPunct="1">
+              <a:lnSpc>
+                <a:spcPct val="90000"/>
+              </a:lnSpc>
+              <a:spcBef>
+                <a:spcPts val="500"/>
+              </a:spcBef>
+              <a:buFont typeface="Arial" panose="020B0604020202020204" pitchFamily="34" charset="0"/>
+              <a:buChar char="•"/>
+              <a:defRPr sz="2000" kern="1200">
+                <a:solidFill>
+                  <a:schemeClr val="tx1"/>
+                </a:solidFill>
+                <a:latin typeface="+mn-lt"/>
+                <a:ea typeface="+mn-ea"/>
+                <a:cs typeface="+mn-cs"/>
+              </a:defRPr>
+            </a:lvl3pPr>
+            <a:lvl4pPr marL="1600200" indent="-228600" algn="l" defTabSz="914400" rtl="0" eaLnBrk="1" latinLnBrk="0" hangingPunct="1">
+              <a:lnSpc>
+                <a:spcPct val="90000"/>
+              </a:lnSpc>
+              <a:spcBef>
+                <a:spcPts val="500"/>
+              </a:spcBef>
+              <a:buFont typeface="Arial" panose="020B0604020202020204" pitchFamily="34" charset="0"/>
+              <a:buChar char="•"/>
+              <a:defRPr sz="1800" kern="1200">
+                <a:solidFill>
+                  <a:schemeClr val="tx1"/>
+                </a:solidFill>
+                <a:latin typeface="+mn-lt"/>
+                <a:ea typeface="+mn-ea"/>
+                <a:cs typeface="+mn-cs"/>
+              </a:defRPr>
+            </a:lvl4pPr>
+            <a:lvl5pPr marL="2057400" indent="-228600" algn="l" defTabSz="914400" rtl="0" eaLnBrk="1" latinLnBrk="0" hangingPunct="1">
+              <a:lnSpc>
+                <a:spcPct val="90000"/>
+              </a:lnSpc>
+              <a:spcBef>
+                <a:spcPts val="500"/>
+              </a:spcBef>
+              <a:buFont typeface="Arial" panose="020B0604020202020204" pitchFamily="34" charset="0"/>
+              <a:buChar char="•"/>
+              <a:defRPr sz="1800" kern="1200">
+                <a:solidFill>
+                  <a:schemeClr val="tx1"/>
+                </a:solidFill>
+                <a:latin typeface="+mn-lt"/>
+                <a:ea typeface="+mn-ea"/>
+                <a:cs typeface="+mn-cs"/>
+              </a:defRPr>
+            </a:lvl5pPr>
+            <a:lvl6pPr marL="2514600" indent="-228600" algn="l" defTabSz="914400" rtl="0" eaLnBrk="1" latinLnBrk="0" hangingPunct="1">
+              <a:lnSpc>
+                <a:spcPct val="90000"/>
+              </a:lnSpc>
+              <a:spcBef>
+                <a:spcPts val="500"/>
+              </a:spcBef>
+              <a:buFont typeface="Arial" panose="020B0604020202020204" pitchFamily="34" charset="0"/>
+              <a:buChar char="•"/>
+              <a:defRPr sz="1800" kern="1200">
+                <a:solidFill>
+                  <a:schemeClr val="tx1"/>
+                </a:solidFill>
+                <a:latin typeface="+mn-lt"/>
+                <a:ea typeface="+mn-ea"/>
+                <a:cs typeface="+mn-cs"/>
+              </a:defRPr>
+            </a:lvl6pPr>
+            <a:lvl7pPr marL="2971800" indent="-228600" algn="l" defTabSz="914400" rtl="0" eaLnBrk="1" latinLnBrk="0" hangingPunct="1">
+              <a:lnSpc>
+                <a:spcPct val="90000"/>
+              </a:lnSpc>
+              <a:spcBef>
+                <a:spcPts val="500"/>
+              </a:spcBef>
+              <a:buFont typeface="Arial" panose="020B0604020202020204" pitchFamily="34" charset="0"/>
+              <a:buChar char="•"/>
+              <a:defRPr sz="1800" kern="1200">
+                <a:solidFill>
+                  <a:schemeClr val="tx1"/>
+                </a:solidFill>
+                <a:latin typeface="+mn-lt"/>
+                <a:ea typeface="+mn-ea"/>
+                <a:cs typeface="+mn-cs"/>
+              </a:defRPr>
+            </a:lvl7pPr>
+            <a:lvl8pPr marL="3429000" indent="-228600" algn="l" defTabSz="914400" rtl="0" eaLnBrk="1" latinLnBrk="0" hangingPunct="1">
+              <a:lnSpc>
+                <a:spcPct val="90000"/>
+              </a:lnSpc>
+              <a:spcBef>
+                <a:spcPts val="500"/>
+              </a:spcBef>
+              <a:buFont typeface="Arial" panose="020B0604020202020204" pitchFamily="34" charset="0"/>
+              <a:buChar char="•"/>
+              <a:defRPr sz="1800" kern="1200">
+                <a:solidFill>
+                  <a:schemeClr val="tx1"/>
+                </a:solidFill>
+                <a:latin typeface="+mn-lt"/>
+                <a:ea typeface="+mn-ea"/>
+                <a:cs typeface="+mn-cs"/>
+              </a:defRPr>
+            </a:lvl8pPr>
+            <a:lvl9pPr marL="3886200" indent="-228600" algn="l" defTabSz="914400" rtl="0" eaLnBrk="1" latinLnBrk="0" hangingPunct="1">
+              <a:lnSpc>
+                <a:spcPct val="90000"/>
+              </a:lnSpc>
+              <a:spcBef>
+                <a:spcPts val="500"/>
+              </a:spcBef>
+              <a:buFont typeface="Arial" panose="020B0604020202020204" pitchFamily="34" charset="0"/>
+              <a:buChar char="•"/>
+              <a:defRPr sz="1800" kern="1200">
+                <a:solidFill>
+                  <a:schemeClr val="tx1"/>
+                </a:solidFill>
+                <a:latin typeface="+mn-lt"/>
+                <a:ea typeface="+mn-ea"/>
+                <a:cs typeface="+mn-cs"/>
+              </a:defRPr>
+            </a:lvl9pPr>
+          </a:lstStyle>
+          <a:p>
+            <a:pPr marL="0" indent="0">
+              <a:buNone/>
+            </a:pPr>
+            <a:r>
+              <a:rPr lang="en-US" sz="2400" dirty="0">
+                <a:solidFill>
+                  <a:srgbClr val="000000"/>
+                </a:solidFill>
+                <a:latin typeface="Century Gothic" panose="020B0502020202020204" pitchFamily="34" charset="0"/>
+              </a:rPr>
+              <a:t>White sharks</a:t>
+            </a:r>
           </a:p>
         </p:txBody>
       </p:sp>
     </p:spTree>
     <p:extLst>
       <p:ext uri="{BB962C8B-B14F-4D97-AF65-F5344CB8AC3E}">
-        <p14:creationId xmlns:p14="http://schemas.microsoft.com/office/powerpoint/2010/main" val="2707603935"/>
+        <p14:creationId xmlns:p14="http://schemas.microsoft.com/office/powerpoint/2010/main" val="2030565029"/>
       </p:ext>
     </p:extLst>
   </p:cSld>
@@ -13828,6 +13027,1838 @@
 </file>
 
 <file path=ppt/slides/slide20.xml><?xml version="1.0" encoding="utf-8"?>
+<p:sld xmlns:a="http://schemas.openxmlformats.org/drawingml/2006/main" xmlns:r="http://schemas.openxmlformats.org/officeDocument/2006/relationships" xmlns:p="http://schemas.openxmlformats.org/presentationml/2006/main" show="0">
+  <p:cSld>
+    <p:spTree>
+      <p:nvGrpSpPr>
+        <p:cNvPr id="1" name=""/>
+        <p:cNvGrpSpPr/>
+        <p:nvPr/>
+      </p:nvGrpSpPr>
+      <p:grpSpPr>
+        <a:xfrm>
+          <a:off x="0" y="0"/>
+          <a:ext cx="0" cy="0"/>
+          <a:chOff x="0" y="0"/>
+          <a:chExt cx="0" cy="0"/>
+        </a:xfrm>
+      </p:grpSpPr>
+      <p:pic>
+        <p:nvPicPr>
+          <p:cNvPr id="5" name="Picture 4">
+            <a:extLst>
+              <a:ext uri="{FF2B5EF4-FFF2-40B4-BE49-F238E27FC236}">
+                <a16:creationId xmlns:a16="http://schemas.microsoft.com/office/drawing/2014/main" id="{13A95B28-469D-456F-E149-DBA3DD45F9D4}"/>
+              </a:ext>
+            </a:extLst>
+          </p:cNvPr>
+          <p:cNvPicPr>
+            <a:picLocks noChangeAspect="1"/>
+          </p:cNvPicPr>
+          <p:nvPr/>
+        </p:nvPicPr>
+        <p:blipFill>
+          <a:blip r:embed="rId3"/>
+          <a:stretch>
+            <a:fillRect/>
+          </a:stretch>
+        </p:blipFill>
+        <p:spPr>
+          <a:xfrm>
+            <a:off x="8755035" y="189912"/>
+            <a:ext cx="3202858" cy="1202108"/>
+          </a:xfrm>
+          <a:prstGeom prst="rect">
+            <a:avLst/>
+          </a:prstGeom>
+          <a:effectLst>
+            <a:outerShdw blurRad="50800" dist="38100" dir="2700000" algn="tl" rotWithShape="0">
+              <a:prstClr val="black">
+                <a:alpha val="40000"/>
+              </a:prstClr>
+            </a:outerShdw>
+          </a:effectLst>
+        </p:spPr>
+      </p:pic>
+      <p:sp>
+        <p:nvSpPr>
+          <p:cNvPr id="6" name="Title 1">
+            <a:extLst>
+              <a:ext uri="{FF2B5EF4-FFF2-40B4-BE49-F238E27FC236}">
+                <a16:creationId xmlns:a16="http://schemas.microsoft.com/office/drawing/2014/main" id="{D2423119-BDFC-20DD-5D3C-34ED838E21B3}"/>
+              </a:ext>
+            </a:extLst>
+          </p:cNvPr>
+          <p:cNvSpPr txBox="1">
+            <a:spLocks/>
+          </p:cNvSpPr>
+          <p:nvPr/>
+        </p:nvSpPr>
+        <p:spPr>
+          <a:xfrm>
+            <a:off x="496675" y="322824"/>
+            <a:ext cx="10515600" cy="1325563"/>
+          </a:xfrm>
+          <a:prstGeom prst="rect">
+            <a:avLst/>
+          </a:prstGeom>
+        </p:spPr>
+        <p:txBody>
+          <a:bodyPr vert="horz" lIns="91440" tIns="45720" rIns="91440" bIns="45720" rtlCol="0" anchor="ctr">
+            <a:normAutofit/>
+          </a:bodyPr>
+          <a:lstStyle>
+            <a:lvl1pPr algn="l" defTabSz="914400" rtl="0" eaLnBrk="1" latinLnBrk="0" hangingPunct="1">
+              <a:lnSpc>
+                <a:spcPct val="90000"/>
+              </a:lnSpc>
+              <a:spcBef>
+                <a:spcPct val="0"/>
+              </a:spcBef>
+              <a:buNone/>
+              <a:defRPr sz="4400" kern="1200">
+                <a:solidFill>
+                  <a:schemeClr val="tx1"/>
+                </a:solidFill>
+                <a:latin typeface="+mj-lt"/>
+                <a:ea typeface="+mj-ea"/>
+                <a:cs typeface="+mj-cs"/>
+              </a:defRPr>
+            </a:lvl1pPr>
+          </a:lstStyle>
+          <a:p>
+            <a:r>
+              <a:rPr lang="en-US" sz="3200" b="1" dirty="0">
+                <a:solidFill>
+                  <a:srgbClr val="000000"/>
+                </a:solidFill>
+              </a:rPr>
+              <a:t>HMM Examples/Applications</a:t>
+            </a:r>
+            <a:br>
+              <a:rPr lang="en-US" sz="3200" b="1" dirty="0">
+                <a:solidFill>
+                  <a:srgbClr val="000000"/>
+                </a:solidFill>
+              </a:rPr>
+            </a:br>
+            <a:endParaRPr lang="en-US" sz="3200" b="1" dirty="0"/>
+          </a:p>
+        </p:txBody>
+      </p:sp>
+      <p:sp>
+        <p:nvSpPr>
+          <p:cNvPr id="7" name="Content Placeholder 2">
+            <a:extLst>
+              <a:ext uri="{FF2B5EF4-FFF2-40B4-BE49-F238E27FC236}">
+                <a16:creationId xmlns:a16="http://schemas.microsoft.com/office/drawing/2014/main" id="{0763D88C-3DF0-1858-4DF6-215074FE45D0}"/>
+              </a:ext>
+            </a:extLst>
+          </p:cNvPr>
+          <p:cNvSpPr txBox="1">
+            <a:spLocks/>
+          </p:cNvSpPr>
+          <p:nvPr/>
+        </p:nvSpPr>
+        <p:spPr>
+          <a:xfrm>
+            <a:off x="969484" y="1167789"/>
+            <a:ext cx="10515600" cy="796562"/>
+          </a:xfrm>
+          <a:prstGeom prst="rect">
+            <a:avLst/>
+          </a:prstGeom>
+        </p:spPr>
+        <p:txBody>
+          <a:bodyPr vert="horz" lIns="91440" tIns="45720" rIns="91440" bIns="45720" rtlCol="0">
+            <a:noAutofit/>
+          </a:bodyPr>
+          <a:lstStyle>
+            <a:lvl1pPr marL="228600" indent="-228600" algn="l" defTabSz="914400" rtl="0" eaLnBrk="1" latinLnBrk="0" hangingPunct="1">
+              <a:lnSpc>
+                <a:spcPct val="90000"/>
+              </a:lnSpc>
+              <a:spcBef>
+                <a:spcPts val="1000"/>
+              </a:spcBef>
+              <a:buFont typeface="Arial" panose="020B0604020202020204" pitchFamily="34" charset="0"/>
+              <a:buChar char="•"/>
+              <a:defRPr sz="2800" kern="1200">
+                <a:solidFill>
+                  <a:schemeClr val="tx1"/>
+                </a:solidFill>
+                <a:latin typeface="+mn-lt"/>
+                <a:ea typeface="+mn-ea"/>
+                <a:cs typeface="+mn-cs"/>
+              </a:defRPr>
+            </a:lvl1pPr>
+            <a:lvl2pPr marL="685800" indent="-228600" algn="l" defTabSz="914400" rtl="0" eaLnBrk="1" latinLnBrk="0" hangingPunct="1">
+              <a:lnSpc>
+                <a:spcPct val="90000"/>
+              </a:lnSpc>
+              <a:spcBef>
+                <a:spcPts val="500"/>
+              </a:spcBef>
+              <a:buFont typeface="Arial" panose="020B0604020202020204" pitchFamily="34" charset="0"/>
+              <a:buChar char="•"/>
+              <a:defRPr sz="2400" kern="1200">
+                <a:solidFill>
+                  <a:schemeClr val="tx1"/>
+                </a:solidFill>
+                <a:latin typeface="+mn-lt"/>
+                <a:ea typeface="+mn-ea"/>
+                <a:cs typeface="+mn-cs"/>
+              </a:defRPr>
+            </a:lvl2pPr>
+            <a:lvl3pPr marL="1143000" indent="-228600" algn="l" defTabSz="914400" rtl="0" eaLnBrk="1" latinLnBrk="0" hangingPunct="1">
+              <a:lnSpc>
+                <a:spcPct val="90000"/>
+              </a:lnSpc>
+              <a:spcBef>
+                <a:spcPts val="500"/>
+              </a:spcBef>
+              <a:buFont typeface="Arial" panose="020B0604020202020204" pitchFamily="34" charset="0"/>
+              <a:buChar char="•"/>
+              <a:defRPr sz="2000" kern="1200">
+                <a:solidFill>
+                  <a:schemeClr val="tx1"/>
+                </a:solidFill>
+                <a:latin typeface="+mn-lt"/>
+                <a:ea typeface="+mn-ea"/>
+                <a:cs typeface="+mn-cs"/>
+              </a:defRPr>
+            </a:lvl3pPr>
+            <a:lvl4pPr marL="1600200" indent="-228600" algn="l" defTabSz="914400" rtl="0" eaLnBrk="1" latinLnBrk="0" hangingPunct="1">
+              <a:lnSpc>
+                <a:spcPct val="90000"/>
+              </a:lnSpc>
+              <a:spcBef>
+                <a:spcPts val="500"/>
+              </a:spcBef>
+              <a:buFont typeface="Arial" panose="020B0604020202020204" pitchFamily="34" charset="0"/>
+              <a:buChar char="•"/>
+              <a:defRPr sz="1800" kern="1200">
+                <a:solidFill>
+                  <a:schemeClr val="tx1"/>
+                </a:solidFill>
+                <a:latin typeface="+mn-lt"/>
+                <a:ea typeface="+mn-ea"/>
+                <a:cs typeface="+mn-cs"/>
+              </a:defRPr>
+            </a:lvl4pPr>
+            <a:lvl5pPr marL="2057400" indent="-228600" algn="l" defTabSz="914400" rtl="0" eaLnBrk="1" latinLnBrk="0" hangingPunct="1">
+              <a:lnSpc>
+                <a:spcPct val="90000"/>
+              </a:lnSpc>
+              <a:spcBef>
+                <a:spcPts val="500"/>
+              </a:spcBef>
+              <a:buFont typeface="Arial" panose="020B0604020202020204" pitchFamily="34" charset="0"/>
+              <a:buChar char="•"/>
+              <a:defRPr sz="1800" kern="1200">
+                <a:solidFill>
+                  <a:schemeClr val="tx1"/>
+                </a:solidFill>
+                <a:latin typeface="+mn-lt"/>
+                <a:ea typeface="+mn-ea"/>
+                <a:cs typeface="+mn-cs"/>
+              </a:defRPr>
+            </a:lvl5pPr>
+            <a:lvl6pPr marL="2514600" indent="-228600" algn="l" defTabSz="914400" rtl="0" eaLnBrk="1" latinLnBrk="0" hangingPunct="1">
+              <a:lnSpc>
+                <a:spcPct val="90000"/>
+              </a:lnSpc>
+              <a:spcBef>
+                <a:spcPts val="500"/>
+              </a:spcBef>
+              <a:buFont typeface="Arial" panose="020B0604020202020204" pitchFamily="34" charset="0"/>
+              <a:buChar char="•"/>
+              <a:defRPr sz="1800" kern="1200">
+                <a:solidFill>
+                  <a:schemeClr val="tx1"/>
+                </a:solidFill>
+                <a:latin typeface="+mn-lt"/>
+                <a:ea typeface="+mn-ea"/>
+                <a:cs typeface="+mn-cs"/>
+              </a:defRPr>
+            </a:lvl6pPr>
+            <a:lvl7pPr marL="2971800" indent="-228600" algn="l" defTabSz="914400" rtl="0" eaLnBrk="1" latinLnBrk="0" hangingPunct="1">
+              <a:lnSpc>
+                <a:spcPct val="90000"/>
+              </a:lnSpc>
+              <a:spcBef>
+                <a:spcPts val="500"/>
+              </a:spcBef>
+              <a:buFont typeface="Arial" panose="020B0604020202020204" pitchFamily="34" charset="0"/>
+              <a:buChar char="•"/>
+              <a:defRPr sz="1800" kern="1200">
+                <a:solidFill>
+                  <a:schemeClr val="tx1"/>
+                </a:solidFill>
+                <a:latin typeface="+mn-lt"/>
+                <a:ea typeface="+mn-ea"/>
+                <a:cs typeface="+mn-cs"/>
+              </a:defRPr>
+            </a:lvl7pPr>
+            <a:lvl8pPr marL="3429000" indent="-228600" algn="l" defTabSz="914400" rtl="0" eaLnBrk="1" latinLnBrk="0" hangingPunct="1">
+              <a:lnSpc>
+                <a:spcPct val="90000"/>
+              </a:lnSpc>
+              <a:spcBef>
+                <a:spcPts val="500"/>
+              </a:spcBef>
+              <a:buFont typeface="Arial" panose="020B0604020202020204" pitchFamily="34" charset="0"/>
+              <a:buChar char="•"/>
+              <a:defRPr sz="1800" kern="1200">
+                <a:solidFill>
+                  <a:schemeClr val="tx1"/>
+                </a:solidFill>
+                <a:latin typeface="+mn-lt"/>
+                <a:ea typeface="+mn-ea"/>
+                <a:cs typeface="+mn-cs"/>
+              </a:defRPr>
+            </a:lvl8pPr>
+            <a:lvl9pPr marL="3886200" indent="-228600" algn="l" defTabSz="914400" rtl="0" eaLnBrk="1" latinLnBrk="0" hangingPunct="1">
+              <a:lnSpc>
+                <a:spcPct val="90000"/>
+              </a:lnSpc>
+              <a:spcBef>
+                <a:spcPts val="500"/>
+              </a:spcBef>
+              <a:buFont typeface="Arial" panose="020B0604020202020204" pitchFamily="34" charset="0"/>
+              <a:buChar char="•"/>
+              <a:defRPr sz="1800" kern="1200">
+                <a:solidFill>
+                  <a:schemeClr val="tx1"/>
+                </a:solidFill>
+                <a:latin typeface="+mn-lt"/>
+                <a:ea typeface="+mn-ea"/>
+                <a:cs typeface="+mn-cs"/>
+              </a:defRPr>
+            </a:lvl9pPr>
+          </a:lstStyle>
+          <a:p>
+            <a:pPr marL="0" indent="0">
+              <a:buNone/>
+            </a:pPr>
+            <a:r>
+              <a:rPr lang="en-US" sz="2400" dirty="0">
+                <a:solidFill>
+                  <a:srgbClr val="000000"/>
+                </a:solidFill>
+                <a:latin typeface="Century Gothic" panose="020B0502020202020204" pitchFamily="34" charset="0"/>
+              </a:rPr>
+              <a:t>Black bears</a:t>
+            </a:r>
+          </a:p>
+        </p:txBody>
+      </p:sp>
+      <p:pic>
+        <p:nvPicPr>
+          <p:cNvPr id="10" name="Picture 9">
+            <a:extLst>
+              <a:ext uri="{FF2B5EF4-FFF2-40B4-BE49-F238E27FC236}">
+                <a16:creationId xmlns:a16="http://schemas.microsoft.com/office/drawing/2014/main" id="{F5861BC6-536A-FD03-42D8-A46494586F76}"/>
+              </a:ext>
+            </a:extLst>
+          </p:cNvPr>
+          <p:cNvPicPr>
+            <a:picLocks noChangeAspect="1"/>
+          </p:cNvPicPr>
+          <p:nvPr/>
+        </p:nvPicPr>
+        <p:blipFill>
+          <a:blip r:embed="rId4"/>
+          <a:stretch>
+            <a:fillRect/>
+          </a:stretch>
+        </p:blipFill>
+        <p:spPr>
+          <a:xfrm>
+            <a:off x="674803" y="1781299"/>
+            <a:ext cx="6111547" cy="4342978"/>
+          </a:xfrm>
+          <a:prstGeom prst="rect">
+            <a:avLst/>
+          </a:prstGeom>
+        </p:spPr>
+      </p:pic>
+      <p:sp>
+        <p:nvSpPr>
+          <p:cNvPr id="13" name="Rectangle 12">
+            <a:extLst>
+              <a:ext uri="{FF2B5EF4-FFF2-40B4-BE49-F238E27FC236}">
+                <a16:creationId xmlns:a16="http://schemas.microsoft.com/office/drawing/2014/main" id="{31074A89-6955-FFB3-98B0-677BC9540B55}"/>
+              </a:ext>
+            </a:extLst>
+          </p:cNvPr>
+          <p:cNvSpPr/>
+          <p:nvPr/>
+        </p:nvSpPr>
+        <p:spPr>
+          <a:xfrm>
+            <a:off x="5617029" y="3289465"/>
+            <a:ext cx="1009403" cy="796562"/>
+          </a:xfrm>
+          <a:prstGeom prst="rect">
+            <a:avLst/>
+          </a:prstGeom>
+          <a:solidFill>
+            <a:schemeClr val="bg1"/>
+          </a:solidFill>
+          <a:ln>
+            <a:noFill/>
+          </a:ln>
+        </p:spPr>
+        <p:style>
+          <a:lnRef idx="2">
+            <a:schemeClr val="accent1">
+              <a:shade val="15000"/>
+            </a:schemeClr>
+          </a:lnRef>
+          <a:fillRef idx="1">
+            <a:schemeClr val="accent1"/>
+          </a:fillRef>
+          <a:effectRef idx="0">
+            <a:schemeClr val="accent1"/>
+          </a:effectRef>
+          <a:fontRef idx="minor">
+            <a:schemeClr val="lt1"/>
+          </a:fontRef>
+        </p:style>
+        <p:txBody>
+          <a:bodyPr rtlCol="0" anchor="ctr"/>
+          <a:lstStyle/>
+          <a:p>
+            <a:pPr algn="ctr"/>
+            <a:endParaRPr lang="en-US"/>
+          </a:p>
+        </p:txBody>
+      </p:sp>
+      <p:pic>
+        <p:nvPicPr>
+          <p:cNvPr id="12" name="Picture 11">
+            <a:extLst>
+              <a:ext uri="{FF2B5EF4-FFF2-40B4-BE49-F238E27FC236}">
+                <a16:creationId xmlns:a16="http://schemas.microsoft.com/office/drawing/2014/main" id="{4456C346-A9C1-7918-9774-B9658D8BAB89}"/>
+              </a:ext>
+            </a:extLst>
+          </p:cNvPr>
+          <p:cNvPicPr>
+            <a:picLocks noChangeAspect="1"/>
+          </p:cNvPicPr>
+          <p:nvPr/>
+        </p:nvPicPr>
+        <p:blipFill>
+          <a:blip r:embed="rId5"/>
+          <a:stretch>
+            <a:fillRect/>
+          </a:stretch>
+        </p:blipFill>
+        <p:spPr>
+          <a:xfrm>
+            <a:off x="6143501" y="1781299"/>
+            <a:ext cx="5790520" cy="4441273"/>
+          </a:xfrm>
+          <a:prstGeom prst="rect">
+            <a:avLst/>
+          </a:prstGeom>
+        </p:spPr>
+      </p:pic>
+      <p:sp>
+        <p:nvSpPr>
+          <p:cNvPr id="14" name="TextBox 13">
+            <a:extLst>
+              <a:ext uri="{FF2B5EF4-FFF2-40B4-BE49-F238E27FC236}">
+                <a16:creationId xmlns:a16="http://schemas.microsoft.com/office/drawing/2014/main" id="{66145727-7141-F147-1126-2E01ED5C11EE}"/>
+              </a:ext>
+            </a:extLst>
+          </p:cNvPr>
+          <p:cNvSpPr txBox="1"/>
+          <p:nvPr/>
+        </p:nvSpPr>
+        <p:spPr>
+          <a:xfrm>
+            <a:off x="65600" y="2428234"/>
+            <a:ext cx="734496" cy="307777"/>
+          </a:xfrm>
+          <a:prstGeom prst="rect">
+            <a:avLst/>
+          </a:prstGeom>
+          <a:noFill/>
+        </p:spPr>
+        <p:txBody>
+          <a:bodyPr wrap="none" rtlCol="0">
+            <a:spAutoFit/>
+          </a:bodyPr>
+          <a:lstStyle/>
+          <a:p>
+            <a:r>
+              <a:rPr lang="en-US" sz="1400" dirty="0"/>
+              <a:t>Winter</a:t>
+            </a:r>
+          </a:p>
+        </p:txBody>
+      </p:sp>
+      <p:sp>
+        <p:nvSpPr>
+          <p:cNvPr id="15" name="TextBox 14">
+            <a:extLst>
+              <a:ext uri="{FF2B5EF4-FFF2-40B4-BE49-F238E27FC236}">
+                <a16:creationId xmlns:a16="http://schemas.microsoft.com/office/drawing/2014/main" id="{77531B7A-22AC-4433-58FC-3DD9017B0A26}"/>
+              </a:ext>
+            </a:extLst>
+          </p:cNvPr>
+          <p:cNvSpPr txBox="1"/>
+          <p:nvPr/>
+        </p:nvSpPr>
+        <p:spPr>
+          <a:xfrm>
+            <a:off x="81151" y="3662775"/>
+            <a:ext cx="891591" cy="307777"/>
+          </a:xfrm>
+          <a:prstGeom prst="rect">
+            <a:avLst/>
+          </a:prstGeom>
+          <a:noFill/>
+        </p:spPr>
+        <p:txBody>
+          <a:bodyPr wrap="none" rtlCol="0">
+            <a:spAutoFit/>
+          </a:bodyPr>
+          <a:lstStyle/>
+          <a:p>
+            <a:r>
+              <a:rPr lang="en-US" sz="1400" dirty="0"/>
+              <a:t>Summer</a:t>
+            </a:r>
+          </a:p>
+        </p:txBody>
+      </p:sp>
+      <p:sp>
+        <p:nvSpPr>
+          <p:cNvPr id="16" name="TextBox 15">
+            <a:extLst>
+              <a:ext uri="{FF2B5EF4-FFF2-40B4-BE49-F238E27FC236}">
+                <a16:creationId xmlns:a16="http://schemas.microsoft.com/office/drawing/2014/main" id="{BED18DDD-4629-5EB8-FF83-9F0FCA545D5F}"/>
+              </a:ext>
+            </a:extLst>
+          </p:cNvPr>
+          <p:cNvSpPr txBox="1"/>
+          <p:nvPr/>
+        </p:nvSpPr>
+        <p:spPr>
+          <a:xfrm>
+            <a:off x="62754" y="4908656"/>
+            <a:ext cx="465192" cy="307777"/>
+          </a:xfrm>
+          <a:prstGeom prst="rect">
+            <a:avLst/>
+          </a:prstGeom>
+          <a:noFill/>
+        </p:spPr>
+        <p:txBody>
+          <a:bodyPr wrap="none" rtlCol="0">
+            <a:spAutoFit/>
+          </a:bodyPr>
+          <a:lstStyle/>
+          <a:p>
+            <a:r>
+              <a:rPr lang="en-US" sz="1400" dirty="0"/>
+              <a:t>Fall</a:t>
+            </a:r>
+          </a:p>
+        </p:txBody>
+      </p:sp>
+    </p:spTree>
+    <p:extLst>
+      <p:ext uri="{BB962C8B-B14F-4D97-AF65-F5344CB8AC3E}">
+        <p14:creationId xmlns:p14="http://schemas.microsoft.com/office/powerpoint/2010/main" val="3592145699"/>
+      </p:ext>
+    </p:extLst>
+  </p:cSld>
+  <p:clrMapOvr>
+    <a:masterClrMapping/>
+  </p:clrMapOvr>
+</p:sld>
+</file>
+
+<file path=ppt/slides/slide21.xml><?xml version="1.0" encoding="utf-8"?>
+<p:sld xmlns:a="http://schemas.openxmlformats.org/drawingml/2006/main" xmlns:r="http://schemas.openxmlformats.org/officeDocument/2006/relationships" xmlns:p="http://schemas.openxmlformats.org/presentationml/2006/main">
+  <p:cSld>
+    <p:spTree>
+      <p:nvGrpSpPr>
+        <p:cNvPr id="1" name=""/>
+        <p:cNvGrpSpPr/>
+        <p:nvPr/>
+      </p:nvGrpSpPr>
+      <p:grpSpPr>
+        <a:xfrm>
+          <a:off x="0" y="0"/>
+          <a:ext cx="0" cy="0"/>
+          <a:chOff x="0" y="0"/>
+          <a:chExt cx="0" cy="0"/>
+        </a:xfrm>
+      </p:grpSpPr>
+      <p:pic>
+        <p:nvPicPr>
+          <p:cNvPr id="9" name="Picture 8">
+            <a:extLst>
+              <a:ext uri="{FF2B5EF4-FFF2-40B4-BE49-F238E27FC236}">
+                <a16:creationId xmlns:a16="http://schemas.microsoft.com/office/drawing/2014/main" id="{E36BE2B3-53A8-66AD-9577-C1DF401C8D77}"/>
+              </a:ext>
+            </a:extLst>
+          </p:cNvPr>
+          <p:cNvPicPr>
+            <a:picLocks noChangeAspect="1"/>
+          </p:cNvPicPr>
+          <p:nvPr/>
+        </p:nvPicPr>
+        <p:blipFill>
+          <a:blip r:embed="rId3"/>
+          <a:stretch>
+            <a:fillRect/>
+          </a:stretch>
+        </p:blipFill>
+        <p:spPr>
+          <a:xfrm>
+            <a:off x="1839010" y="926275"/>
+            <a:ext cx="8827216" cy="5402986"/>
+          </a:xfrm>
+          <a:prstGeom prst="rect">
+            <a:avLst/>
+          </a:prstGeom>
+        </p:spPr>
+      </p:pic>
+      <p:pic>
+        <p:nvPicPr>
+          <p:cNvPr id="6" name="Picture 5">
+            <a:extLst>
+              <a:ext uri="{FF2B5EF4-FFF2-40B4-BE49-F238E27FC236}">
+                <a16:creationId xmlns:a16="http://schemas.microsoft.com/office/drawing/2014/main" id="{30B4319F-9470-C945-884E-761E598B0367}"/>
+              </a:ext>
+            </a:extLst>
+          </p:cNvPr>
+          <p:cNvPicPr>
+            <a:picLocks noChangeAspect="1"/>
+          </p:cNvPicPr>
+          <p:nvPr/>
+        </p:nvPicPr>
+        <p:blipFill>
+          <a:blip r:embed="rId4"/>
+          <a:stretch>
+            <a:fillRect/>
+          </a:stretch>
+        </p:blipFill>
+        <p:spPr>
+          <a:xfrm>
+            <a:off x="7931753" y="109130"/>
+            <a:ext cx="4144171" cy="977462"/>
+          </a:xfrm>
+          <a:prstGeom prst="rect">
+            <a:avLst/>
+          </a:prstGeom>
+          <a:effectLst>
+            <a:outerShdw blurRad="50800" dist="38100" dir="2700000" algn="tl" rotWithShape="0">
+              <a:prstClr val="black">
+                <a:alpha val="40000"/>
+              </a:prstClr>
+            </a:outerShdw>
+          </a:effectLst>
+        </p:spPr>
+      </p:pic>
+      <p:sp>
+        <p:nvSpPr>
+          <p:cNvPr id="10" name="Content Placeholder 2">
+            <a:extLst>
+              <a:ext uri="{FF2B5EF4-FFF2-40B4-BE49-F238E27FC236}">
+                <a16:creationId xmlns:a16="http://schemas.microsoft.com/office/drawing/2014/main" id="{C76A4B64-63E5-5DBD-FA2F-22FC97AE2331}"/>
+              </a:ext>
+            </a:extLst>
+          </p:cNvPr>
+          <p:cNvSpPr txBox="1">
+            <a:spLocks/>
+          </p:cNvSpPr>
+          <p:nvPr/>
+        </p:nvSpPr>
+        <p:spPr>
+          <a:xfrm>
+            <a:off x="969484" y="1167789"/>
+            <a:ext cx="10515600" cy="796562"/>
+          </a:xfrm>
+          <a:prstGeom prst="rect">
+            <a:avLst/>
+          </a:prstGeom>
+        </p:spPr>
+        <p:txBody>
+          <a:bodyPr vert="horz" lIns="91440" tIns="45720" rIns="91440" bIns="45720" rtlCol="0">
+            <a:noAutofit/>
+          </a:bodyPr>
+          <a:lstStyle>
+            <a:lvl1pPr marL="228600" indent="-228600" algn="l" defTabSz="914400" rtl="0" eaLnBrk="1" latinLnBrk="0" hangingPunct="1">
+              <a:lnSpc>
+                <a:spcPct val="90000"/>
+              </a:lnSpc>
+              <a:spcBef>
+                <a:spcPts val="1000"/>
+              </a:spcBef>
+              <a:buFont typeface="Arial" panose="020B0604020202020204" pitchFamily="34" charset="0"/>
+              <a:buChar char="•"/>
+              <a:defRPr sz="2800" kern="1200">
+                <a:solidFill>
+                  <a:schemeClr val="tx1"/>
+                </a:solidFill>
+                <a:latin typeface="+mn-lt"/>
+                <a:ea typeface="+mn-ea"/>
+                <a:cs typeface="+mn-cs"/>
+              </a:defRPr>
+            </a:lvl1pPr>
+            <a:lvl2pPr marL="685800" indent="-228600" algn="l" defTabSz="914400" rtl="0" eaLnBrk="1" latinLnBrk="0" hangingPunct="1">
+              <a:lnSpc>
+                <a:spcPct val="90000"/>
+              </a:lnSpc>
+              <a:spcBef>
+                <a:spcPts val="500"/>
+              </a:spcBef>
+              <a:buFont typeface="Arial" panose="020B0604020202020204" pitchFamily="34" charset="0"/>
+              <a:buChar char="•"/>
+              <a:defRPr sz="2400" kern="1200">
+                <a:solidFill>
+                  <a:schemeClr val="tx1"/>
+                </a:solidFill>
+                <a:latin typeface="+mn-lt"/>
+                <a:ea typeface="+mn-ea"/>
+                <a:cs typeface="+mn-cs"/>
+              </a:defRPr>
+            </a:lvl2pPr>
+            <a:lvl3pPr marL="1143000" indent="-228600" algn="l" defTabSz="914400" rtl="0" eaLnBrk="1" latinLnBrk="0" hangingPunct="1">
+              <a:lnSpc>
+                <a:spcPct val="90000"/>
+              </a:lnSpc>
+              <a:spcBef>
+                <a:spcPts val="500"/>
+              </a:spcBef>
+              <a:buFont typeface="Arial" panose="020B0604020202020204" pitchFamily="34" charset="0"/>
+              <a:buChar char="•"/>
+              <a:defRPr sz="2000" kern="1200">
+                <a:solidFill>
+                  <a:schemeClr val="tx1"/>
+                </a:solidFill>
+                <a:latin typeface="+mn-lt"/>
+                <a:ea typeface="+mn-ea"/>
+                <a:cs typeface="+mn-cs"/>
+              </a:defRPr>
+            </a:lvl3pPr>
+            <a:lvl4pPr marL="1600200" indent="-228600" algn="l" defTabSz="914400" rtl="0" eaLnBrk="1" latinLnBrk="0" hangingPunct="1">
+              <a:lnSpc>
+                <a:spcPct val="90000"/>
+              </a:lnSpc>
+              <a:spcBef>
+                <a:spcPts val="500"/>
+              </a:spcBef>
+              <a:buFont typeface="Arial" panose="020B0604020202020204" pitchFamily="34" charset="0"/>
+              <a:buChar char="•"/>
+              <a:defRPr sz="1800" kern="1200">
+                <a:solidFill>
+                  <a:schemeClr val="tx1"/>
+                </a:solidFill>
+                <a:latin typeface="+mn-lt"/>
+                <a:ea typeface="+mn-ea"/>
+                <a:cs typeface="+mn-cs"/>
+              </a:defRPr>
+            </a:lvl4pPr>
+            <a:lvl5pPr marL="2057400" indent="-228600" algn="l" defTabSz="914400" rtl="0" eaLnBrk="1" latinLnBrk="0" hangingPunct="1">
+              <a:lnSpc>
+                <a:spcPct val="90000"/>
+              </a:lnSpc>
+              <a:spcBef>
+                <a:spcPts val="500"/>
+              </a:spcBef>
+              <a:buFont typeface="Arial" panose="020B0604020202020204" pitchFamily="34" charset="0"/>
+              <a:buChar char="•"/>
+              <a:defRPr sz="1800" kern="1200">
+                <a:solidFill>
+                  <a:schemeClr val="tx1"/>
+                </a:solidFill>
+                <a:latin typeface="+mn-lt"/>
+                <a:ea typeface="+mn-ea"/>
+                <a:cs typeface="+mn-cs"/>
+              </a:defRPr>
+            </a:lvl5pPr>
+            <a:lvl6pPr marL="2514600" indent="-228600" algn="l" defTabSz="914400" rtl="0" eaLnBrk="1" latinLnBrk="0" hangingPunct="1">
+              <a:lnSpc>
+                <a:spcPct val="90000"/>
+              </a:lnSpc>
+              <a:spcBef>
+                <a:spcPts val="500"/>
+              </a:spcBef>
+              <a:buFont typeface="Arial" panose="020B0604020202020204" pitchFamily="34" charset="0"/>
+              <a:buChar char="•"/>
+              <a:defRPr sz="1800" kern="1200">
+                <a:solidFill>
+                  <a:schemeClr val="tx1"/>
+                </a:solidFill>
+                <a:latin typeface="+mn-lt"/>
+                <a:ea typeface="+mn-ea"/>
+                <a:cs typeface="+mn-cs"/>
+              </a:defRPr>
+            </a:lvl6pPr>
+            <a:lvl7pPr marL="2971800" indent="-228600" algn="l" defTabSz="914400" rtl="0" eaLnBrk="1" latinLnBrk="0" hangingPunct="1">
+              <a:lnSpc>
+                <a:spcPct val="90000"/>
+              </a:lnSpc>
+              <a:spcBef>
+                <a:spcPts val="500"/>
+              </a:spcBef>
+              <a:buFont typeface="Arial" panose="020B0604020202020204" pitchFamily="34" charset="0"/>
+              <a:buChar char="•"/>
+              <a:defRPr sz="1800" kern="1200">
+                <a:solidFill>
+                  <a:schemeClr val="tx1"/>
+                </a:solidFill>
+                <a:latin typeface="+mn-lt"/>
+                <a:ea typeface="+mn-ea"/>
+                <a:cs typeface="+mn-cs"/>
+              </a:defRPr>
+            </a:lvl7pPr>
+            <a:lvl8pPr marL="3429000" indent="-228600" algn="l" defTabSz="914400" rtl="0" eaLnBrk="1" latinLnBrk="0" hangingPunct="1">
+              <a:lnSpc>
+                <a:spcPct val="90000"/>
+              </a:lnSpc>
+              <a:spcBef>
+                <a:spcPts val="500"/>
+              </a:spcBef>
+              <a:buFont typeface="Arial" panose="020B0604020202020204" pitchFamily="34" charset="0"/>
+              <a:buChar char="•"/>
+              <a:defRPr sz="1800" kern="1200">
+                <a:solidFill>
+                  <a:schemeClr val="tx1"/>
+                </a:solidFill>
+                <a:latin typeface="+mn-lt"/>
+                <a:ea typeface="+mn-ea"/>
+                <a:cs typeface="+mn-cs"/>
+              </a:defRPr>
+            </a:lvl8pPr>
+            <a:lvl9pPr marL="3886200" indent="-228600" algn="l" defTabSz="914400" rtl="0" eaLnBrk="1" latinLnBrk="0" hangingPunct="1">
+              <a:lnSpc>
+                <a:spcPct val="90000"/>
+              </a:lnSpc>
+              <a:spcBef>
+                <a:spcPts val="500"/>
+              </a:spcBef>
+              <a:buFont typeface="Arial" panose="020B0604020202020204" pitchFamily="34" charset="0"/>
+              <a:buChar char="•"/>
+              <a:defRPr sz="1800" kern="1200">
+                <a:solidFill>
+                  <a:schemeClr val="tx1"/>
+                </a:solidFill>
+                <a:latin typeface="+mn-lt"/>
+                <a:ea typeface="+mn-ea"/>
+                <a:cs typeface="+mn-cs"/>
+              </a:defRPr>
+            </a:lvl9pPr>
+          </a:lstStyle>
+          <a:p>
+            <a:pPr marL="0" indent="0">
+              <a:buNone/>
+            </a:pPr>
+            <a:r>
+              <a:rPr lang="en-US" sz="2400" dirty="0">
+                <a:solidFill>
+                  <a:srgbClr val="000000"/>
+                </a:solidFill>
+                <a:latin typeface="Century Gothic" panose="020B0502020202020204" pitchFamily="34" charset="0"/>
+              </a:rPr>
+              <a:t>Plains zebra</a:t>
+            </a:r>
+          </a:p>
+        </p:txBody>
+      </p:sp>
+      <p:sp>
+        <p:nvSpPr>
+          <p:cNvPr id="2" name="Title 1">
+            <a:extLst>
+              <a:ext uri="{FF2B5EF4-FFF2-40B4-BE49-F238E27FC236}">
+                <a16:creationId xmlns:a16="http://schemas.microsoft.com/office/drawing/2014/main" id="{39C317FC-C373-42DA-BD34-BE9D7137F610}"/>
+              </a:ext>
+            </a:extLst>
+          </p:cNvPr>
+          <p:cNvSpPr txBox="1">
+            <a:spLocks/>
+          </p:cNvSpPr>
+          <p:nvPr/>
+        </p:nvSpPr>
+        <p:spPr>
+          <a:xfrm>
+            <a:off x="496675" y="322824"/>
+            <a:ext cx="10515600" cy="1325563"/>
+          </a:xfrm>
+          <a:prstGeom prst="rect">
+            <a:avLst/>
+          </a:prstGeom>
+        </p:spPr>
+        <p:txBody>
+          <a:bodyPr vert="horz" lIns="91440" tIns="45720" rIns="91440" bIns="45720" rtlCol="0" anchor="ctr">
+            <a:normAutofit/>
+          </a:bodyPr>
+          <a:lstStyle>
+            <a:lvl1pPr algn="l" defTabSz="914400" rtl="0" eaLnBrk="1" latinLnBrk="0" hangingPunct="1">
+              <a:lnSpc>
+                <a:spcPct val="90000"/>
+              </a:lnSpc>
+              <a:spcBef>
+                <a:spcPct val="0"/>
+              </a:spcBef>
+              <a:buNone/>
+              <a:defRPr sz="4400" kern="1200">
+                <a:solidFill>
+                  <a:schemeClr val="tx1"/>
+                </a:solidFill>
+                <a:latin typeface="+mj-lt"/>
+                <a:ea typeface="+mj-ea"/>
+                <a:cs typeface="+mj-cs"/>
+              </a:defRPr>
+            </a:lvl1pPr>
+          </a:lstStyle>
+          <a:p>
+            <a:r>
+              <a:rPr lang="en-US" sz="3200" b="1" dirty="0">
+                <a:solidFill>
+                  <a:srgbClr val="000000"/>
+                </a:solidFill>
+              </a:rPr>
+              <a:t>HMM Examples/Applications</a:t>
+            </a:r>
+            <a:br>
+              <a:rPr lang="en-US" sz="3200" b="1" dirty="0">
+                <a:solidFill>
+                  <a:srgbClr val="000000"/>
+                </a:solidFill>
+              </a:rPr>
+            </a:br>
+            <a:endParaRPr lang="en-US" sz="3200" b="1" dirty="0"/>
+          </a:p>
+        </p:txBody>
+      </p:sp>
+    </p:spTree>
+    <p:extLst>
+      <p:ext uri="{BB962C8B-B14F-4D97-AF65-F5344CB8AC3E}">
+        <p14:creationId xmlns:p14="http://schemas.microsoft.com/office/powerpoint/2010/main" val="1604556284"/>
+      </p:ext>
+    </p:extLst>
+  </p:cSld>
+  <p:clrMapOvr>
+    <a:masterClrMapping/>
+  </p:clrMapOvr>
+</p:sld>
+</file>
+
+<file path=ppt/slides/slide22.xml><?xml version="1.0" encoding="utf-8"?>
+<p:sld xmlns:a="http://schemas.openxmlformats.org/drawingml/2006/main" xmlns:r="http://schemas.openxmlformats.org/officeDocument/2006/relationships" xmlns:p="http://schemas.openxmlformats.org/presentationml/2006/main">
+  <p:cSld>
+    <p:spTree>
+      <p:nvGrpSpPr>
+        <p:cNvPr id="1" name=""/>
+        <p:cNvGrpSpPr/>
+        <p:nvPr/>
+      </p:nvGrpSpPr>
+      <p:grpSpPr>
+        <a:xfrm>
+          <a:off x="0" y="0"/>
+          <a:ext cx="0" cy="0"/>
+          <a:chOff x="0" y="0"/>
+          <a:chExt cx="0" cy="0"/>
+        </a:xfrm>
+      </p:grpSpPr>
+      <p:pic>
+        <p:nvPicPr>
+          <p:cNvPr id="3" name="Picture 2">
+            <a:extLst>
+              <a:ext uri="{FF2B5EF4-FFF2-40B4-BE49-F238E27FC236}">
+                <a16:creationId xmlns:a16="http://schemas.microsoft.com/office/drawing/2014/main" id="{E6DBBC0C-73CC-29FB-2A11-CD401788A449}"/>
+              </a:ext>
+            </a:extLst>
+          </p:cNvPr>
+          <p:cNvPicPr>
+            <a:picLocks noChangeAspect="1"/>
+          </p:cNvPicPr>
+          <p:nvPr/>
+        </p:nvPicPr>
+        <p:blipFill>
+          <a:blip r:embed="rId2"/>
+          <a:stretch>
+            <a:fillRect/>
+          </a:stretch>
+        </p:blipFill>
+        <p:spPr>
+          <a:xfrm>
+            <a:off x="7796232" y="85543"/>
+            <a:ext cx="4291675" cy="1325563"/>
+          </a:xfrm>
+          <a:prstGeom prst="rect">
+            <a:avLst/>
+          </a:prstGeom>
+          <a:effectLst>
+            <a:outerShdw blurRad="50800" dist="38100" dir="2700000" algn="tl" rotWithShape="0">
+              <a:prstClr val="black">
+                <a:alpha val="40000"/>
+              </a:prstClr>
+            </a:outerShdw>
+          </a:effectLst>
+        </p:spPr>
+      </p:pic>
+      <p:sp>
+        <p:nvSpPr>
+          <p:cNvPr id="4" name="Title 1">
+            <a:extLst>
+              <a:ext uri="{FF2B5EF4-FFF2-40B4-BE49-F238E27FC236}">
+                <a16:creationId xmlns:a16="http://schemas.microsoft.com/office/drawing/2014/main" id="{5F5CB036-49B3-7911-0438-78B8FDB7BEF9}"/>
+              </a:ext>
+            </a:extLst>
+          </p:cNvPr>
+          <p:cNvSpPr txBox="1">
+            <a:spLocks/>
+          </p:cNvSpPr>
+          <p:nvPr/>
+        </p:nvSpPr>
+        <p:spPr>
+          <a:xfrm>
+            <a:off x="496675" y="322824"/>
+            <a:ext cx="10515600" cy="1325563"/>
+          </a:xfrm>
+          <a:prstGeom prst="rect">
+            <a:avLst/>
+          </a:prstGeom>
+        </p:spPr>
+        <p:txBody>
+          <a:bodyPr vert="horz" lIns="91440" tIns="45720" rIns="91440" bIns="45720" rtlCol="0" anchor="ctr">
+            <a:normAutofit/>
+          </a:bodyPr>
+          <a:lstStyle>
+            <a:lvl1pPr algn="l" defTabSz="914400" rtl="0" eaLnBrk="1" latinLnBrk="0" hangingPunct="1">
+              <a:lnSpc>
+                <a:spcPct val="90000"/>
+              </a:lnSpc>
+              <a:spcBef>
+                <a:spcPct val="0"/>
+              </a:spcBef>
+              <a:buNone/>
+              <a:defRPr sz="4400" kern="1200">
+                <a:solidFill>
+                  <a:schemeClr val="tx1"/>
+                </a:solidFill>
+                <a:latin typeface="+mj-lt"/>
+                <a:ea typeface="+mj-ea"/>
+                <a:cs typeface="+mj-cs"/>
+              </a:defRPr>
+            </a:lvl1pPr>
+          </a:lstStyle>
+          <a:p>
+            <a:r>
+              <a:rPr lang="en-US" sz="3200" b="1" dirty="0">
+                <a:solidFill>
+                  <a:srgbClr val="000000"/>
+                </a:solidFill>
+              </a:rPr>
+              <a:t>HMM Examples/Applications</a:t>
+            </a:r>
+            <a:br>
+              <a:rPr lang="en-US" sz="3200" b="1" dirty="0">
+                <a:solidFill>
+                  <a:srgbClr val="000000"/>
+                </a:solidFill>
+              </a:rPr>
+            </a:br>
+            <a:endParaRPr lang="en-US" sz="3200" b="1" dirty="0"/>
+          </a:p>
+        </p:txBody>
+      </p:sp>
+      <p:sp>
+        <p:nvSpPr>
+          <p:cNvPr id="5" name="Content Placeholder 2">
+            <a:extLst>
+              <a:ext uri="{FF2B5EF4-FFF2-40B4-BE49-F238E27FC236}">
+                <a16:creationId xmlns:a16="http://schemas.microsoft.com/office/drawing/2014/main" id="{65637429-5341-0104-56D7-C9D78E6881AF}"/>
+              </a:ext>
+            </a:extLst>
+          </p:cNvPr>
+          <p:cNvSpPr txBox="1">
+            <a:spLocks/>
+          </p:cNvSpPr>
+          <p:nvPr/>
+        </p:nvSpPr>
+        <p:spPr>
+          <a:xfrm>
+            <a:off x="969484" y="1167789"/>
+            <a:ext cx="10515600" cy="796562"/>
+          </a:xfrm>
+          <a:prstGeom prst="rect">
+            <a:avLst/>
+          </a:prstGeom>
+        </p:spPr>
+        <p:txBody>
+          <a:bodyPr vert="horz" lIns="91440" tIns="45720" rIns="91440" bIns="45720" rtlCol="0">
+            <a:noAutofit/>
+          </a:bodyPr>
+          <a:lstStyle>
+            <a:lvl1pPr marL="228600" indent="-228600" algn="l" defTabSz="914400" rtl="0" eaLnBrk="1" latinLnBrk="0" hangingPunct="1">
+              <a:lnSpc>
+                <a:spcPct val="90000"/>
+              </a:lnSpc>
+              <a:spcBef>
+                <a:spcPts val="1000"/>
+              </a:spcBef>
+              <a:buFont typeface="Arial" panose="020B0604020202020204" pitchFamily="34" charset="0"/>
+              <a:buChar char="•"/>
+              <a:defRPr sz="2800" kern="1200">
+                <a:solidFill>
+                  <a:schemeClr val="tx1"/>
+                </a:solidFill>
+                <a:latin typeface="+mn-lt"/>
+                <a:ea typeface="+mn-ea"/>
+                <a:cs typeface="+mn-cs"/>
+              </a:defRPr>
+            </a:lvl1pPr>
+            <a:lvl2pPr marL="685800" indent="-228600" algn="l" defTabSz="914400" rtl="0" eaLnBrk="1" latinLnBrk="0" hangingPunct="1">
+              <a:lnSpc>
+                <a:spcPct val="90000"/>
+              </a:lnSpc>
+              <a:spcBef>
+                <a:spcPts val="500"/>
+              </a:spcBef>
+              <a:buFont typeface="Arial" panose="020B0604020202020204" pitchFamily="34" charset="0"/>
+              <a:buChar char="•"/>
+              <a:defRPr sz="2400" kern="1200">
+                <a:solidFill>
+                  <a:schemeClr val="tx1"/>
+                </a:solidFill>
+                <a:latin typeface="+mn-lt"/>
+                <a:ea typeface="+mn-ea"/>
+                <a:cs typeface="+mn-cs"/>
+              </a:defRPr>
+            </a:lvl2pPr>
+            <a:lvl3pPr marL="1143000" indent="-228600" algn="l" defTabSz="914400" rtl="0" eaLnBrk="1" latinLnBrk="0" hangingPunct="1">
+              <a:lnSpc>
+                <a:spcPct val="90000"/>
+              </a:lnSpc>
+              <a:spcBef>
+                <a:spcPts val="500"/>
+              </a:spcBef>
+              <a:buFont typeface="Arial" panose="020B0604020202020204" pitchFamily="34" charset="0"/>
+              <a:buChar char="•"/>
+              <a:defRPr sz="2000" kern="1200">
+                <a:solidFill>
+                  <a:schemeClr val="tx1"/>
+                </a:solidFill>
+                <a:latin typeface="+mn-lt"/>
+                <a:ea typeface="+mn-ea"/>
+                <a:cs typeface="+mn-cs"/>
+              </a:defRPr>
+            </a:lvl3pPr>
+            <a:lvl4pPr marL="1600200" indent="-228600" algn="l" defTabSz="914400" rtl="0" eaLnBrk="1" latinLnBrk="0" hangingPunct="1">
+              <a:lnSpc>
+                <a:spcPct val="90000"/>
+              </a:lnSpc>
+              <a:spcBef>
+                <a:spcPts val="500"/>
+              </a:spcBef>
+              <a:buFont typeface="Arial" panose="020B0604020202020204" pitchFamily="34" charset="0"/>
+              <a:buChar char="•"/>
+              <a:defRPr sz="1800" kern="1200">
+                <a:solidFill>
+                  <a:schemeClr val="tx1"/>
+                </a:solidFill>
+                <a:latin typeface="+mn-lt"/>
+                <a:ea typeface="+mn-ea"/>
+                <a:cs typeface="+mn-cs"/>
+              </a:defRPr>
+            </a:lvl4pPr>
+            <a:lvl5pPr marL="2057400" indent="-228600" algn="l" defTabSz="914400" rtl="0" eaLnBrk="1" latinLnBrk="0" hangingPunct="1">
+              <a:lnSpc>
+                <a:spcPct val="90000"/>
+              </a:lnSpc>
+              <a:spcBef>
+                <a:spcPts val="500"/>
+              </a:spcBef>
+              <a:buFont typeface="Arial" panose="020B0604020202020204" pitchFamily="34" charset="0"/>
+              <a:buChar char="•"/>
+              <a:defRPr sz="1800" kern="1200">
+                <a:solidFill>
+                  <a:schemeClr val="tx1"/>
+                </a:solidFill>
+                <a:latin typeface="+mn-lt"/>
+                <a:ea typeface="+mn-ea"/>
+                <a:cs typeface="+mn-cs"/>
+              </a:defRPr>
+            </a:lvl5pPr>
+            <a:lvl6pPr marL="2514600" indent="-228600" algn="l" defTabSz="914400" rtl="0" eaLnBrk="1" latinLnBrk="0" hangingPunct="1">
+              <a:lnSpc>
+                <a:spcPct val="90000"/>
+              </a:lnSpc>
+              <a:spcBef>
+                <a:spcPts val="500"/>
+              </a:spcBef>
+              <a:buFont typeface="Arial" panose="020B0604020202020204" pitchFamily="34" charset="0"/>
+              <a:buChar char="•"/>
+              <a:defRPr sz="1800" kern="1200">
+                <a:solidFill>
+                  <a:schemeClr val="tx1"/>
+                </a:solidFill>
+                <a:latin typeface="+mn-lt"/>
+                <a:ea typeface="+mn-ea"/>
+                <a:cs typeface="+mn-cs"/>
+              </a:defRPr>
+            </a:lvl6pPr>
+            <a:lvl7pPr marL="2971800" indent="-228600" algn="l" defTabSz="914400" rtl="0" eaLnBrk="1" latinLnBrk="0" hangingPunct="1">
+              <a:lnSpc>
+                <a:spcPct val="90000"/>
+              </a:lnSpc>
+              <a:spcBef>
+                <a:spcPts val="500"/>
+              </a:spcBef>
+              <a:buFont typeface="Arial" panose="020B0604020202020204" pitchFamily="34" charset="0"/>
+              <a:buChar char="•"/>
+              <a:defRPr sz="1800" kern="1200">
+                <a:solidFill>
+                  <a:schemeClr val="tx1"/>
+                </a:solidFill>
+                <a:latin typeface="+mn-lt"/>
+                <a:ea typeface="+mn-ea"/>
+                <a:cs typeface="+mn-cs"/>
+              </a:defRPr>
+            </a:lvl7pPr>
+            <a:lvl8pPr marL="3429000" indent="-228600" algn="l" defTabSz="914400" rtl="0" eaLnBrk="1" latinLnBrk="0" hangingPunct="1">
+              <a:lnSpc>
+                <a:spcPct val="90000"/>
+              </a:lnSpc>
+              <a:spcBef>
+                <a:spcPts val="500"/>
+              </a:spcBef>
+              <a:buFont typeface="Arial" panose="020B0604020202020204" pitchFamily="34" charset="0"/>
+              <a:buChar char="•"/>
+              <a:defRPr sz="1800" kern="1200">
+                <a:solidFill>
+                  <a:schemeClr val="tx1"/>
+                </a:solidFill>
+                <a:latin typeface="+mn-lt"/>
+                <a:ea typeface="+mn-ea"/>
+                <a:cs typeface="+mn-cs"/>
+              </a:defRPr>
+            </a:lvl8pPr>
+            <a:lvl9pPr marL="3886200" indent="-228600" algn="l" defTabSz="914400" rtl="0" eaLnBrk="1" latinLnBrk="0" hangingPunct="1">
+              <a:lnSpc>
+                <a:spcPct val="90000"/>
+              </a:lnSpc>
+              <a:spcBef>
+                <a:spcPts val="500"/>
+              </a:spcBef>
+              <a:buFont typeface="Arial" panose="020B0604020202020204" pitchFamily="34" charset="0"/>
+              <a:buChar char="•"/>
+              <a:defRPr sz="1800" kern="1200">
+                <a:solidFill>
+                  <a:schemeClr val="tx1"/>
+                </a:solidFill>
+                <a:latin typeface="+mn-lt"/>
+                <a:ea typeface="+mn-ea"/>
+                <a:cs typeface="+mn-cs"/>
+              </a:defRPr>
+            </a:lvl9pPr>
+          </a:lstStyle>
+          <a:p>
+            <a:pPr marL="0" indent="0">
+              <a:buNone/>
+            </a:pPr>
+            <a:r>
+              <a:rPr lang="en-US" sz="2400" dirty="0">
+                <a:solidFill>
+                  <a:srgbClr val="000000"/>
+                </a:solidFill>
+                <a:latin typeface="Century Gothic" panose="020B0502020202020204" pitchFamily="34" charset="0"/>
+              </a:rPr>
+              <a:t>Albatross</a:t>
+            </a:r>
+          </a:p>
+        </p:txBody>
+      </p:sp>
+      <p:pic>
+        <p:nvPicPr>
+          <p:cNvPr id="7" name="Picture 6">
+            <a:extLst>
+              <a:ext uri="{FF2B5EF4-FFF2-40B4-BE49-F238E27FC236}">
+                <a16:creationId xmlns:a16="http://schemas.microsoft.com/office/drawing/2014/main" id="{54D9E5D1-CE16-75A9-FBF6-C95C7FB3A491}"/>
+              </a:ext>
+            </a:extLst>
+          </p:cNvPr>
+          <p:cNvPicPr>
+            <a:picLocks noChangeAspect="1"/>
+          </p:cNvPicPr>
+          <p:nvPr/>
+        </p:nvPicPr>
+        <p:blipFill>
+          <a:blip r:embed="rId3"/>
+          <a:stretch>
+            <a:fillRect/>
+          </a:stretch>
+        </p:blipFill>
+        <p:spPr>
+          <a:xfrm>
+            <a:off x="2079172" y="1615730"/>
+            <a:ext cx="7849948" cy="4716930"/>
+          </a:xfrm>
+          <a:prstGeom prst="rect">
+            <a:avLst/>
+          </a:prstGeom>
+        </p:spPr>
+      </p:pic>
+    </p:spTree>
+    <p:extLst>
+      <p:ext uri="{BB962C8B-B14F-4D97-AF65-F5344CB8AC3E}">
+        <p14:creationId xmlns:p14="http://schemas.microsoft.com/office/powerpoint/2010/main" val="3517056293"/>
+      </p:ext>
+    </p:extLst>
+  </p:cSld>
+  <p:clrMapOvr>
+    <a:masterClrMapping/>
+  </p:clrMapOvr>
+</p:sld>
+</file>
+
+<file path=ppt/slides/slide23.xml><?xml version="1.0" encoding="utf-8"?>
+<p:sld xmlns:a="http://schemas.openxmlformats.org/drawingml/2006/main" xmlns:r="http://schemas.openxmlformats.org/officeDocument/2006/relationships" xmlns:p="http://schemas.openxmlformats.org/presentationml/2006/main">
+  <p:cSld>
+    <p:spTree>
+      <p:nvGrpSpPr>
+        <p:cNvPr id="1" name=""/>
+        <p:cNvGrpSpPr/>
+        <p:nvPr/>
+      </p:nvGrpSpPr>
+      <p:grpSpPr>
+        <a:xfrm>
+          <a:off x="0" y="0"/>
+          <a:ext cx="0" cy="0"/>
+          <a:chOff x="0" y="0"/>
+          <a:chExt cx="0" cy="0"/>
+        </a:xfrm>
+      </p:grpSpPr>
+      <p:sp>
+        <p:nvSpPr>
+          <p:cNvPr id="3" name="Content Placeholder 2">
+            <a:extLst>
+              <a:ext uri="{FF2B5EF4-FFF2-40B4-BE49-F238E27FC236}">
+                <a16:creationId xmlns:a16="http://schemas.microsoft.com/office/drawing/2014/main" id="{8E7664B6-E591-768E-08A1-E2467FE3AA0A}"/>
+              </a:ext>
+            </a:extLst>
+          </p:cNvPr>
+          <p:cNvSpPr>
+            <a:spLocks noGrp="1"/>
+          </p:cNvSpPr>
+          <p:nvPr>
+            <p:ph idx="4294967295"/>
+          </p:nvPr>
+        </p:nvSpPr>
+        <p:spPr>
+          <a:xfrm>
+            <a:off x="605641" y="1164664"/>
+            <a:ext cx="10770919" cy="5069881"/>
+          </a:xfrm>
+        </p:spPr>
+        <p:txBody>
+          <a:bodyPr>
+            <a:normAutofit/>
+          </a:bodyPr>
+          <a:lstStyle/>
+          <a:p>
+            <a:r>
+              <a:rPr lang="en-US" sz="1600" b="0" i="0" u="none" strike="noStrike" baseline="0" dirty="0">
+                <a:solidFill>
+                  <a:srgbClr val="000000"/>
+                </a:solidFill>
+              </a:rPr>
+              <a:t>Cagnacci, F., Focardi, S., </a:t>
+            </a:r>
+            <a:r>
+              <a:rPr lang="en-US" sz="1600" b="0" i="0" u="none" strike="noStrike" baseline="0" dirty="0" err="1">
+                <a:solidFill>
+                  <a:srgbClr val="000000"/>
+                </a:solidFill>
+              </a:rPr>
+              <a:t>Ghisla</a:t>
+            </a:r>
+            <a:r>
+              <a:rPr lang="en-US" sz="1600" b="0" i="0" u="none" strike="noStrike" baseline="0" dirty="0">
+                <a:solidFill>
+                  <a:srgbClr val="000000"/>
+                </a:solidFill>
+              </a:rPr>
+              <a:t>, A., van </a:t>
+            </a:r>
+            <a:r>
+              <a:rPr lang="en-US" sz="1600" b="0" i="0" u="none" strike="noStrike" baseline="0" dirty="0" err="1">
+                <a:solidFill>
+                  <a:srgbClr val="000000"/>
+                </a:solidFill>
+              </a:rPr>
+              <a:t>Moorter</a:t>
+            </a:r>
+            <a:r>
+              <a:rPr lang="en-US" sz="1600" b="0" i="0" u="none" strike="noStrike" baseline="0" dirty="0">
+                <a:solidFill>
+                  <a:srgbClr val="000000"/>
+                </a:solidFill>
+              </a:rPr>
+              <a:t>, B., Merrill, E.H., Gurarie, E., </a:t>
+            </a:r>
+            <a:r>
+              <a:rPr lang="en-US" sz="1600" b="0" i="0" u="none" strike="noStrike" baseline="0" dirty="0" err="1">
+                <a:solidFill>
+                  <a:srgbClr val="000000"/>
+                </a:solidFill>
+              </a:rPr>
+              <a:t>Heurich</a:t>
+            </a:r>
+            <a:r>
+              <a:rPr lang="en-US" sz="1600" b="0" i="0" u="none" strike="noStrike" baseline="0" dirty="0">
+                <a:solidFill>
+                  <a:srgbClr val="000000"/>
+                </a:solidFill>
+              </a:rPr>
+              <a:t>, M., Mysterud, A., Linnell, J., </a:t>
+            </a:r>
+            <a:r>
+              <a:rPr lang="en-US" sz="1600" b="0" i="0" u="none" strike="noStrike" baseline="0" dirty="0" err="1">
+                <a:solidFill>
+                  <a:srgbClr val="000000"/>
+                </a:solidFill>
+              </a:rPr>
+              <a:t>Panzacchi</a:t>
+            </a:r>
+            <a:r>
+              <a:rPr lang="en-US" sz="1600" b="0" i="0" u="none" strike="noStrike" baseline="0" dirty="0">
+                <a:solidFill>
+                  <a:srgbClr val="000000"/>
+                </a:solidFill>
+              </a:rPr>
+              <a:t>, M., May, R., </a:t>
+            </a:r>
+            <a:r>
+              <a:rPr lang="en-US" sz="1600" b="0" i="0" u="none" strike="noStrike" baseline="0" dirty="0" err="1">
+                <a:solidFill>
+                  <a:srgbClr val="000000"/>
+                </a:solidFill>
+              </a:rPr>
+              <a:t>Nygård</a:t>
+            </a:r>
+            <a:r>
+              <a:rPr lang="en-US" sz="1600" b="0" i="0" u="none" strike="noStrike" baseline="0" dirty="0">
+                <a:solidFill>
+                  <a:srgbClr val="000000"/>
+                </a:solidFill>
+              </a:rPr>
+              <a:t>, T., </a:t>
+            </a:r>
+            <a:r>
+              <a:rPr lang="en-US" sz="1600" b="0" i="0" u="none" strike="noStrike" baseline="0" dirty="0" err="1">
+                <a:solidFill>
+                  <a:srgbClr val="000000"/>
+                </a:solidFill>
+              </a:rPr>
+              <a:t>Rolandsen</a:t>
+            </a:r>
+            <a:r>
+              <a:rPr lang="en-US" sz="1600" b="0" i="0" u="none" strike="noStrike" baseline="0" dirty="0">
+                <a:solidFill>
+                  <a:srgbClr val="000000"/>
+                </a:solidFill>
+              </a:rPr>
+              <a:t>, C. and Hebblewhite, M. (2016), How many routes lead to migration? Comparison of methods to assess and characterize migratory movements. J Anim </a:t>
+            </a:r>
+            <a:r>
+              <a:rPr lang="en-US" sz="1600" b="0" i="0" u="none" strike="noStrike" baseline="0" dirty="0" err="1">
+                <a:solidFill>
+                  <a:srgbClr val="000000"/>
+                </a:solidFill>
+              </a:rPr>
+              <a:t>Ecol</a:t>
+            </a:r>
+            <a:r>
+              <a:rPr lang="en-US" sz="1600" b="0" i="0" u="none" strike="noStrike" baseline="0" dirty="0">
+                <a:solidFill>
+                  <a:srgbClr val="000000"/>
+                </a:solidFill>
+              </a:rPr>
+              <a:t>, 85: 54-68. </a:t>
+            </a:r>
+          </a:p>
+          <a:p>
+            <a:r>
+              <a:rPr lang="en-US" sz="1600" b="0" i="0" u="none" strike="noStrike" baseline="0" dirty="0" err="1">
+                <a:solidFill>
+                  <a:srgbClr val="000000"/>
+                </a:solidFill>
+              </a:rPr>
+              <a:t>Karelus</a:t>
+            </a:r>
+            <a:r>
+              <a:rPr lang="en-US" sz="1600" b="0" i="0" u="none" strike="noStrike" baseline="0" dirty="0">
+                <a:solidFill>
+                  <a:srgbClr val="000000"/>
+                </a:solidFill>
+              </a:rPr>
+              <a:t>, D.L., J. Walter McCown, Brian K. </a:t>
+            </a:r>
+            <a:r>
+              <a:rPr lang="en-US" sz="1600" b="0" i="0" u="none" strike="noStrike" baseline="0" dirty="0" err="1">
+                <a:solidFill>
+                  <a:srgbClr val="000000"/>
+                </a:solidFill>
+              </a:rPr>
+              <a:t>Scheick</a:t>
+            </a:r>
+            <a:r>
+              <a:rPr lang="en-US" sz="1600" b="0" i="0" u="none" strike="noStrike" baseline="0" dirty="0">
+                <a:solidFill>
+                  <a:srgbClr val="000000"/>
+                </a:solidFill>
+              </a:rPr>
+              <a:t>, </a:t>
+            </a:r>
+            <a:r>
+              <a:rPr lang="en-US" sz="1600" b="0" i="0" u="none" strike="noStrike" baseline="0" dirty="0" err="1">
+                <a:solidFill>
+                  <a:srgbClr val="000000"/>
+                </a:solidFill>
+              </a:rPr>
+              <a:t>Madelonvan</a:t>
+            </a:r>
+            <a:r>
+              <a:rPr lang="en-US" sz="1600" b="0" i="0" u="none" strike="noStrike" baseline="0" dirty="0">
+                <a:solidFill>
+                  <a:srgbClr val="000000"/>
+                </a:solidFill>
+              </a:rPr>
+              <a:t> de </a:t>
+            </a:r>
+            <a:r>
+              <a:rPr lang="en-US" sz="1600" b="0" i="0" u="none" strike="noStrike" baseline="0" dirty="0" err="1">
+                <a:solidFill>
+                  <a:srgbClr val="000000"/>
+                </a:solidFill>
+              </a:rPr>
+              <a:t>Kerk</a:t>
+            </a:r>
+            <a:r>
+              <a:rPr lang="en-US" sz="1600" b="0" i="0" u="none" strike="noStrike" baseline="0" dirty="0">
+                <a:solidFill>
+                  <a:srgbClr val="000000"/>
+                </a:solidFill>
+              </a:rPr>
+              <a:t>, Benjamin M. </a:t>
+            </a:r>
+            <a:r>
+              <a:rPr lang="en-US" sz="1600" b="0" i="0" u="none" strike="noStrike" baseline="0" dirty="0" err="1">
+                <a:solidFill>
+                  <a:srgbClr val="000000"/>
+                </a:solidFill>
+              </a:rPr>
+              <a:t>Bolker</a:t>
+            </a:r>
+            <a:r>
+              <a:rPr lang="en-US" sz="1600" b="0" i="0" u="none" strike="noStrike" baseline="0" dirty="0">
+                <a:solidFill>
+                  <a:srgbClr val="000000"/>
+                </a:solidFill>
+              </a:rPr>
+              <a:t>, Madan K. Oli "Incorporating movement patterns to discern habitat selection: black bears as a case study," Wildlife Research, 46(1), 76-88, (15 February 2019) </a:t>
+            </a:r>
+          </a:p>
+          <a:p>
+            <a:r>
+              <a:rPr lang="en-US" sz="1600" b="0" i="0" u="none" strike="noStrike" baseline="0" dirty="0">
+                <a:solidFill>
+                  <a:srgbClr val="000000"/>
+                </a:solidFill>
+              </a:rPr>
+              <a:t>Kennedy, A. S., A. N. </a:t>
+            </a:r>
+            <a:r>
+              <a:rPr lang="en-US" sz="1600" b="0" i="0" u="none" strike="noStrike" baseline="0" dirty="0" err="1">
+                <a:solidFill>
+                  <a:srgbClr val="000000"/>
+                </a:solidFill>
+              </a:rPr>
+              <a:t>Zerbini</a:t>
+            </a:r>
+            <a:r>
+              <a:rPr lang="en-US" sz="1600" b="0" i="0" u="none" strike="noStrike" baseline="0" dirty="0">
+                <a:solidFill>
+                  <a:srgbClr val="000000"/>
+                </a:solidFill>
+              </a:rPr>
+              <a:t>, B. K. </a:t>
+            </a:r>
+            <a:r>
+              <a:rPr lang="en-US" sz="1600" b="0" i="0" u="none" strike="noStrike" baseline="0" dirty="0" err="1">
+                <a:solidFill>
+                  <a:srgbClr val="000000"/>
+                </a:solidFill>
+              </a:rPr>
+              <a:t>Rone</a:t>
+            </a:r>
+            <a:r>
+              <a:rPr lang="en-US" sz="1600" b="0" i="0" u="none" strike="noStrike" baseline="0" dirty="0">
+                <a:solidFill>
+                  <a:srgbClr val="000000"/>
+                </a:solidFill>
+              </a:rPr>
+              <a:t>, and P. J. Clapham. 2014. Individual variation in movements of satellite-tracked humpback whales Megaptera novaeangliae in the eastern Aleutian Islands and Bering Sea. Endangered Species Research 23:187195 </a:t>
+            </a:r>
+          </a:p>
+          <a:p>
+            <a:r>
+              <a:rPr lang="en-US" sz="1600" b="0" i="0" u="none" strike="noStrike" baseline="0" dirty="0" err="1">
+                <a:solidFill>
+                  <a:srgbClr val="000000"/>
+                </a:solidFill>
+              </a:rPr>
+              <a:t>Klappstein</a:t>
+            </a:r>
+            <a:r>
+              <a:rPr lang="en-US" sz="1600" b="0" i="0" u="none" strike="noStrike" baseline="0" dirty="0">
+                <a:solidFill>
+                  <a:srgbClr val="000000"/>
+                </a:solidFill>
+              </a:rPr>
+              <a:t> NJ, Thomas L, Michelot T. Flexible hidden Markov models for </a:t>
+            </a:r>
+            <a:r>
+              <a:rPr lang="en-US" sz="1600" b="0" i="0" u="none" strike="noStrike" baseline="0" dirty="0" err="1">
+                <a:solidFill>
+                  <a:srgbClr val="000000"/>
+                </a:solidFill>
+              </a:rPr>
+              <a:t>behaviour</a:t>
+            </a:r>
+            <a:r>
+              <a:rPr lang="en-US" sz="1600" b="0" i="0" u="none" strike="noStrike" baseline="0" dirty="0">
+                <a:solidFill>
+                  <a:srgbClr val="000000"/>
+                </a:solidFill>
+              </a:rPr>
+              <a:t>-dependent habitat selection. Mov Ecol. 2023 Jun 3;11(1):30. </a:t>
+            </a:r>
+            <a:r>
+              <a:rPr lang="en-US" sz="1600" b="0" i="0" u="none" strike="noStrike" baseline="0" dirty="0" err="1">
+                <a:solidFill>
+                  <a:srgbClr val="000000"/>
+                </a:solidFill>
+              </a:rPr>
+              <a:t>doi</a:t>
+            </a:r>
+            <a:r>
+              <a:rPr lang="en-US" sz="1600" b="0" i="0" u="none" strike="noStrike" baseline="0" dirty="0">
+                <a:solidFill>
+                  <a:srgbClr val="000000"/>
+                </a:solidFill>
+              </a:rPr>
+              <a:t>: 10.1186/s40462-023-00392-3. </a:t>
+            </a:r>
+            <a:endParaRPr lang="en-US" dirty="0"/>
+          </a:p>
+          <a:p>
+            <a:r>
+              <a:rPr lang="en-US" sz="1600" dirty="0"/>
+              <a:t>McClintock, B.T. and Michelot, T. (2018), </a:t>
+            </a:r>
+            <a:r>
+              <a:rPr lang="en-US" sz="1600" dirty="0" err="1"/>
+              <a:t>momentuHMM</a:t>
+            </a:r>
+            <a:r>
+              <a:rPr lang="en-US" sz="1600" dirty="0"/>
+              <a:t>: </a:t>
+            </a:r>
+            <a:r>
+              <a:rPr lang="en-US" sz="1600" cap="small" dirty="0"/>
+              <a:t>R</a:t>
+            </a:r>
+            <a:r>
+              <a:rPr lang="en-US" sz="1600" dirty="0"/>
+              <a:t> package for generalized hidden Markov models of animal movement. </a:t>
+            </a:r>
+            <a:r>
+              <a:rPr lang="en-US" sz="1600" dirty="0">
+                <a:solidFill>
+                  <a:srgbClr val="000000"/>
+                </a:solidFill>
+              </a:rPr>
+              <a:t>Methods </a:t>
+            </a:r>
+            <a:r>
+              <a:rPr lang="en-US" sz="1600" dirty="0" err="1">
+                <a:solidFill>
+                  <a:srgbClr val="000000"/>
+                </a:solidFill>
+              </a:rPr>
+              <a:t>Ecol</a:t>
+            </a:r>
+            <a:r>
+              <a:rPr lang="en-US" sz="1600">
+                <a:solidFill>
+                  <a:srgbClr val="000000"/>
+                </a:solidFill>
+              </a:rPr>
+              <a:t> Evol, 9(6): 1518-1530.</a:t>
+            </a:r>
+            <a:r>
+              <a:rPr lang="en-US" sz="1600"/>
+              <a:t> </a:t>
+            </a:r>
+            <a:r>
+              <a:rPr lang="en-US" sz="1600" dirty="0"/>
+              <a:t>https://doi.org/10.1111/2041-210X.12995.</a:t>
+            </a:r>
+          </a:p>
+          <a:p>
+            <a:r>
+              <a:rPr lang="en-US" sz="1600" b="0" i="0" u="none" strike="noStrike" baseline="0" dirty="0">
+                <a:solidFill>
+                  <a:srgbClr val="000000"/>
+                </a:solidFill>
+              </a:rPr>
+              <a:t>Michelot, T., Langrock, R. and Patterson, T.A. (2016), </a:t>
+            </a:r>
+            <a:r>
+              <a:rPr lang="en-US" sz="1600" b="0" i="0" u="none" strike="noStrike" baseline="0" dirty="0" err="1">
+                <a:solidFill>
+                  <a:srgbClr val="000000"/>
+                </a:solidFill>
+              </a:rPr>
+              <a:t>moveHMM</a:t>
+            </a:r>
+            <a:r>
+              <a:rPr lang="en-US" sz="1600" b="0" i="0" u="none" strike="noStrike" baseline="0" dirty="0">
+                <a:solidFill>
+                  <a:srgbClr val="000000"/>
+                </a:solidFill>
+              </a:rPr>
+              <a:t>: an R package for the statistical modelling of animal movement data using hidden Markov models. Methods </a:t>
+            </a:r>
+            <a:r>
+              <a:rPr lang="en-US" sz="1600" b="0" i="0" u="none" strike="noStrike" baseline="0" dirty="0" err="1">
+                <a:solidFill>
+                  <a:srgbClr val="000000"/>
+                </a:solidFill>
+              </a:rPr>
+              <a:t>Ecol</a:t>
+            </a:r>
+            <a:r>
+              <a:rPr lang="en-US" sz="1600" b="0" i="0" u="none" strike="noStrike" baseline="0" dirty="0">
+                <a:solidFill>
+                  <a:srgbClr val="000000"/>
+                </a:solidFill>
+              </a:rPr>
+              <a:t> </a:t>
+            </a:r>
+            <a:r>
+              <a:rPr lang="en-US" sz="1600" b="0" i="0" u="none" strike="noStrike" baseline="0" dirty="0" err="1">
+                <a:solidFill>
+                  <a:srgbClr val="000000"/>
+                </a:solidFill>
+              </a:rPr>
+              <a:t>Evol</a:t>
+            </a:r>
+            <a:r>
+              <a:rPr lang="en-US" sz="1600" b="0" i="0" u="none" strike="noStrike" baseline="0" dirty="0">
+                <a:solidFill>
+                  <a:srgbClr val="000000"/>
+                </a:solidFill>
+              </a:rPr>
+              <a:t>, 7: 1308-1315. </a:t>
+            </a:r>
+            <a:endParaRPr lang="en-US" sz="1600" dirty="0"/>
+          </a:p>
+        </p:txBody>
+      </p:sp>
+      <p:sp>
+        <p:nvSpPr>
+          <p:cNvPr id="4" name="Title 1">
+            <a:extLst>
+              <a:ext uri="{FF2B5EF4-FFF2-40B4-BE49-F238E27FC236}">
+                <a16:creationId xmlns:a16="http://schemas.microsoft.com/office/drawing/2014/main" id="{7399F66D-D444-F92A-B5F9-9B6852FEFDCE}"/>
+              </a:ext>
+            </a:extLst>
+          </p:cNvPr>
+          <p:cNvSpPr txBox="1">
+            <a:spLocks/>
+          </p:cNvSpPr>
+          <p:nvPr/>
+        </p:nvSpPr>
+        <p:spPr>
+          <a:xfrm>
+            <a:off x="496675" y="322824"/>
+            <a:ext cx="10515600" cy="1325563"/>
+          </a:xfrm>
+          <a:prstGeom prst="rect">
+            <a:avLst/>
+          </a:prstGeom>
+        </p:spPr>
+        <p:txBody>
+          <a:bodyPr vert="horz" lIns="91440" tIns="45720" rIns="91440" bIns="45720" rtlCol="0" anchor="ctr">
+            <a:normAutofit/>
+          </a:bodyPr>
+          <a:lstStyle>
+            <a:lvl1pPr algn="l" defTabSz="914400" rtl="0" eaLnBrk="1" latinLnBrk="0" hangingPunct="1">
+              <a:lnSpc>
+                <a:spcPct val="90000"/>
+              </a:lnSpc>
+              <a:spcBef>
+                <a:spcPct val="0"/>
+              </a:spcBef>
+              <a:buNone/>
+              <a:defRPr sz="4400" kern="1200">
+                <a:solidFill>
+                  <a:schemeClr val="tx1"/>
+                </a:solidFill>
+                <a:latin typeface="+mj-lt"/>
+                <a:ea typeface="+mj-ea"/>
+                <a:cs typeface="+mj-cs"/>
+              </a:defRPr>
+            </a:lvl1pPr>
+          </a:lstStyle>
+          <a:p>
+            <a:r>
+              <a:rPr lang="en-US" sz="3200" b="1" dirty="0">
+                <a:solidFill>
+                  <a:srgbClr val="000000"/>
+                </a:solidFill>
+              </a:rPr>
+              <a:t>References</a:t>
+            </a:r>
+            <a:br>
+              <a:rPr lang="en-US" sz="3200" b="1" dirty="0">
+                <a:solidFill>
+                  <a:srgbClr val="000000"/>
+                </a:solidFill>
+              </a:rPr>
+            </a:br>
+            <a:endParaRPr lang="en-US" sz="3200" b="1" dirty="0"/>
+          </a:p>
+        </p:txBody>
+      </p:sp>
+    </p:spTree>
+    <p:extLst>
+      <p:ext uri="{BB962C8B-B14F-4D97-AF65-F5344CB8AC3E}">
+        <p14:creationId xmlns:p14="http://schemas.microsoft.com/office/powerpoint/2010/main" val="2707603935"/>
+      </p:ext>
+    </p:extLst>
+  </p:cSld>
+  <p:clrMapOvr>
+    <a:masterClrMapping/>
+  </p:clrMapOvr>
+</p:sld>
+</file>
+
+<file path=ppt/slides/slide24.xml><?xml version="1.0" encoding="utf-8"?>
 <p:sld xmlns:a="http://schemas.openxmlformats.org/drawingml/2006/main" xmlns:r="http://schemas.openxmlformats.org/officeDocument/2006/relationships" xmlns:p="http://schemas.openxmlformats.org/presentationml/2006/main">
   <p:cSld>
     <p:spTree>
@@ -16249,74 +17280,62 @@
           <a:lstStyle/>
           <a:p>
             <a:r>
-              <a:rPr lang="en-US" sz="2400" b="0" i="0" u="none" strike="noStrike" baseline="0" dirty="0"/>
+              <a:rPr lang="en-US" sz="2000" b="0" i="0" u="none" strike="noStrike" baseline="0" dirty="0"/>
               <a:t>N = # of states</a:t>
             </a:r>
           </a:p>
           <a:p>
             <a:r>
-              <a:rPr lang="en-US" sz="2400" b="0" i="0" u="none" strike="noStrike" baseline="0" dirty="0"/>
-              <a:t>Starting state (typically taken to be equally likely)</a:t>
-            </a:r>
-          </a:p>
-          <a:p>
-            <a:r>
-              <a:rPr lang="en-US" sz="2400" b="0" i="0" u="none" strike="noStrike" baseline="0" dirty="0"/>
+              <a:rPr lang="en-US" sz="2000" b="0" i="0" u="none" strike="noStrike" baseline="0" dirty="0"/>
               <a:t>Distribution of step lengths (for each state) </a:t>
             </a:r>
           </a:p>
           <a:p>
             <a:pPr lvl="1"/>
             <a:r>
-              <a:rPr lang="en-US" sz="1800" b="0" i="0" u="none" strike="noStrike" baseline="0" dirty="0"/>
+              <a:rPr lang="en-US" sz="2000" b="0" i="0" u="none" strike="noStrike" baseline="0" dirty="0"/>
               <a:t>Gamma, Weibull, log-normal and exponential distributions </a:t>
             </a:r>
           </a:p>
           <a:p>
             <a:pPr lvl="1"/>
             <a:r>
-              <a:rPr lang="en-US" sz="1800" b="0" i="0" u="none" strike="noStrike" baseline="0" dirty="0"/>
+              <a:rPr lang="en-US" sz="2000" b="0" i="0" u="none" strike="noStrike" baseline="0" dirty="0"/>
               <a:t>Mean</a:t>
             </a:r>
           </a:p>
           <a:p>
             <a:pPr lvl="1"/>
             <a:r>
-              <a:rPr lang="en-US" sz="1800" b="0" i="0" u="none" strike="noStrike" baseline="0" dirty="0"/>
+              <a:rPr lang="en-US" sz="2000" b="0" i="0" u="none" strike="noStrike" baseline="0" dirty="0"/>
               <a:t>Variance (SD)</a:t>
             </a:r>
           </a:p>
           <a:p>
             <a:r>
-              <a:rPr lang="en-US" sz="2400" b="0" i="0" u="none" strike="noStrike" baseline="0" dirty="0"/>
+              <a:rPr lang="en-US" sz="2000" b="0" i="0" u="none" strike="noStrike" baseline="0" dirty="0"/>
               <a:t>Distribution of turning angles (for each state) </a:t>
             </a:r>
           </a:p>
           <a:p>
             <a:pPr lvl="1"/>
             <a:r>
-              <a:rPr lang="en-US" sz="1800" b="0" i="0" u="none" strike="noStrike" baseline="0" dirty="0"/>
+              <a:rPr lang="en-US" sz="2000" b="0" i="0" u="none" strike="noStrike" baseline="0" dirty="0"/>
               <a:t>von Mises and wrapped Cauchy distributions</a:t>
             </a:r>
           </a:p>
           <a:p>
             <a:pPr lvl="1"/>
             <a:r>
-              <a:rPr lang="en-US" sz="1800" b="0" i="0" u="none" strike="noStrike" baseline="0" dirty="0"/>
+              <a:rPr lang="en-US" sz="2000" b="0" i="0" u="none" strike="noStrike" baseline="0" dirty="0"/>
               <a:t>Mean</a:t>
             </a:r>
           </a:p>
           <a:p>
             <a:pPr lvl="1"/>
             <a:r>
-              <a:rPr lang="en-US" sz="1800" b="0" i="0" u="none" strike="noStrike" baseline="0" dirty="0"/>
+              <a:rPr lang="en-US" sz="2000" b="0" i="0" u="none" strike="noStrike" baseline="0" dirty="0"/>
               <a:t>Clustering parameter</a:t>
-            </a:r>
-          </a:p>
-          <a:p>
-            <a:r>
-              <a:rPr lang="en-US" sz="2400" b="0" i="0" u="none" strike="noStrike" baseline="0" dirty="0"/>
-              <a:t>Transition probability matrix</a:t>
             </a:r>
           </a:p>
         </p:txBody>
@@ -16466,7 +17485,7 @@
           <a:lstStyle/>
           <a:p>
             <a:r>
-              <a:rPr lang="en-US" sz="2400" b="0" i="0" u="none" strike="noStrike" baseline="0" dirty="0">
+              <a:rPr lang="en-US" sz="2000" b="0" i="0" u="none" strike="noStrike" baseline="0" dirty="0">
                 <a:solidFill>
                   <a:srgbClr val="000000"/>
                 </a:solidFill>
@@ -16490,7 +17509,7 @@
           <a:p>
             <a:pPr lvl="2"/>
             <a:r>
-              <a:rPr lang="en-US" sz="1600" b="0" i="0" u="none" strike="noStrike" baseline="0" dirty="0">
+              <a:rPr lang="en-US" b="0" i="0" u="none" strike="noStrike" baseline="0" dirty="0">
                 <a:solidFill>
                   <a:srgbClr val="000000"/>
                 </a:solidFill>
@@ -16498,7 +17517,7 @@
               </a:rPr>
               <a:t>Finds most probable sequence of states that generated the data </a:t>
             </a:r>
-            <a:endParaRPr lang="en-US" sz="1600" dirty="0">
+            <a:endParaRPr lang="en-US" dirty="0">
               <a:solidFill>
                 <a:srgbClr val="000000"/>
               </a:solidFill>
@@ -16506,75 +17525,19 @@
             </a:endParaRPr>
           </a:p>
           <a:p>
-            <a:pPr marL="682625" lvl="2" indent="-220663"/>
-            <a:r>
-              <a:rPr lang="en-US" b="0" i="0" u="none" strike="noStrike" baseline="0" dirty="0">
+            <a:pPr lvl="1"/>
+            <a:r>
+              <a:rPr lang="en-US" sz="2000" b="0" i="0" u="none" strike="noStrike" baseline="0" dirty="0">
                 <a:solidFill>
                   <a:srgbClr val="000000"/>
                 </a:solidFill>
                 <a:latin typeface="Century Gothic" panose="020B0502020202020204" pitchFamily="34" charset="0"/>
               </a:rPr>
-              <a:t>Forward-backward algorithm</a:t>
-            </a:r>
-          </a:p>
-          <a:p>
-            <a:pPr marL="1139825" lvl="3" indent="-220663"/>
-            <a:r>
-              <a:rPr lang="en-US" sz="1600" b="0" i="0" u="none" strike="noStrike" baseline="0" dirty="0">
-                <a:solidFill>
-                  <a:srgbClr val="000000"/>
-                </a:solidFill>
-                <a:latin typeface="Century Gothic" panose="020B0502020202020204" pitchFamily="34" charset="0"/>
-              </a:rPr>
-              <a:t>Computes marginal probability of each state at time </a:t>
-            </a:r>
-            <a:r>
-              <a:rPr lang="en-US" sz="1600" b="0" i="1" u="none" strike="noStrike" baseline="0" dirty="0">
-                <a:solidFill>
-                  <a:srgbClr val="000000"/>
-                </a:solidFill>
-                <a:latin typeface="Century Gothic" panose="020B0502020202020204" pitchFamily="34" charset="0"/>
-              </a:rPr>
-              <a:t>t</a:t>
-            </a:r>
-          </a:p>
-          <a:p>
-            <a:pPr marL="682625" lvl="2" indent="-220663"/>
-            <a:r>
-              <a:rPr lang="en-US" b="0" i="0" u="none" strike="noStrike" baseline="0" dirty="0">
-                <a:solidFill>
-                  <a:srgbClr val="000000"/>
-                </a:solidFill>
-                <a:latin typeface="Century Gothic" panose="020B0502020202020204" pitchFamily="34" charset="0"/>
-              </a:rPr>
-              <a:t>Forward-filtering backward sampling algorithm</a:t>
-            </a:r>
-          </a:p>
-          <a:p>
-            <a:pPr marL="1139825" lvl="3" indent="-220663"/>
-            <a:r>
-              <a:rPr lang="en-US" sz="1600" b="0" i="0" u="none" strike="noStrike" baseline="0" dirty="0">
-                <a:solidFill>
-                  <a:srgbClr val="000000"/>
-                </a:solidFill>
-                <a:latin typeface="Century Gothic" panose="020B0502020202020204" pitchFamily="34" charset="0"/>
-              </a:rPr>
-              <a:t>Generates sequences that could have resulted in observed state</a:t>
-            </a:r>
-          </a:p>
-          <a:p>
-            <a:r>
-              <a:rPr lang="en-US" sz="2400" b="0" i="0" u="none" strike="noStrike" baseline="0" dirty="0">
-                <a:solidFill>
-                  <a:srgbClr val="000000"/>
-                </a:solidFill>
-                <a:latin typeface="Century Gothic" panose="020B0502020202020204" pitchFamily="34" charset="0"/>
-              </a:rPr>
               <a:t>Stationary probabilities available</a:t>
             </a:r>
           </a:p>
           <a:p>
-            <a:endParaRPr lang="en-US" sz="1600" b="0" i="0" u="none" strike="noStrike" baseline="0" dirty="0">
+            <a:endParaRPr lang="en-US" sz="2000" b="0" i="0" u="none" strike="noStrike" baseline="0" dirty="0">
               <a:solidFill>
                 <a:srgbClr val="000000"/>
               </a:solidFill>
@@ -16583,7 +17546,7 @@
           </a:p>
           <a:p>
             <a:r>
-              <a:rPr lang="en-US" sz="2400" b="0" i="0" u="none" strike="noStrike" baseline="0" dirty="0">
+              <a:rPr lang="en-US" sz="2000" b="0" i="0" u="none" strike="noStrike" baseline="0" dirty="0">
                 <a:solidFill>
                   <a:srgbClr val="000000"/>
                 </a:solidFill>
@@ -16617,8 +17580,17 @@
             </a:r>
           </a:p>
           <a:p>
-            <a:r>
-              <a:rPr lang="en-US" sz="2400" b="0" i="0" u="none" strike="noStrike" baseline="0" dirty="0">
+            <a:pPr lvl="1"/>
+            <a:endParaRPr lang="en-US" sz="2000" b="0" i="0" u="none" strike="noStrike" baseline="0" dirty="0">
+              <a:solidFill>
+                <a:srgbClr val="000000"/>
+              </a:solidFill>
+              <a:latin typeface="Century Gothic" panose="020B0502020202020204" pitchFamily="34" charset="0"/>
+            </a:endParaRPr>
+          </a:p>
+          <a:p>
+            <a:r>
+              <a:rPr lang="en-US" sz="2000" b="0" i="0" u="none" strike="noStrike" baseline="0" dirty="0">
                 <a:solidFill>
                   <a:srgbClr val="000000"/>
                 </a:solidFill>
@@ -16626,7 +17598,7 @@
               </a:rPr>
               <a:t>User specifies # of state (&lt;= 4) and models with varying states can be compared with AIC</a:t>
             </a:r>
-            <a:endParaRPr lang="en-US" sz="2400" dirty="0">
+            <a:endParaRPr lang="en-US" sz="2000" dirty="0">
               <a:latin typeface="Century Gothic" panose="020B0502020202020204" pitchFamily="34" charset="0"/>
             </a:endParaRPr>
           </a:p>
